--- a/DocMind_项目汇报.pptx
+++ b/DocMind_项目汇报.pptx
@@ -1688,7 +1688,7 @@
                 <a:ea typeface="Arial" pitchFamily="34" charset="-122"/>
                 <a:cs typeface="Arial" pitchFamily="34" charset="-120"/>
               </a:rPr>
-              <a:t>AGI全栈开发大作业汇报</a:t>
+              <a:t>AGI全栈开发大作业 — 功能测试报告</a:t>
             </a:r>
             <a:endParaRPr lang="en-US" sz="1300" dirty="0"/>
           </a:p>
@@ -1873,7 +1873,7 @@
         <p:spPr>
           <a:xfrm>
             <a:off x="640080" y="1645920"/>
-            <a:ext cx="7863840" cy="640080"/>
+            <a:ext cx="7863840" cy="548640"/>
           </a:xfrm>
           <a:prstGeom prst="rect">
             <a:avLst/>
@@ -1897,7 +1897,7 @@
                 <a:ea typeface="Arial" pitchFamily="34" charset="-122"/>
                 <a:cs typeface="Arial" pitchFamily="34" charset="-120"/>
               </a:rPr>
-              <a:t>DocMind 面向企业办公场景，集文档管理、AI 分析、实时協作、版本控制于一体。支持 10+ 种文件格式，基于 DeepSeek 大模型提供 6 大智能处理能力。</a:t>
+              <a:t>集文档管理、AI 分析、实时协作、版本控制于一体。支持 10+ 种格式，基于 DeepSeek 大模型提供 6 大智能处理能力。</a:t>
             </a:r>
             <a:endParaRPr lang="en-US" sz="1250" dirty="0"/>
           </a:p>
@@ -1911,8 +1911,8 @@
         </p:nvSpPr>
         <p:spPr>
           <a:xfrm>
-            <a:off x="640080" y="2514600"/>
-            <a:ext cx="2468880" cy="1417320"/>
+            <a:off x="640080" y="2423160"/>
+            <a:ext cx="2468880" cy="1188720"/>
           </a:xfrm>
           <a:prstGeom prst="rect">
             <a:avLst/>
@@ -1938,8 +1938,8 @@
         </p:nvSpPr>
         <p:spPr>
           <a:xfrm>
-            <a:off x="640080" y="2624328"/>
-            <a:ext cx="2468880" cy="384048"/>
+            <a:off x="640080" y="2514600"/>
+            <a:ext cx="2468880" cy="320040"/>
           </a:xfrm>
           <a:prstGeom prst="rect">
             <a:avLst/>
@@ -1955,14 +1955,14 @@
               <a:buNone/>
             </a:pPr>
             <a:r>
-              <a:rPr lang="en-US" sz="2200" dirty="0">
+              <a:rPr lang="en-US" sz="2000" dirty="0">
                 <a:solidFill>
                   <a:srgbClr val="000000"/>
                 </a:solidFill>
               </a:rPr>
               <a:t>📄</a:t>
             </a:r>
-            <a:endParaRPr lang="en-US" sz="2200" dirty="0"/>
+            <a:endParaRPr lang="en-US" sz="2000" dirty="0"/>
           </a:p>
         </p:txBody>
       </p:sp>
@@ -1974,8 +1974,8 @@
         </p:nvSpPr>
         <p:spPr>
           <a:xfrm>
-            <a:off x="777240" y="2990088"/>
-            <a:ext cx="2194560" cy="292608"/>
+            <a:off x="777240" y="2834640"/>
+            <a:ext cx="2194560" cy="274320"/>
           </a:xfrm>
           <a:prstGeom prst="rect">
             <a:avLst/>
@@ -1991,7 +1991,7 @@
               <a:buNone/>
             </a:pPr>
             <a:r>
-              <a:rPr lang="en-US" sz="1350" b="1" dirty="0">
+              <a:rPr lang="en-US" sz="1300" b="1" dirty="0">
                 <a:solidFill>
                   <a:srgbClr val="0F172A"/>
                 </a:solidFill>
@@ -2001,7 +2001,7 @@
               </a:rPr>
               <a:t>多格式支持</a:t>
             </a:r>
-            <a:endParaRPr lang="en-US" sz="1350" dirty="0"/>
+            <a:endParaRPr lang="en-US" sz="1300" dirty="0"/>
           </a:p>
         </p:txBody>
       </p:sp>
@@ -2013,8 +2013,8 @@
         </p:nvSpPr>
         <p:spPr>
           <a:xfrm>
-            <a:off x="777240" y="3291840"/>
-            <a:ext cx="2194560" cy="548640"/>
+            <a:off x="777240" y="3108960"/>
+            <a:ext cx="2194560" cy="411480"/>
           </a:xfrm>
           <a:prstGeom prst="rect">
             <a:avLst/>
@@ -2038,7 +2038,7 @@
                 <a:ea typeface="Arial" pitchFamily="34" charset="-122"/>
                 <a:cs typeface="Arial" pitchFamily="34" charset="-120"/>
               </a:rPr>
-              <a:t>PDF/DOCX/PPTX/XLSX 等 10+ 种格式</a:t>
+              <a:t>PDF/DOCX/PPTX/XLSX/MD 等 10+ 种格式</a:t>
             </a:r>
             <a:endParaRPr lang="en-US" sz="1000" dirty="0"/>
           </a:p>
@@ -2052,8 +2052,8 @@
         </p:nvSpPr>
         <p:spPr>
           <a:xfrm>
-            <a:off x="3291840" y="2514600"/>
-            <a:ext cx="2468880" cy="1417320"/>
+            <a:off x="3383280" y="2423160"/>
+            <a:ext cx="2468880" cy="1188720"/>
           </a:xfrm>
           <a:prstGeom prst="rect">
             <a:avLst/>
@@ -2079,8 +2079,8 @@
         </p:nvSpPr>
         <p:spPr>
           <a:xfrm>
-            <a:off x="3291840" y="2624328"/>
-            <a:ext cx="2468880" cy="384048"/>
+            <a:off x="3383280" y="2514600"/>
+            <a:ext cx="2468880" cy="320040"/>
           </a:xfrm>
           <a:prstGeom prst="rect">
             <a:avLst/>
@@ -2096,14 +2096,14 @@
               <a:buNone/>
             </a:pPr>
             <a:r>
-              <a:rPr lang="en-US" sz="2200" dirty="0">
+              <a:rPr lang="en-US" sz="2000" dirty="0">
                 <a:solidFill>
                   <a:srgbClr val="000000"/>
                 </a:solidFill>
               </a:rPr>
               <a:t>🤖</a:t>
             </a:r>
-            <a:endParaRPr lang="en-US" sz="2200" dirty="0"/>
+            <a:endParaRPr lang="en-US" sz="2000" dirty="0"/>
           </a:p>
         </p:txBody>
       </p:sp>
@@ -2115,8 +2115,8 @@
         </p:nvSpPr>
         <p:spPr>
           <a:xfrm>
-            <a:off x="3429000" y="2990088"/>
-            <a:ext cx="2194560" cy="292608"/>
+            <a:off x="3520440" y="2834640"/>
+            <a:ext cx="2194560" cy="274320"/>
           </a:xfrm>
           <a:prstGeom prst="rect">
             <a:avLst/>
@@ -2132,7 +2132,7 @@
               <a:buNone/>
             </a:pPr>
             <a:r>
-              <a:rPr lang="en-US" sz="1350" b="1" dirty="0">
+              <a:rPr lang="en-US" sz="1300" b="1" dirty="0">
                 <a:solidFill>
                   <a:srgbClr val="0F172A"/>
                 </a:solidFill>
@@ -2140,9 +2140,9 @@
                 <a:ea typeface="Arial" pitchFamily="34" charset="-122"/>
                 <a:cs typeface="Arial" pitchFamily="34" charset="-120"/>
               </a:rPr>
-              <a:t>AI 智能分析</a:t>
-            </a:r>
-            <a:endParaRPr lang="en-US" sz="1350" dirty="0"/>
+              <a:t>AI 分析</a:t>
+            </a:r>
+            <a:endParaRPr lang="en-US" sz="1300" dirty="0"/>
           </a:p>
         </p:txBody>
       </p:sp>
@@ -2154,8 +2154,8 @@
         </p:nvSpPr>
         <p:spPr>
           <a:xfrm>
-            <a:off x="3429000" y="3291840"/>
-            <a:ext cx="2194560" cy="548640"/>
+            <a:off x="3520440" y="3108960"/>
+            <a:ext cx="2194560" cy="411480"/>
           </a:xfrm>
           <a:prstGeom prst="rect">
             <a:avLst/>
@@ -2193,8 +2193,8 @@
         </p:nvSpPr>
         <p:spPr>
           <a:xfrm>
-            <a:off x="5943600" y="2514600"/>
-            <a:ext cx="2468880" cy="1417320"/>
+            <a:off x="6126480" y="2423160"/>
+            <a:ext cx="2468880" cy="1188720"/>
           </a:xfrm>
           <a:prstGeom prst="rect">
             <a:avLst/>
@@ -2220,8 +2220,8 @@
         </p:nvSpPr>
         <p:spPr>
           <a:xfrm>
-            <a:off x="5943600" y="2624328"/>
-            <a:ext cx="2468880" cy="384048"/>
+            <a:off x="6126480" y="2514600"/>
+            <a:ext cx="2468880" cy="320040"/>
           </a:xfrm>
           <a:prstGeom prst="rect">
             <a:avLst/>
@@ -2237,14 +2237,14 @@
               <a:buNone/>
             </a:pPr>
             <a:r>
-              <a:rPr lang="en-US" sz="2200" dirty="0">
+              <a:rPr lang="en-US" sz="2000" dirty="0">
                 <a:solidFill>
                   <a:srgbClr val="000000"/>
                 </a:solidFill>
               </a:rPr>
               <a:t>👥</a:t>
             </a:r>
-            <a:endParaRPr lang="en-US" sz="2200" dirty="0"/>
+            <a:endParaRPr lang="en-US" sz="2000" dirty="0"/>
           </a:p>
         </p:txBody>
       </p:sp>
@@ -2256,8 +2256,8 @@
         </p:nvSpPr>
         <p:spPr>
           <a:xfrm>
-            <a:off x="6080760" y="2990088"/>
-            <a:ext cx="2194560" cy="292608"/>
+            <a:off x="6263640" y="2834640"/>
+            <a:ext cx="2194560" cy="274320"/>
           </a:xfrm>
           <a:prstGeom prst="rect">
             <a:avLst/>
@@ -2273,7 +2273,7 @@
               <a:buNone/>
             </a:pPr>
             <a:r>
-              <a:rPr lang="en-US" sz="1350" b="1" dirty="0">
+              <a:rPr lang="en-US" sz="1300" b="1" dirty="0">
                 <a:solidFill>
                   <a:srgbClr val="0F172A"/>
                 </a:solidFill>
@@ -2281,9 +2281,9 @@
                 <a:ea typeface="Arial" pitchFamily="34" charset="-122"/>
                 <a:cs typeface="Arial" pitchFamily="34" charset="-120"/>
               </a:rPr>
-              <a:t>实时協作</a:t>
-            </a:r>
-            <a:endParaRPr lang="en-US" sz="1350" dirty="0"/>
+              <a:t>实时协作</a:t>
+            </a:r>
+            <a:endParaRPr lang="en-US" sz="1300" dirty="0"/>
           </a:p>
         </p:txBody>
       </p:sp>
@@ -2295,8 +2295,8 @@
         </p:nvSpPr>
         <p:spPr>
           <a:xfrm>
-            <a:off x="6080760" y="3291840"/>
-            <a:ext cx="2194560" cy="548640"/>
+            <a:off x="6263640" y="3108960"/>
+            <a:ext cx="2194560" cy="411480"/>
           </a:xfrm>
           <a:prstGeom prst="rect">
             <a:avLst/>
@@ -2320,7 +2320,7 @@
                 <a:ea typeface="Arial" pitchFamily="34" charset="-122"/>
                 <a:cs typeface="Arial" pitchFamily="34" charset="-120"/>
               </a:rPr>
-              <a:t>WebSocket 多人协同编辑与权限管理</a:t>
+              <a:t>WebSocket 协同编辑与权限管理</a:t>
             </a:r>
             <a:endParaRPr lang="en-US" sz="1000" dirty="0"/>
           </a:p>
@@ -2334,8 +2334,8 @@
         </p:nvSpPr>
         <p:spPr>
           <a:xfrm>
-            <a:off x="640080" y="4096512"/>
-            <a:ext cx="2468880" cy="1417320"/>
+            <a:off x="640080" y="3840480"/>
+            <a:ext cx="2468880" cy="1188720"/>
           </a:xfrm>
           <a:prstGeom prst="rect">
             <a:avLst/>
@@ -2361,8 +2361,8 @@
         </p:nvSpPr>
         <p:spPr>
           <a:xfrm>
-            <a:off x="640080" y="4206240"/>
-            <a:ext cx="2468880" cy="384048"/>
+            <a:off x="640080" y="3931920"/>
+            <a:ext cx="2468880" cy="320040"/>
           </a:xfrm>
           <a:prstGeom prst="rect">
             <a:avLst/>
@@ -2378,14 +2378,14 @@
               <a:buNone/>
             </a:pPr>
             <a:r>
-              <a:rPr lang="en-US" sz="2200" dirty="0">
+              <a:rPr lang="en-US" sz="2000" dirty="0">
                 <a:solidFill>
                   <a:srgbClr val="000000"/>
                 </a:solidFill>
               </a:rPr>
               <a:t>📝</a:t>
             </a:r>
-            <a:endParaRPr lang="en-US" sz="2200" dirty="0"/>
+            <a:endParaRPr lang="en-US" sz="2000" dirty="0"/>
           </a:p>
         </p:txBody>
       </p:sp>
@@ -2397,8 +2397,8 @@
         </p:nvSpPr>
         <p:spPr>
           <a:xfrm>
-            <a:off x="777240" y="4572000"/>
-            <a:ext cx="2194560" cy="292608"/>
+            <a:off x="777240" y="4251960"/>
+            <a:ext cx="2194560" cy="274320"/>
           </a:xfrm>
           <a:prstGeom prst="rect">
             <a:avLst/>
@@ -2414,7 +2414,7 @@
               <a:buNone/>
             </a:pPr>
             <a:r>
-              <a:rPr lang="en-US" sz="1350" b="1" dirty="0">
+              <a:rPr lang="en-US" sz="1300" b="1" dirty="0">
                 <a:solidFill>
                   <a:srgbClr val="0F172A"/>
                 </a:solidFill>
@@ -2424,7 +2424,7 @@
               </a:rPr>
               <a:t>版本控制</a:t>
             </a:r>
-            <a:endParaRPr lang="en-US" sz="1350" dirty="0"/>
+            <a:endParaRPr lang="en-US" sz="1300" dirty="0"/>
           </a:p>
         </p:txBody>
       </p:sp>
@@ -2436,8 +2436,8 @@
         </p:nvSpPr>
         <p:spPr>
           <a:xfrm>
-            <a:off x="777240" y="4873752"/>
-            <a:ext cx="2194560" cy="548640"/>
+            <a:off x="777240" y="4526280"/>
+            <a:ext cx="2194560" cy="411480"/>
           </a:xfrm>
           <a:prstGeom prst="rect">
             <a:avLst/>
@@ -2461,7 +2461,7 @@
                 <a:ea typeface="Arial" pitchFamily="34" charset="-122"/>
                 <a:cs typeface="Arial" pitchFamily="34" charset="-120"/>
               </a:rPr>
-              <a:t>完整历史记录、Diff 对比、一键恢复</a:t>
+              <a:t>历史记录、Diff 对比、一键恢复</a:t>
             </a:r>
             <a:endParaRPr lang="en-US" sz="1000" dirty="0"/>
           </a:p>
@@ -2475,8 +2475,8 @@
         </p:nvSpPr>
         <p:spPr>
           <a:xfrm>
-            <a:off x="3291840" y="4096512"/>
-            <a:ext cx="2468880" cy="1417320"/>
+            <a:off x="3383280" y="3840480"/>
+            <a:ext cx="2468880" cy="1188720"/>
           </a:xfrm>
           <a:prstGeom prst="rect">
             <a:avLst/>
@@ -2502,8 +2502,8 @@
         </p:nvSpPr>
         <p:spPr>
           <a:xfrm>
-            <a:off x="3291840" y="4206240"/>
-            <a:ext cx="2468880" cy="384048"/>
+            <a:off x="3383280" y="3931920"/>
+            <a:ext cx="2468880" cy="320040"/>
           </a:xfrm>
           <a:prstGeom prst="rect">
             <a:avLst/>
@@ -2519,14 +2519,14 @@
               <a:buNone/>
             </a:pPr>
             <a:r>
-              <a:rPr lang="en-US" sz="2200" dirty="0">
+              <a:rPr lang="en-US" sz="2000" dirty="0">
                 <a:solidFill>
                   <a:srgbClr val="000000"/>
                 </a:solidFill>
               </a:rPr>
               <a:t>🔗</a:t>
             </a:r>
-            <a:endParaRPr lang="en-US" sz="2200" dirty="0"/>
+            <a:endParaRPr lang="en-US" sz="2000" dirty="0"/>
           </a:p>
         </p:txBody>
       </p:sp>
@@ -2538,8 +2538,8 @@
         </p:nvSpPr>
         <p:spPr>
           <a:xfrm>
-            <a:off x="3429000" y="4572000"/>
-            <a:ext cx="2194560" cy="292608"/>
+            <a:off x="3520440" y="4251960"/>
+            <a:ext cx="2194560" cy="274320"/>
           </a:xfrm>
           <a:prstGeom prst="rect">
             <a:avLst/>
@@ -2555,7 +2555,7 @@
               <a:buNone/>
             </a:pPr>
             <a:r>
-              <a:rPr lang="en-US" sz="1350" b="1" dirty="0">
+              <a:rPr lang="en-US" sz="1300" b="1" dirty="0">
                 <a:solidFill>
                   <a:srgbClr val="0F172A"/>
                 </a:solidFill>
@@ -2565,7 +2565,7 @@
               </a:rPr>
               <a:t>GitHub 集成</a:t>
             </a:r>
-            <a:endParaRPr lang="en-US" sz="1350" dirty="0"/>
+            <a:endParaRPr lang="en-US" sz="1300" dirty="0"/>
           </a:p>
         </p:txBody>
       </p:sp>
@@ -2577,8 +2577,8 @@
         </p:nvSpPr>
         <p:spPr>
           <a:xfrm>
-            <a:off x="3429000" y="4873752"/>
-            <a:ext cx="2194560" cy="548640"/>
+            <a:off x="3520440" y="4526280"/>
+            <a:ext cx="2194560" cy="411480"/>
           </a:xfrm>
           <a:prstGeom prst="rect">
             <a:avLst/>
@@ -2616,8 +2616,8 @@
         </p:nvSpPr>
         <p:spPr>
           <a:xfrm>
-            <a:off x="5943600" y="4096512"/>
-            <a:ext cx="2468880" cy="1417320"/>
+            <a:off x="6126480" y="3840480"/>
+            <a:ext cx="2468880" cy="1188720"/>
           </a:xfrm>
           <a:prstGeom prst="rect">
             <a:avLst/>
@@ -2643,8 +2643,8 @@
         </p:nvSpPr>
         <p:spPr>
           <a:xfrm>
-            <a:off x="5943600" y="4206240"/>
-            <a:ext cx="2468880" cy="384048"/>
+            <a:off x="6126480" y="3931920"/>
+            <a:ext cx="2468880" cy="320040"/>
           </a:xfrm>
           <a:prstGeom prst="rect">
             <a:avLst/>
@@ -2660,14 +2660,14 @@
               <a:buNone/>
             </a:pPr>
             <a:r>
-              <a:rPr lang="en-US" sz="2200" dirty="0">
+              <a:rPr lang="en-US" sz="2000" dirty="0">
                 <a:solidFill>
                   <a:srgbClr val="000000"/>
                 </a:solidFill>
               </a:rPr>
               <a:t>⚡</a:t>
             </a:r>
-            <a:endParaRPr lang="en-US" sz="2200" dirty="0"/>
+            <a:endParaRPr lang="en-US" sz="2000" dirty="0"/>
           </a:p>
         </p:txBody>
       </p:sp>
@@ -2679,8 +2679,8 @@
         </p:nvSpPr>
         <p:spPr>
           <a:xfrm>
-            <a:off x="6080760" y="4572000"/>
-            <a:ext cx="2194560" cy="292608"/>
+            <a:off x="6263640" y="4251960"/>
+            <a:ext cx="2194560" cy="274320"/>
           </a:xfrm>
           <a:prstGeom prst="rect">
             <a:avLst/>
@@ -2696,7 +2696,7 @@
               <a:buNone/>
             </a:pPr>
             <a:r>
-              <a:rPr lang="en-US" sz="1350" b="1" dirty="0">
+              <a:rPr lang="en-US" sz="1300" b="1" dirty="0">
                 <a:solidFill>
                   <a:srgbClr val="0F172A"/>
                 </a:solidFill>
@@ -2706,7 +2706,7 @@
               </a:rPr>
               <a:t>异步处理</a:t>
             </a:r>
-            <a:endParaRPr lang="en-US" sz="1350" dirty="0"/>
+            <a:endParaRPr lang="en-US" sz="1300" dirty="0"/>
           </a:p>
         </p:txBody>
       </p:sp>
@@ -2718,8 +2718,8 @@
         </p:nvSpPr>
         <p:spPr>
           <a:xfrm>
-            <a:off x="6080760" y="4873752"/>
-            <a:ext cx="2194560" cy="548640"/>
+            <a:off x="6263640" y="4526280"/>
+            <a:ext cx="2194560" cy="411480"/>
           </a:xfrm>
           <a:prstGeom prst="rect">
             <a:avLst/>
@@ -2743,7 +2743,7 @@
                 <a:ea typeface="Arial" pitchFamily="34" charset="-122"/>
                 <a:cs typeface="Arial" pitchFamily="34" charset="-120"/>
               </a:rPr>
-              <a:t>Celery 分布式队列，大文档异步处理</a:t>
+              <a:t>Celery 队列，大文档异步处理</a:t>
             </a:r>
             <a:endParaRPr lang="en-US" sz="1000" dirty="0"/>
           </a:p>
@@ -2826,7 +2826,7 @@
               <a:buNone/>
             </a:pPr>
             <a:r>
-              <a:rPr lang="en-US" sz="3200" b="1" dirty="0">
+              <a:rPr lang="en-US" sz="2800" b="1" dirty="0">
                 <a:solidFill>
                   <a:srgbClr val="0F172A"/>
                 </a:solidFill>
@@ -2834,9 +2834,9 @@
                 <a:ea typeface="Arial Black" pitchFamily="34" charset="-122"/>
                 <a:cs typeface="Arial Black" pitchFamily="34" charset="-120"/>
               </a:rPr>
-              <a:t>技术栈</a:t>
-            </a:r>
-            <a:endParaRPr lang="en-US" sz="3200" dirty="0"/>
+              <a:t>功能测试 — 3 种格式 × 6 项能力</a:t>
+            </a:r>
+            <a:endParaRPr lang="en-US" sz="2800" dirty="0"/>
           </a:p>
         </p:txBody>
       </p:sp>
@@ -2868,8 +2868,244 @@
         </p:nvSpPr>
         <p:spPr>
           <a:xfrm>
-            <a:off x="640080" y="1280160"/>
-            <a:ext cx="7863840" cy="512064"/>
+            <a:off x="457200" y="1188720"/>
+            <a:ext cx="2011680" cy="365760"/>
+          </a:xfrm>
+          <a:prstGeom prst="rect">
+            <a:avLst/>
+          </a:prstGeom>
+          <a:solidFill>
+            <a:srgbClr val="2563EB"/>
+          </a:solidFill>
+          <a:ln/>
+        </p:spPr>
+      </p:sp>
+      <p:sp>
+        <p:nvSpPr>
+          <p:cNvPr id="6" name="Text 4"/>
+          <p:cNvSpPr/>
+          <p:nvPr/>
+        </p:nvSpPr>
+        <p:spPr>
+          <a:xfrm>
+            <a:off x="457200" y="1188720"/>
+            <a:ext cx="2011680" cy="365760"/>
+          </a:xfrm>
+          <a:prstGeom prst="rect">
+            <a:avLst/>
+          </a:prstGeom>
+          <a:noFill/>
+          <a:ln/>
+        </p:spPr>
+        <p:txBody>
+          <a:bodyPr wrap="square" lIns="0" tIns="0" rIns="0" bIns="0" rtlCol="0" anchor="ctr"/>
+          <a:lstStyle/>
+          <a:p>
+            <a:pPr algn="ctr" indent="0" marL="0">
+              <a:buNone/>
+            </a:pPr>
+            <a:r>
+              <a:rPr lang="en-US" sz="1100" b="1" dirty="0">
+                <a:solidFill>
+                  <a:srgbClr val="FFFFFF"/>
+                </a:solidFill>
+                <a:latin typeface="Arial" pitchFamily="34" charset="0"/>
+                <a:ea typeface="Arial" pitchFamily="34" charset="-122"/>
+                <a:cs typeface="Arial" pitchFamily="34" charset="-120"/>
+              </a:rPr>
+              <a:t>测试项</a:t>
+            </a:r>
+            <a:endParaRPr lang="en-US" sz="1100" dirty="0"/>
+          </a:p>
+        </p:txBody>
+      </p:sp>
+      <p:sp>
+        <p:nvSpPr>
+          <p:cNvPr id="7" name="Shape 5"/>
+          <p:cNvSpPr/>
+          <p:nvPr/>
+        </p:nvSpPr>
+        <p:spPr>
+          <a:xfrm>
+            <a:off x="2560320" y="1188720"/>
+            <a:ext cx="2011680" cy="365760"/>
+          </a:xfrm>
+          <a:prstGeom prst="rect">
+            <a:avLst/>
+          </a:prstGeom>
+          <a:solidFill>
+            <a:srgbClr val="2563EB"/>
+          </a:solidFill>
+          <a:ln/>
+        </p:spPr>
+      </p:sp>
+      <p:sp>
+        <p:nvSpPr>
+          <p:cNvPr id="8" name="Text 6"/>
+          <p:cNvSpPr/>
+          <p:nvPr/>
+        </p:nvSpPr>
+        <p:spPr>
+          <a:xfrm>
+            <a:off x="2560320" y="1188720"/>
+            <a:ext cx="2011680" cy="365760"/>
+          </a:xfrm>
+          <a:prstGeom prst="rect">
+            <a:avLst/>
+          </a:prstGeom>
+          <a:noFill/>
+          <a:ln/>
+        </p:spPr>
+        <p:txBody>
+          <a:bodyPr wrap="square" lIns="0" tIns="0" rIns="0" bIns="0" rtlCol="0" anchor="ctr"/>
+          <a:lstStyle/>
+          <a:p>
+            <a:pPr algn="ctr" indent="0" marL="0">
+              <a:buNone/>
+            </a:pPr>
+            <a:r>
+              <a:rPr lang="en-US" sz="1100" b="1" dirty="0">
+                <a:solidFill>
+                  <a:srgbClr val="FFFFFF"/>
+                </a:solidFill>
+                <a:latin typeface="Arial" pitchFamily="34" charset="0"/>
+                <a:ea typeface="Arial" pitchFamily="34" charset="-122"/>
+                <a:cs typeface="Arial" pitchFamily="34" charset="-120"/>
+              </a:rPr>
+              <a:t>DOCX (10KB)</a:t>
+            </a:r>
+            <a:endParaRPr lang="en-US" sz="1100" dirty="0"/>
+          </a:p>
+        </p:txBody>
+      </p:sp>
+      <p:sp>
+        <p:nvSpPr>
+          <p:cNvPr id="9" name="Shape 7"/>
+          <p:cNvSpPr/>
+          <p:nvPr/>
+        </p:nvSpPr>
+        <p:spPr>
+          <a:xfrm>
+            <a:off x="4663440" y="1188720"/>
+            <a:ext cx="2011680" cy="365760"/>
+          </a:xfrm>
+          <a:prstGeom prst="rect">
+            <a:avLst/>
+          </a:prstGeom>
+          <a:solidFill>
+            <a:srgbClr val="2563EB"/>
+          </a:solidFill>
+          <a:ln/>
+        </p:spPr>
+      </p:sp>
+      <p:sp>
+        <p:nvSpPr>
+          <p:cNvPr id="10" name="Text 8"/>
+          <p:cNvSpPr/>
+          <p:nvPr/>
+        </p:nvSpPr>
+        <p:spPr>
+          <a:xfrm>
+            <a:off x="4663440" y="1188720"/>
+            <a:ext cx="2011680" cy="365760"/>
+          </a:xfrm>
+          <a:prstGeom prst="rect">
+            <a:avLst/>
+          </a:prstGeom>
+          <a:noFill/>
+          <a:ln/>
+        </p:spPr>
+        <p:txBody>
+          <a:bodyPr wrap="square" lIns="0" tIns="0" rIns="0" bIns="0" rtlCol="0" anchor="ctr"/>
+          <a:lstStyle/>
+          <a:p>
+            <a:pPr algn="ctr" indent="0" marL="0">
+              <a:buNone/>
+            </a:pPr>
+            <a:r>
+              <a:rPr lang="en-US" sz="1100" b="1" dirty="0">
+                <a:solidFill>
+                  <a:srgbClr val="FFFFFF"/>
+                </a:solidFill>
+                <a:latin typeface="Arial" pitchFamily="34" charset="0"/>
+                <a:ea typeface="Arial" pitchFamily="34" charset="-122"/>
+                <a:cs typeface="Arial" pitchFamily="34" charset="-120"/>
+              </a:rPr>
+              <a:t>MD (7.5KB)</a:t>
+            </a:r>
+            <a:endParaRPr lang="en-US" sz="1100" dirty="0"/>
+          </a:p>
+        </p:txBody>
+      </p:sp>
+      <p:sp>
+        <p:nvSpPr>
+          <p:cNvPr id="11" name="Shape 9"/>
+          <p:cNvSpPr/>
+          <p:nvPr/>
+        </p:nvSpPr>
+        <p:spPr>
+          <a:xfrm>
+            <a:off x="6766560" y="1188720"/>
+            <a:ext cx="2011680" cy="365760"/>
+          </a:xfrm>
+          <a:prstGeom prst="rect">
+            <a:avLst/>
+          </a:prstGeom>
+          <a:solidFill>
+            <a:srgbClr val="2563EB"/>
+          </a:solidFill>
+          <a:ln/>
+        </p:spPr>
+      </p:sp>
+      <p:sp>
+        <p:nvSpPr>
+          <p:cNvPr id="12" name="Text 10"/>
+          <p:cNvSpPr/>
+          <p:nvPr/>
+        </p:nvSpPr>
+        <p:spPr>
+          <a:xfrm>
+            <a:off x="6766560" y="1188720"/>
+            <a:ext cx="2011680" cy="365760"/>
+          </a:xfrm>
+          <a:prstGeom prst="rect">
+            <a:avLst/>
+          </a:prstGeom>
+          <a:noFill/>
+          <a:ln/>
+        </p:spPr>
+        <p:txBody>
+          <a:bodyPr wrap="square" lIns="0" tIns="0" rIns="0" bIns="0" rtlCol="0" anchor="ctr"/>
+          <a:lstStyle/>
+          <a:p>
+            <a:pPr algn="ctr" indent="0" marL="0">
+              <a:buNone/>
+            </a:pPr>
+            <a:r>
+              <a:rPr lang="en-US" sz="1100" b="1" dirty="0">
+                <a:solidFill>
+                  <a:srgbClr val="FFFFFF"/>
+                </a:solidFill>
+                <a:latin typeface="Arial" pitchFamily="34" charset="0"/>
+                <a:ea typeface="Arial" pitchFamily="34" charset="-122"/>
+                <a:cs typeface="Arial" pitchFamily="34" charset="-120"/>
+              </a:rPr>
+              <a:t>PDF (418KB)</a:t>
+            </a:r>
+            <a:endParaRPr lang="en-US" sz="1100" dirty="0"/>
+          </a:p>
+        </p:txBody>
+      </p:sp>
+      <p:sp>
+        <p:nvSpPr>
+          <p:cNvPr id="13" name="Shape 11"/>
+          <p:cNvSpPr/>
+          <p:nvPr/>
+        </p:nvSpPr>
+        <p:spPr>
+          <a:xfrm>
+            <a:off x="457200" y="1645920"/>
+            <a:ext cx="2011680" cy="365760"/>
           </a:xfrm>
           <a:prstGeom prst="rect">
             <a:avLst/>
@@ -2882,50 +3118,1426 @@
       </p:sp>
       <p:sp>
         <p:nvSpPr>
-          <p:cNvPr id="6" name="Shape 4"/>
-          <p:cNvSpPr/>
-          <p:nvPr/>
-        </p:nvSpPr>
-        <p:spPr>
-          <a:xfrm>
-            <a:off x="640080" y="1280160"/>
-            <a:ext cx="54864" cy="512064"/>
-          </a:xfrm>
-          <a:prstGeom prst="rect">
-            <a:avLst/>
-          </a:prstGeom>
-          <a:solidFill>
-            <a:srgbClr val="028090"/>
-          </a:solidFill>
-          <a:ln/>
-        </p:spPr>
-      </p:sp>
-      <p:sp>
-        <p:nvSpPr>
-          <p:cNvPr id="7" name="Text 5"/>
-          <p:cNvSpPr/>
-          <p:nvPr/>
-        </p:nvSpPr>
-        <p:spPr>
-          <a:xfrm>
-            <a:off x="914400" y="1280160"/>
-            <a:ext cx="1005840" cy="512064"/>
-          </a:xfrm>
-          <a:prstGeom prst="rect">
-            <a:avLst/>
-          </a:prstGeom>
-          <a:noFill/>
-          <a:ln/>
-        </p:spPr>
-        <p:txBody>
-          <a:bodyPr wrap="square" lIns="0" tIns="0" rIns="0" bIns="0" rtlCol="0" anchor="ctr"/>
-          <a:lstStyle/>
-          <a:p>
-            <a:pPr indent="0" marL="0">
-              <a:buNone/>
-            </a:pPr>
-            <a:r>
-              <a:rPr lang="en-US" sz="1200" b="1" dirty="0">
+          <p:cNvPr id="14" name="Text 12"/>
+          <p:cNvSpPr/>
+          <p:nvPr/>
+        </p:nvSpPr>
+        <p:spPr>
+          <a:xfrm>
+            <a:off x="457200" y="1645920"/>
+            <a:ext cx="2011680" cy="365760"/>
+          </a:xfrm>
+          <a:prstGeom prst="rect">
+            <a:avLst/>
+          </a:prstGeom>
+          <a:noFill/>
+          <a:ln/>
+        </p:spPr>
+        <p:txBody>
+          <a:bodyPr wrap="square" lIns="0" tIns="0" rIns="0" bIns="0" rtlCol="0" anchor="ctr"/>
+          <a:lstStyle/>
+          <a:p>
+            <a:pPr algn="ctr" indent="0" marL="0">
+              <a:buNone/>
+            </a:pPr>
+            <a:r>
+              <a:rPr lang="en-US" sz="1000" b="1" dirty="0">
+                <a:solidFill>
+                  <a:srgbClr val="0F172A"/>
+                </a:solidFill>
+                <a:latin typeface="Arial" pitchFamily="34" charset="0"/>
+                <a:ea typeface="Arial" pitchFamily="34" charset="-122"/>
+                <a:cs typeface="Arial" pitchFamily="34" charset="-120"/>
+              </a:rPr>
+              <a:t>上传解析</a:t>
+            </a:r>
+            <a:endParaRPr lang="en-US" sz="1000" dirty="0"/>
+          </a:p>
+        </p:txBody>
+      </p:sp>
+      <p:sp>
+        <p:nvSpPr>
+          <p:cNvPr id="15" name="Shape 13"/>
+          <p:cNvSpPr/>
+          <p:nvPr/>
+        </p:nvSpPr>
+        <p:spPr>
+          <a:xfrm>
+            <a:off x="2560320" y="1645920"/>
+            <a:ext cx="2011680" cy="365760"/>
+          </a:xfrm>
+          <a:prstGeom prst="rect">
+            <a:avLst/>
+          </a:prstGeom>
+          <a:solidFill>
+            <a:srgbClr val="F8FAFC"/>
+          </a:solidFill>
+          <a:ln/>
+        </p:spPr>
+      </p:sp>
+      <p:sp>
+        <p:nvSpPr>
+          <p:cNvPr id="16" name="Text 14"/>
+          <p:cNvSpPr/>
+          <p:nvPr/>
+        </p:nvSpPr>
+        <p:spPr>
+          <a:xfrm>
+            <a:off x="2560320" y="1645920"/>
+            <a:ext cx="2011680" cy="365760"/>
+          </a:xfrm>
+          <a:prstGeom prst="rect">
+            <a:avLst/>
+          </a:prstGeom>
+          <a:noFill/>
+          <a:ln/>
+        </p:spPr>
+        <p:txBody>
+          <a:bodyPr wrap="square" lIns="0" tIns="0" rIns="0" bIns="0" rtlCol="0" anchor="ctr"/>
+          <a:lstStyle/>
+          <a:p>
+            <a:pPr algn="ctr" indent="0" marL="0">
+              <a:buNone/>
+            </a:pPr>
+            <a:r>
+              <a:rPr lang="en-US" sz="1000" dirty="0">
+                <a:solidFill>
+                  <a:srgbClr val="64748B"/>
+                </a:solidFill>
+                <a:latin typeface="Arial" pitchFamily="34" charset="0"/>
+                <a:ea typeface="Arial" pitchFamily="34" charset="-122"/>
+                <a:cs typeface="Arial" pitchFamily="34" charset="-120"/>
+              </a:rPr>
+              <a:t>✅ 2,697 字</a:t>
+            </a:r>
+            <a:endParaRPr lang="en-US" sz="1000" dirty="0"/>
+          </a:p>
+        </p:txBody>
+      </p:sp>
+      <p:sp>
+        <p:nvSpPr>
+          <p:cNvPr id="17" name="Shape 15"/>
+          <p:cNvSpPr/>
+          <p:nvPr/>
+        </p:nvSpPr>
+        <p:spPr>
+          <a:xfrm>
+            <a:off x="4663440" y="1645920"/>
+            <a:ext cx="2011680" cy="365760"/>
+          </a:xfrm>
+          <a:prstGeom prst="rect">
+            <a:avLst/>
+          </a:prstGeom>
+          <a:solidFill>
+            <a:srgbClr val="F8FAFC"/>
+          </a:solidFill>
+          <a:ln/>
+        </p:spPr>
+      </p:sp>
+      <p:sp>
+        <p:nvSpPr>
+          <p:cNvPr id="18" name="Text 16"/>
+          <p:cNvSpPr/>
+          <p:nvPr/>
+        </p:nvSpPr>
+        <p:spPr>
+          <a:xfrm>
+            <a:off x="4663440" y="1645920"/>
+            <a:ext cx="2011680" cy="365760"/>
+          </a:xfrm>
+          <a:prstGeom prst="rect">
+            <a:avLst/>
+          </a:prstGeom>
+          <a:noFill/>
+          <a:ln/>
+        </p:spPr>
+        <p:txBody>
+          <a:bodyPr wrap="square" lIns="0" tIns="0" rIns="0" bIns="0" rtlCol="0" anchor="ctr"/>
+          <a:lstStyle/>
+          <a:p>
+            <a:pPr algn="ctr" indent="0" marL="0">
+              <a:buNone/>
+            </a:pPr>
+            <a:r>
+              <a:rPr lang="en-US" sz="1000" dirty="0">
+                <a:solidFill>
+                  <a:srgbClr val="64748B"/>
+                </a:solidFill>
+                <a:latin typeface="Arial" pitchFamily="34" charset="0"/>
+                <a:ea typeface="Arial" pitchFamily="34" charset="-122"/>
+                <a:cs typeface="Arial" pitchFamily="34" charset="-120"/>
+              </a:rPr>
+              <a:t>✅ 3,007 字</a:t>
+            </a:r>
+            <a:endParaRPr lang="en-US" sz="1000" dirty="0"/>
+          </a:p>
+        </p:txBody>
+      </p:sp>
+      <p:sp>
+        <p:nvSpPr>
+          <p:cNvPr id="19" name="Shape 17"/>
+          <p:cNvSpPr/>
+          <p:nvPr/>
+        </p:nvSpPr>
+        <p:spPr>
+          <a:xfrm>
+            <a:off x="6766560" y="1645920"/>
+            <a:ext cx="2011680" cy="365760"/>
+          </a:xfrm>
+          <a:prstGeom prst="rect">
+            <a:avLst/>
+          </a:prstGeom>
+          <a:solidFill>
+            <a:srgbClr val="F8FAFC"/>
+          </a:solidFill>
+          <a:ln/>
+        </p:spPr>
+      </p:sp>
+      <p:sp>
+        <p:nvSpPr>
+          <p:cNvPr id="20" name="Text 18"/>
+          <p:cNvSpPr/>
+          <p:nvPr/>
+        </p:nvSpPr>
+        <p:spPr>
+          <a:xfrm>
+            <a:off x="6766560" y="1645920"/>
+            <a:ext cx="2011680" cy="365760"/>
+          </a:xfrm>
+          <a:prstGeom prst="rect">
+            <a:avLst/>
+          </a:prstGeom>
+          <a:noFill/>
+          <a:ln/>
+        </p:spPr>
+        <p:txBody>
+          <a:bodyPr wrap="square" lIns="0" tIns="0" rIns="0" bIns="0" rtlCol="0" anchor="ctr"/>
+          <a:lstStyle/>
+          <a:p>
+            <a:pPr algn="ctr" indent="0" marL="0">
+              <a:buNone/>
+            </a:pPr>
+            <a:r>
+              <a:rPr lang="en-US" sz="1000" dirty="0">
+                <a:solidFill>
+                  <a:srgbClr val="64748B"/>
+                </a:solidFill>
+                <a:latin typeface="Arial" pitchFamily="34" charset="0"/>
+                <a:ea typeface="Arial" pitchFamily="34" charset="-122"/>
+                <a:cs typeface="Arial" pitchFamily="34" charset="-120"/>
+              </a:rPr>
+              <a:t>✅ 2,793 字</a:t>
+            </a:r>
+            <a:endParaRPr lang="en-US" sz="1000" dirty="0"/>
+          </a:p>
+        </p:txBody>
+      </p:sp>
+      <p:sp>
+        <p:nvSpPr>
+          <p:cNvPr id="21" name="Shape 19"/>
+          <p:cNvSpPr/>
+          <p:nvPr/>
+        </p:nvSpPr>
+        <p:spPr>
+          <a:xfrm>
+            <a:off x="457200" y="2103120"/>
+            <a:ext cx="2011680" cy="365760"/>
+          </a:xfrm>
+          <a:prstGeom prst="rect">
+            <a:avLst/>
+          </a:prstGeom>
+          <a:solidFill>
+            <a:srgbClr val="FFFFFF"/>
+          </a:solidFill>
+          <a:ln/>
+        </p:spPr>
+      </p:sp>
+      <p:sp>
+        <p:nvSpPr>
+          <p:cNvPr id="22" name="Text 20"/>
+          <p:cNvSpPr/>
+          <p:nvPr/>
+        </p:nvSpPr>
+        <p:spPr>
+          <a:xfrm>
+            <a:off x="457200" y="2103120"/>
+            <a:ext cx="2011680" cy="365760"/>
+          </a:xfrm>
+          <a:prstGeom prst="rect">
+            <a:avLst/>
+          </a:prstGeom>
+          <a:noFill/>
+          <a:ln/>
+        </p:spPr>
+        <p:txBody>
+          <a:bodyPr wrap="square" lIns="0" tIns="0" rIns="0" bIns="0" rtlCol="0" anchor="ctr"/>
+          <a:lstStyle/>
+          <a:p>
+            <a:pPr algn="ctr" indent="0" marL="0">
+              <a:buNone/>
+            </a:pPr>
+            <a:r>
+              <a:rPr lang="en-US" sz="1000" b="1" dirty="0">
+                <a:solidFill>
+                  <a:srgbClr val="0F172A"/>
+                </a:solidFill>
+                <a:latin typeface="Arial" pitchFamily="34" charset="0"/>
+                <a:ea typeface="Arial" pitchFamily="34" charset="-122"/>
+                <a:cs typeface="Arial" pitchFamily="34" charset="-120"/>
+              </a:rPr>
+              <a:t>AI 校对</a:t>
+            </a:r>
+            <a:endParaRPr lang="en-US" sz="1000" dirty="0"/>
+          </a:p>
+        </p:txBody>
+      </p:sp>
+      <p:sp>
+        <p:nvSpPr>
+          <p:cNvPr id="23" name="Shape 21"/>
+          <p:cNvSpPr/>
+          <p:nvPr/>
+        </p:nvSpPr>
+        <p:spPr>
+          <a:xfrm>
+            <a:off x="2560320" y="2103120"/>
+            <a:ext cx="2011680" cy="365760"/>
+          </a:xfrm>
+          <a:prstGeom prst="rect">
+            <a:avLst/>
+          </a:prstGeom>
+          <a:solidFill>
+            <a:srgbClr val="FFFFFF"/>
+          </a:solidFill>
+          <a:ln/>
+        </p:spPr>
+      </p:sp>
+      <p:sp>
+        <p:nvSpPr>
+          <p:cNvPr id="24" name="Text 22"/>
+          <p:cNvSpPr/>
+          <p:nvPr/>
+        </p:nvSpPr>
+        <p:spPr>
+          <a:xfrm>
+            <a:off x="2560320" y="2103120"/>
+            <a:ext cx="2011680" cy="365760"/>
+          </a:xfrm>
+          <a:prstGeom prst="rect">
+            <a:avLst/>
+          </a:prstGeom>
+          <a:noFill/>
+          <a:ln/>
+        </p:spPr>
+        <p:txBody>
+          <a:bodyPr wrap="square" lIns="0" tIns="0" rIns="0" bIns="0" rtlCol="0" anchor="ctr"/>
+          <a:lstStyle/>
+          <a:p>
+            <a:pPr algn="ctr" indent="0" marL="0">
+              <a:buNone/>
+            </a:pPr>
+            <a:r>
+              <a:rPr lang="en-US" sz="1000" dirty="0">
+                <a:solidFill>
+                  <a:srgbClr val="64748B"/>
+                </a:solidFill>
+                <a:latin typeface="Arial" pitchFamily="34" charset="0"/>
+                <a:ea typeface="Arial" pitchFamily="34" charset="-122"/>
+                <a:cs typeface="Arial" pitchFamily="34" charset="-120"/>
+              </a:rPr>
+              <a:t>✅ 2,762 字</a:t>
+            </a:r>
+            <a:endParaRPr lang="en-US" sz="1000" dirty="0"/>
+          </a:p>
+        </p:txBody>
+      </p:sp>
+      <p:sp>
+        <p:nvSpPr>
+          <p:cNvPr id="25" name="Shape 23"/>
+          <p:cNvSpPr/>
+          <p:nvPr/>
+        </p:nvSpPr>
+        <p:spPr>
+          <a:xfrm>
+            <a:off x="4663440" y="2103120"/>
+            <a:ext cx="2011680" cy="365760"/>
+          </a:xfrm>
+          <a:prstGeom prst="rect">
+            <a:avLst/>
+          </a:prstGeom>
+          <a:solidFill>
+            <a:srgbClr val="FFFFFF"/>
+          </a:solidFill>
+          <a:ln/>
+        </p:spPr>
+      </p:sp>
+      <p:sp>
+        <p:nvSpPr>
+          <p:cNvPr id="26" name="Text 24"/>
+          <p:cNvSpPr/>
+          <p:nvPr/>
+        </p:nvSpPr>
+        <p:spPr>
+          <a:xfrm>
+            <a:off x="4663440" y="2103120"/>
+            <a:ext cx="2011680" cy="365760"/>
+          </a:xfrm>
+          <a:prstGeom prst="rect">
+            <a:avLst/>
+          </a:prstGeom>
+          <a:noFill/>
+          <a:ln/>
+        </p:spPr>
+        <p:txBody>
+          <a:bodyPr wrap="square" lIns="0" tIns="0" rIns="0" bIns="0" rtlCol="0" anchor="ctr"/>
+          <a:lstStyle/>
+          <a:p>
+            <a:pPr algn="ctr" indent="0" marL="0">
+              <a:buNone/>
+            </a:pPr>
+            <a:r>
+              <a:rPr lang="en-US" sz="1000" dirty="0">
+                <a:solidFill>
+                  <a:srgbClr val="64748B"/>
+                </a:solidFill>
+                <a:latin typeface="Arial" pitchFamily="34" charset="0"/>
+                <a:ea typeface="Arial" pitchFamily="34" charset="-122"/>
+                <a:cs typeface="Arial" pitchFamily="34" charset="-120"/>
+              </a:rPr>
+              <a:t>✅ 3,041 字</a:t>
+            </a:r>
+            <a:endParaRPr lang="en-US" sz="1000" dirty="0"/>
+          </a:p>
+        </p:txBody>
+      </p:sp>
+      <p:sp>
+        <p:nvSpPr>
+          <p:cNvPr id="27" name="Shape 25"/>
+          <p:cNvSpPr/>
+          <p:nvPr/>
+        </p:nvSpPr>
+        <p:spPr>
+          <a:xfrm>
+            <a:off x="6766560" y="2103120"/>
+            <a:ext cx="2011680" cy="365760"/>
+          </a:xfrm>
+          <a:prstGeom prst="rect">
+            <a:avLst/>
+          </a:prstGeom>
+          <a:solidFill>
+            <a:srgbClr val="FFFFFF"/>
+          </a:solidFill>
+          <a:ln/>
+        </p:spPr>
+      </p:sp>
+      <p:sp>
+        <p:nvSpPr>
+          <p:cNvPr id="28" name="Text 26"/>
+          <p:cNvSpPr/>
+          <p:nvPr/>
+        </p:nvSpPr>
+        <p:spPr>
+          <a:xfrm>
+            <a:off x="6766560" y="2103120"/>
+            <a:ext cx="2011680" cy="365760"/>
+          </a:xfrm>
+          <a:prstGeom prst="rect">
+            <a:avLst/>
+          </a:prstGeom>
+          <a:noFill/>
+          <a:ln/>
+        </p:spPr>
+        <p:txBody>
+          <a:bodyPr wrap="square" lIns="0" tIns="0" rIns="0" bIns="0" rtlCol="0" anchor="ctr"/>
+          <a:lstStyle/>
+          <a:p>
+            <a:pPr algn="ctr" indent="0" marL="0">
+              <a:buNone/>
+            </a:pPr>
+            <a:r>
+              <a:rPr lang="en-US" sz="1000" dirty="0">
+                <a:solidFill>
+                  <a:srgbClr val="64748B"/>
+                </a:solidFill>
+                <a:latin typeface="Arial" pitchFamily="34" charset="0"/>
+                <a:ea typeface="Arial" pitchFamily="34" charset="-122"/>
+                <a:cs typeface="Arial" pitchFamily="34" charset="-120"/>
+              </a:rPr>
+              <a:t>✅ 2,877 字</a:t>
+            </a:r>
+            <a:endParaRPr lang="en-US" sz="1000" dirty="0"/>
+          </a:p>
+        </p:txBody>
+      </p:sp>
+      <p:sp>
+        <p:nvSpPr>
+          <p:cNvPr id="29" name="Shape 27"/>
+          <p:cNvSpPr/>
+          <p:nvPr/>
+        </p:nvSpPr>
+        <p:spPr>
+          <a:xfrm>
+            <a:off x="457200" y="2560320"/>
+            <a:ext cx="2011680" cy="365760"/>
+          </a:xfrm>
+          <a:prstGeom prst="rect">
+            <a:avLst/>
+          </a:prstGeom>
+          <a:solidFill>
+            <a:srgbClr val="F8FAFC"/>
+          </a:solidFill>
+          <a:ln/>
+        </p:spPr>
+      </p:sp>
+      <p:sp>
+        <p:nvSpPr>
+          <p:cNvPr id="30" name="Text 28"/>
+          <p:cNvSpPr/>
+          <p:nvPr/>
+        </p:nvSpPr>
+        <p:spPr>
+          <a:xfrm>
+            <a:off x="457200" y="2560320"/>
+            <a:ext cx="2011680" cy="365760"/>
+          </a:xfrm>
+          <a:prstGeom prst="rect">
+            <a:avLst/>
+          </a:prstGeom>
+          <a:noFill/>
+          <a:ln/>
+        </p:spPr>
+        <p:txBody>
+          <a:bodyPr wrap="square" lIns="0" tIns="0" rIns="0" bIns="0" rtlCol="0" anchor="ctr"/>
+          <a:lstStyle/>
+          <a:p>
+            <a:pPr algn="ctr" indent="0" marL="0">
+              <a:buNone/>
+            </a:pPr>
+            <a:r>
+              <a:rPr lang="en-US" sz="1000" b="1" dirty="0">
+                <a:solidFill>
+                  <a:srgbClr val="0F172A"/>
+                </a:solidFill>
+                <a:latin typeface="Arial" pitchFamily="34" charset="0"/>
+                <a:ea typeface="Arial" pitchFamily="34" charset="-122"/>
+                <a:cs typeface="Arial" pitchFamily="34" charset="-120"/>
+              </a:rPr>
+              <a:t>AI 摘要</a:t>
+            </a:r>
+            <a:endParaRPr lang="en-US" sz="1000" dirty="0"/>
+          </a:p>
+        </p:txBody>
+      </p:sp>
+      <p:sp>
+        <p:nvSpPr>
+          <p:cNvPr id="31" name="Shape 29"/>
+          <p:cNvSpPr/>
+          <p:nvPr/>
+        </p:nvSpPr>
+        <p:spPr>
+          <a:xfrm>
+            <a:off x="2560320" y="2560320"/>
+            <a:ext cx="2011680" cy="365760"/>
+          </a:xfrm>
+          <a:prstGeom prst="rect">
+            <a:avLst/>
+          </a:prstGeom>
+          <a:solidFill>
+            <a:srgbClr val="F8FAFC"/>
+          </a:solidFill>
+          <a:ln/>
+        </p:spPr>
+      </p:sp>
+      <p:sp>
+        <p:nvSpPr>
+          <p:cNvPr id="32" name="Text 30"/>
+          <p:cNvSpPr/>
+          <p:nvPr/>
+        </p:nvSpPr>
+        <p:spPr>
+          <a:xfrm>
+            <a:off x="2560320" y="2560320"/>
+            <a:ext cx="2011680" cy="365760"/>
+          </a:xfrm>
+          <a:prstGeom prst="rect">
+            <a:avLst/>
+          </a:prstGeom>
+          <a:noFill/>
+          <a:ln/>
+        </p:spPr>
+        <p:txBody>
+          <a:bodyPr wrap="square" lIns="0" tIns="0" rIns="0" bIns="0" rtlCol="0" anchor="ctr"/>
+          <a:lstStyle/>
+          <a:p>
+            <a:pPr algn="ctr" indent="0" marL="0">
+              <a:buNone/>
+            </a:pPr>
+            <a:r>
+              <a:rPr lang="en-US" sz="1000" dirty="0">
+                <a:solidFill>
+                  <a:srgbClr val="64748B"/>
+                </a:solidFill>
+                <a:latin typeface="Arial" pitchFamily="34" charset="0"/>
+                <a:ea typeface="Arial" pitchFamily="34" charset="-122"/>
+                <a:cs typeface="Arial" pitchFamily="34" charset="-120"/>
+              </a:rPr>
+              <a:t>✅ 685 字</a:t>
+            </a:r>
+            <a:endParaRPr lang="en-US" sz="1000" dirty="0"/>
+          </a:p>
+        </p:txBody>
+      </p:sp>
+      <p:sp>
+        <p:nvSpPr>
+          <p:cNvPr id="33" name="Shape 31"/>
+          <p:cNvSpPr/>
+          <p:nvPr/>
+        </p:nvSpPr>
+        <p:spPr>
+          <a:xfrm>
+            <a:off x="4663440" y="2560320"/>
+            <a:ext cx="2011680" cy="365760"/>
+          </a:xfrm>
+          <a:prstGeom prst="rect">
+            <a:avLst/>
+          </a:prstGeom>
+          <a:solidFill>
+            <a:srgbClr val="F8FAFC"/>
+          </a:solidFill>
+          <a:ln/>
+        </p:spPr>
+      </p:sp>
+      <p:sp>
+        <p:nvSpPr>
+          <p:cNvPr id="34" name="Text 32"/>
+          <p:cNvSpPr/>
+          <p:nvPr/>
+        </p:nvSpPr>
+        <p:spPr>
+          <a:xfrm>
+            <a:off x="4663440" y="2560320"/>
+            <a:ext cx="2011680" cy="365760"/>
+          </a:xfrm>
+          <a:prstGeom prst="rect">
+            <a:avLst/>
+          </a:prstGeom>
+          <a:noFill/>
+          <a:ln/>
+        </p:spPr>
+        <p:txBody>
+          <a:bodyPr wrap="square" lIns="0" tIns="0" rIns="0" bIns="0" rtlCol="0" anchor="ctr"/>
+          <a:lstStyle/>
+          <a:p>
+            <a:pPr algn="ctr" indent="0" marL="0">
+              <a:buNone/>
+            </a:pPr>
+            <a:r>
+              <a:rPr lang="en-US" sz="1000" dirty="0">
+                <a:solidFill>
+                  <a:srgbClr val="64748B"/>
+                </a:solidFill>
+                <a:latin typeface="Arial" pitchFamily="34" charset="0"/>
+                <a:ea typeface="Arial" pitchFamily="34" charset="-122"/>
+                <a:cs typeface="Arial" pitchFamily="34" charset="-120"/>
+              </a:rPr>
+              <a:t>✅ 655 字</a:t>
+            </a:r>
+            <a:endParaRPr lang="en-US" sz="1000" dirty="0"/>
+          </a:p>
+        </p:txBody>
+      </p:sp>
+      <p:sp>
+        <p:nvSpPr>
+          <p:cNvPr id="35" name="Shape 33"/>
+          <p:cNvSpPr/>
+          <p:nvPr/>
+        </p:nvSpPr>
+        <p:spPr>
+          <a:xfrm>
+            <a:off x="6766560" y="2560320"/>
+            <a:ext cx="2011680" cy="365760"/>
+          </a:xfrm>
+          <a:prstGeom prst="rect">
+            <a:avLst/>
+          </a:prstGeom>
+          <a:solidFill>
+            <a:srgbClr val="F8FAFC"/>
+          </a:solidFill>
+          <a:ln/>
+        </p:spPr>
+      </p:sp>
+      <p:sp>
+        <p:nvSpPr>
+          <p:cNvPr id="36" name="Text 34"/>
+          <p:cNvSpPr/>
+          <p:nvPr/>
+        </p:nvSpPr>
+        <p:spPr>
+          <a:xfrm>
+            <a:off x="6766560" y="2560320"/>
+            <a:ext cx="2011680" cy="365760"/>
+          </a:xfrm>
+          <a:prstGeom prst="rect">
+            <a:avLst/>
+          </a:prstGeom>
+          <a:noFill/>
+          <a:ln/>
+        </p:spPr>
+        <p:txBody>
+          <a:bodyPr wrap="square" lIns="0" tIns="0" rIns="0" bIns="0" rtlCol="0" anchor="ctr"/>
+          <a:lstStyle/>
+          <a:p>
+            <a:pPr algn="ctr" indent="0" marL="0">
+              <a:buNone/>
+            </a:pPr>
+            <a:r>
+              <a:rPr lang="en-US" sz="1000" dirty="0">
+                <a:solidFill>
+                  <a:srgbClr val="64748B"/>
+                </a:solidFill>
+                <a:latin typeface="Arial" pitchFamily="34" charset="0"/>
+                <a:ea typeface="Arial" pitchFamily="34" charset="-122"/>
+                <a:cs typeface="Arial" pitchFamily="34" charset="-120"/>
+              </a:rPr>
+              <a:t>✅ 733 字</a:t>
+            </a:r>
+            <a:endParaRPr lang="en-US" sz="1000" dirty="0"/>
+          </a:p>
+        </p:txBody>
+      </p:sp>
+      <p:sp>
+        <p:nvSpPr>
+          <p:cNvPr id="37" name="Shape 35"/>
+          <p:cNvSpPr/>
+          <p:nvPr/>
+        </p:nvSpPr>
+        <p:spPr>
+          <a:xfrm>
+            <a:off x="457200" y="3017520"/>
+            <a:ext cx="2011680" cy="365760"/>
+          </a:xfrm>
+          <a:prstGeom prst="rect">
+            <a:avLst/>
+          </a:prstGeom>
+          <a:solidFill>
+            <a:srgbClr val="FFFFFF"/>
+          </a:solidFill>
+          <a:ln/>
+        </p:spPr>
+      </p:sp>
+      <p:sp>
+        <p:nvSpPr>
+          <p:cNvPr id="38" name="Text 36"/>
+          <p:cNvSpPr/>
+          <p:nvPr/>
+        </p:nvSpPr>
+        <p:spPr>
+          <a:xfrm>
+            <a:off x="457200" y="3017520"/>
+            <a:ext cx="2011680" cy="365760"/>
+          </a:xfrm>
+          <a:prstGeom prst="rect">
+            <a:avLst/>
+          </a:prstGeom>
+          <a:noFill/>
+          <a:ln/>
+        </p:spPr>
+        <p:txBody>
+          <a:bodyPr wrap="square" lIns="0" tIns="0" rIns="0" bIns="0" rtlCol="0" anchor="ctr"/>
+          <a:lstStyle/>
+          <a:p>
+            <a:pPr algn="ctr" indent="0" marL="0">
+              <a:buNone/>
+            </a:pPr>
+            <a:r>
+              <a:rPr lang="en-US" sz="1000" b="1" dirty="0">
+                <a:solidFill>
+                  <a:srgbClr val="0F172A"/>
+                </a:solidFill>
+                <a:latin typeface="Arial" pitchFamily="34" charset="0"/>
+                <a:ea typeface="Arial" pitchFamily="34" charset="-122"/>
+                <a:cs typeface="Arial" pitchFamily="34" charset="-120"/>
+              </a:rPr>
+              <a:t>AI 重写</a:t>
+            </a:r>
+            <a:endParaRPr lang="en-US" sz="1000" dirty="0"/>
+          </a:p>
+        </p:txBody>
+      </p:sp>
+      <p:sp>
+        <p:nvSpPr>
+          <p:cNvPr id="39" name="Shape 37"/>
+          <p:cNvSpPr/>
+          <p:nvPr/>
+        </p:nvSpPr>
+        <p:spPr>
+          <a:xfrm>
+            <a:off x="2560320" y="3017520"/>
+            <a:ext cx="2011680" cy="365760"/>
+          </a:xfrm>
+          <a:prstGeom prst="rect">
+            <a:avLst/>
+          </a:prstGeom>
+          <a:solidFill>
+            <a:srgbClr val="FFFFFF"/>
+          </a:solidFill>
+          <a:ln/>
+        </p:spPr>
+      </p:sp>
+      <p:sp>
+        <p:nvSpPr>
+          <p:cNvPr id="40" name="Text 38"/>
+          <p:cNvSpPr/>
+          <p:nvPr/>
+        </p:nvSpPr>
+        <p:spPr>
+          <a:xfrm>
+            <a:off x="2560320" y="3017520"/>
+            <a:ext cx="2011680" cy="365760"/>
+          </a:xfrm>
+          <a:prstGeom prst="rect">
+            <a:avLst/>
+          </a:prstGeom>
+          <a:noFill/>
+          <a:ln/>
+        </p:spPr>
+        <p:txBody>
+          <a:bodyPr wrap="square" lIns="0" tIns="0" rIns="0" bIns="0" rtlCol="0" anchor="ctr"/>
+          <a:lstStyle/>
+          <a:p>
+            <a:pPr algn="ctr" indent="0" marL="0">
+              <a:buNone/>
+            </a:pPr>
+            <a:r>
+              <a:rPr lang="en-US" sz="1000" dirty="0">
+                <a:solidFill>
+                  <a:srgbClr val="64748B"/>
+                </a:solidFill>
+                <a:latin typeface="Arial" pitchFamily="34" charset="0"/>
+                <a:ea typeface="Arial" pitchFamily="34" charset="-122"/>
+                <a:cs typeface="Arial" pitchFamily="34" charset="-120"/>
+              </a:rPr>
+              <a:t>✅ 882 字</a:t>
+            </a:r>
+            <a:endParaRPr lang="en-US" sz="1000" dirty="0"/>
+          </a:p>
+        </p:txBody>
+      </p:sp>
+      <p:sp>
+        <p:nvSpPr>
+          <p:cNvPr id="41" name="Shape 39"/>
+          <p:cNvSpPr/>
+          <p:nvPr/>
+        </p:nvSpPr>
+        <p:spPr>
+          <a:xfrm>
+            <a:off x="4663440" y="3017520"/>
+            <a:ext cx="2011680" cy="365760"/>
+          </a:xfrm>
+          <a:prstGeom prst="rect">
+            <a:avLst/>
+          </a:prstGeom>
+          <a:solidFill>
+            <a:srgbClr val="FFFFFF"/>
+          </a:solidFill>
+          <a:ln/>
+        </p:spPr>
+      </p:sp>
+      <p:sp>
+        <p:nvSpPr>
+          <p:cNvPr id="42" name="Text 40"/>
+          <p:cNvSpPr/>
+          <p:nvPr/>
+        </p:nvSpPr>
+        <p:spPr>
+          <a:xfrm>
+            <a:off x="4663440" y="3017520"/>
+            <a:ext cx="2011680" cy="365760"/>
+          </a:xfrm>
+          <a:prstGeom prst="rect">
+            <a:avLst/>
+          </a:prstGeom>
+          <a:noFill/>
+          <a:ln/>
+        </p:spPr>
+        <p:txBody>
+          <a:bodyPr wrap="square" lIns="0" tIns="0" rIns="0" bIns="0" rtlCol="0" anchor="ctr"/>
+          <a:lstStyle/>
+          <a:p>
+            <a:pPr algn="ctr" indent="0" marL="0">
+              <a:buNone/>
+            </a:pPr>
+            <a:r>
+              <a:rPr lang="en-US" sz="1000" dirty="0">
+                <a:solidFill>
+                  <a:srgbClr val="64748B"/>
+                </a:solidFill>
+                <a:latin typeface="Arial" pitchFamily="34" charset="0"/>
+                <a:ea typeface="Arial" pitchFamily="34" charset="-122"/>
+                <a:cs typeface="Arial" pitchFamily="34" charset="-120"/>
+              </a:rPr>
+              <a:t>✅ 2,422 字</a:t>
+            </a:r>
+            <a:endParaRPr lang="en-US" sz="1000" dirty="0"/>
+          </a:p>
+        </p:txBody>
+      </p:sp>
+      <p:sp>
+        <p:nvSpPr>
+          <p:cNvPr id="43" name="Shape 41"/>
+          <p:cNvSpPr/>
+          <p:nvPr/>
+        </p:nvSpPr>
+        <p:spPr>
+          <a:xfrm>
+            <a:off x="6766560" y="3017520"/>
+            <a:ext cx="2011680" cy="365760"/>
+          </a:xfrm>
+          <a:prstGeom prst="rect">
+            <a:avLst/>
+          </a:prstGeom>
+          <a:solidFill>
+            <a:srgbClr val="FFFFFF"/>
+          </a:solidFill>
+          <a:ln/>
+        </p:spPr>
+      </p:sp>
+      <p:sp>
+        <p:nvSpPr>
+          <p:cNvPr id="44" name="Text 42"/>
+          <p:cNvSpPr/>
+          <p:nvPr/>
+        </p:nvSpPr>
+        <p:spPr>
+          <a:xfrm>
+            <a:off x="6766560" y="3017520"/>
+            <a:ext cx="2011680" cy="365760"/>
+          </a:xfrm>
+          <a:prstGeom prst="rect">
+            <a:avLst/>
+          </a:prstGeom>
+          <a:noFill/>
+          <a:ln/>
+        </p:spPr>
+        <p:txBody>
+          <a:bodyPr wrap="square" lIns="0" tIns="0" rIns="0" bIns="0" rtlCol="0" anchor="ctr"/>
+          <a:lstStyle/>
+          <a:p>
+            <a:pPr algn="ctr" indent="0" marL="0">
+              <a:buNone/>
+            </a:pPr>
+            <a:r>
+              <a:rPr lang="en-US" sz="1000" dirty="0">
+                <a:solidFill>
+                  <a:srgbClr val="64748B"/>
+                </a:solidFill>
+                <a:latin typeface="Arial" pitchFamily="34" charset="0"/>
+                <a:ea typeface="Arial" pitchFamily="34" charset="-122"/>
+                <a:cs typeface="Arial" pitchFamily="34" charset="-120"/>
+              </a:rPr>
+              <a:t>✅ 4,276 字</a:t>
+            </a:r>
+            <a:endParaRPr lang="en-US" sz="1000" dirty="0"/>
+          </a:p>
+        </p:txBody>
+      </p:sp>
+      <p:sp>
+        <p:nvSpPr>
+          <p:cNvPr id="45" name="Shape 43"/>
+          <p:cNvSpPr/>
+          <p:nvPr/>
+        </p:nvSpPr>
+        <p:spPr>
+          <a:xfrm>
+            <a:off x="457200" y="3474720"/>
+            <a:ext cx="2011680" cy="365760"/>
+          </a:xfrm>
+          <a:prstGeom prst="rect">
+            <a:avLst/>
+          </a:prstGeom>
+          <a:solidFill>
+            <a:srgbClr val="F8FAFC"/>
+          </a:solidFill>
+          <a:ln/>
+        </p:spPr>
+      </p:sp>
+      <p:sp>
+        <p:nvSpPr>
+          <p:cNvPr id="46" name="Text 44"/>
+          <p:cNvSpPr/>
+          <p:nvPr/>
+        </p:nvSpPr>
+        <p:spPr>
+          <a:xfrm>
+            <a:off x="457200" y="3474720"/>
+            <a:ext cx="2011680" cy="365760"/>
+          </a:xfrm>
+          <a:prstGeom prst="rect">
+            <a:avLst/>
+          </a:prstGeom>
+          <a:noFill/>
+          <a:ln/>
+        </p:spPr>
+        <p:txBody>
+          <a:bodyPr wrap="square" lIns="0" tIns="0" rIns="0" bIns="0" rtlCol="0" anchor="ctr"/>
+          <a:lstStyle/>
+          <a:p>
+            <a:pPr algn="ctr" indent="0" marL="0">
+              <a:buNone/>
+            </a:pPr>
+            <a:r>
+              <a:rPr lang="en-US" sz="1000" b="1" dirty="0">
+                <a:solidFill>
+                  <a:srgbClr val="0F172A"/>
+                </a:solidFill>
+                <a:latin typeface="Arial" pitchFamily="34" charset="0"/>
+                <a:ea typeface="Arial" pitchFamily="34" charset="-122"/>
+                <a:cs typeface="Arial" pitchFamily="34" charset="-120"/>
+              </a:rPr>
+              <a:t>版本管理</a:t>
+            </a:r>
+            <a:endParaRPr lang="en-US" sz="1000" dirty="0"/>
+          </a:p>
+        </p:txBody>
+      </p:sp>
+      <p:sp>
+        <p:nvSpPr>
+          <p:cNvPr id="47" name="Shape 45"/>
+          <p:cNvSpPr/>
+          <p:nvPr/>
+        </p:nvSpPr>
+        <p:spPr>
+          <a:xfrm>
+            <a:off x="2560320" y="3474720"/>
+            <a:ext cx="2011680" cy="365760"/>
+          </a:xfrm>
+          <a:prstGeom prst="rect">
+            <a:avLst/>
+          </a:prstGeom>
+          <a:solidFill>
+            <a:srgbClr val="F8FAFC"/>
+          </a:solidFill>
+          <a:ln/>
+        </p:spPr>
+      </p:sp>
+      <p:sp>
+        <p:nvSpPr>
+          <p:cNvPr id="48" name="Text 46"/>
+          <p:cNvSpPr/>
+          <p:nvPr/>
+        </p:nvSpPr>
+        <p:spPr>
+          <a:xfrm>
+            <a:off x="2560320" y="3474720"/>
+            <a:ext cx="2011680" cy="365760"/>
+          </a:xfrm>
+          <a:prstGeom prst="rect">
+            <a:avLst/>
+          </a:prstGeom>
+          <a:noFill/>
+          <a:ln/>
+        </p:spPr>
+        <p:txBody>
+          <a:bodyPr wrap="square" lIns="0" tIns="0" rIns="0" bIns="0" rtlCol="0" anchor="ctr"/>
+          <a:lstStyle/>
+          <a:p>
+            <a:pPr algn="ctr" indent="0" marL="0">
+              <a:buNone/>
+            </a:pPr>
+            <a:r>
+              <a:rPr lang="en-US" sz="1000" dirty="0">
+                <a:solidFill>
+                  <a:srgbClr val="64748B"/>
+                </a:solidFill>
+                <a:latin typeface="Arial" pitchFamily="34" charset="0"/>
+                <a:ea typeface="Arial" pitchFamily="34" charset="-122"/>
+                <a:cs typeface="Arial" pitchFamily="34" charset="-120"/>
+              </a:rPr>
+              <a:t>✅ 2 版本</a:t>
+            </a:r>
+            <a:endParaRPr lang="en-US" sz="1000" dirty="0"/>
+          </a:p>
+        </p:txBody>
+      </p:sp>
+      <p:sp>
+        <p:nvSpPr>
+          <p:cNvPr id="49" name="Shape 47"/>
+          <p:cNvSpPr/>
+          <p:nvPr/>
+        </p:nvSpPr>
+        <p:spPr>
+          <a:xfrm>
+            <a:off x="4663440" y="3474720"/>
+            <a:ext cx="2011680" cy="365760"/>
+          </a:xfrm>
+          <a:prstGeom prst="rect">
+            <a:avLst/>
+          </a:prstGeom>
+          <a:solidFill>
+            <a:srgbClr val="F8FAFC"/>
+          </a:solidFill>
+          <a:ln/>
+        </p:spPr>
+      </p:sp>
+      <p:sp>
+        <p:nvSpPr>
+          <p:cNvPr id="50" name="Text 48"/>
+          <p:cNvSpPr/>
+          <p:nvPr/>
+        </p:nvSpPr>
+        <p:spPr>
+          <a:xfrm>
+            <a:off x="4663440" y="3474720"/>
+            <a:ext cx="2011680" cy="365760"/>
+          </a:xfrm>
+          <a:prstGeom prst="rect">
+            <a:avLst/>
+          </a:prstGeom>
+          <a:noFill/>
+          <a:ln/>
+        </p:spPr>
+        <p:txBody>
+          <a:bodyPr wrap="square" lIns="0" tIns="0" rIns="0" bIns="0" rtlCol="0" anchor="ctr"/>
+          <a:lstStyle/>
+          <a:p>
+            <a:pPr algn="ctr" indent="0" marL="0">
+              <a:buNone/>
+            </a:pPr>
+            <a:r>
+              <a:rPr lang="en-US" sz="1000" dirty="0">
+                <a:solidFill>
+                  <a:srgbClr val="64748B"/>
+                </a:solidFill>
+                <a:latin typeface="Arial" pitchFamily="34" charset="0"/>
+                <a:ea typeface="Arial" pitchFamily="34" charset="-122"/>
+                <a:cs typeface="Arial" pitchFamily="34" charset="-120"/>
+              </a:rPr>
+              <a:t>✅ 2 版本</a:t>
+            </a:r>
+            <a:endParaRPr lang="en-US" sz="1000" dirty="0"/>
+          </a:p>
+        </p:txBody>
+      </p:sp>
+      <p:sp>
+        <p:nvSpPr>
+          <p:cNvPr id="51" name="Shape 49"/>
+          <p:cNvSpPr/>
+          <p:nvPr/>
+        </p:nvSpPr>
+        <p:spPr>
+          <a:xfrm>
+            <a:off x="6766560" y="3474720"/>
+            <a:ext cx="2011680" cy="365760"/>
+          </a:xfrm>
+          <a:prstGeom prst="rect">
+            <a:avLst/>
+          </a:prstGeom>
+          <a:solidFill>
+            <a:srgbClr val="F8FAFC"/>
+          </a:solidFill>
+          <a:ln/>
+        </p:spPr>
+      </p:sp>
+      <p:sp>
+        <p:nvSpPr>
+          <p:cNvPr id="52" name="Text 50"/>
+          <p:cNvSpPr/>
+          <p:nvPr/>
+        </p:nvSpPr>
+        <p:spPr>
+          <a:xfrm>
+            <a:off x="6766560" y="3474720"/>
+            <a:ext cx="2011680" cy="365760"/>
+          </a:xfrm>
+          <a:prstGeom prst="rect">
+            <a:avLst/>
+          </a:prstGeom>
+          <a:noFill/>
+          <a:ln/>
+        </p:spPr>
+        <p:txBody>
+          <a:bodyPr wrap="square" lIns="0" tIns="0" rIns="0" bIns="0" rtlCol="0" anchor="ctr"/>
+          <a:lstStyle/>
+          <a:p>
+            <a:pPr algn="ctr" indent="0" marL="0">
+              <a:buNone/>
+            </a:pPr>
+            <a:r>
+              <a:rPr lang="en-US" sz="1000" dirty="0">
+                <a:solidFill>
+                  <a:srgbClr val="64748B"/>
+                </a:solidFill>
+                <a:latin typeface="Arial" pitchFamily="34" charset="0"/>
+                <a:ea typeface="Arial" pitchFamily="34" charset="-122"/>
+                <a:cs typeface="Arial" pitchFamily="34" charset="-120"/>
+              </a:rPr>
+              <a:t>✅ 2 版本</a:t>
+            </a:r>
+            <a:endParaRPr lang="en-US" sz="1000" dirty="0"/>
+          </a:p>
+        </p:txBody>
+      </p:sp>
+      <p:sp>
+        <p:nvSpPr>
+          <p:cNvPr id="53" name="Shape 51"/>
+          <p:cNvSpPr/>
+          <p:nvPr/>
+        </p:nvSpPr>
+        <p:spPr>
+          <a:xfrm>
+            <a:off x="457200" y="3931920"/>
+            <a:ext cx="2011680" cy="365760"/>
+          </a:xfrm>
+          <a:prstGeom prst="rect">
+            <a:avLst/>
+          </a:prstGeom>
+          <a:solidFill>
+            <a:srgbClr val="FFFFFF"/>
+          </a:solidFill>
+          <a:ln/>
+        </p:spPr>
+      </p:sp>
+      <p:sp>
+        <p:nvSpPr>
+          <p:cNvPr id="54" name="Text 52"/>
+          <p:cNvSpPr/>
+          <p:nvPr/>
+        </p:nvSpPr>
+        <p:spPr>
+          <a:xfrm>
+            <a:off x="457200" y="3931920"/>
+            <a:ext cx="2011680" cy="365760"/>
+          </a:xfrm>
+          <a:prstGeom prst="rect">
+            <a:avLst/>
+          </a:prstGeom>
+          <a:noFill/>
+          <a:ln/>
+        </p:spPr>
+        <p:txBody>
+          <a:bodyPr wrap="square" lIns="0" tIns="0" rIns="0" bIns="0" rtlCol="0" anchor="ctr"/>
+          <a:lstStyle/>
+          <a:p>
+            <a:pPr algn="ctr" indent="0" marL="0">
+              <a:buNone/>
+            </a:pPr>
+            <a:r>
+              <a:rPr lang="en-US" sz="1000" b="1" dirty="0">
+                <a:solidFill>
+                  <a:srgbClr val="0F172A"/>
+                </a:solidFill>
+                <a:latin typeface="Arial" pitchFamily="34" charset="0"/>
+                <a:ea typeface="Arial" pitchFamily="34" charset="-122"/>
+                <a:cs typeface="Arial" pitchFamily="34" charset="-120"/>
+              </a:rPr>
+              <a:t>成就系统</a:t>
+            </a:r>
+            <a:endParaRPr lang="en-US" sz="1000" dirty="0"/>
+          </a:p>
+        </p:txBody>
+      </p:sp>
+      <p:sp>
+        <p:nvSpPr>
+          <p:cNvPr id="55" name="Shape 53"/>
+          <p:cNvSpPr/>
+          <p:nvPr/>
+        </p:nvSpPr>
+        <p:spPr>
+          <a:xfrm>
+            <a:off x="2560320" y="3931920"/>
+            <a:ext cx="2011680" cy="365760"/>
+          </a:xfrm>
+          <a:prstGeom prst="rect">
+            <a:avLst/>
+          </a:prstGeom>
+          <a:solidFill>
+            <a:srgbClr val="FFFFFF"/>
+          </a:solidFill>
+          <a:ln/>
+        </p:spPr>
+      </p:sp>
+      <p:sp>
+        <p:nvSpPr>
+          <p:cNvPr id="56" name="Text 54"/>
+          <p:cNvSpPr/>
+          <p:nvPr/>
+        </p:nvSpPr>
+        <p:spPr>
+          <a:xfrm>
+            <a:off x="2560320" y="3931920"/>
+            <a:ext cx="2011680" cy="365760"/>
+          </a:xfrm>
+          <a:prstGeom prst="rect">
+            <a:avLst/>
+          </a:prstGeom>
+          <a:noFill/>
+          <a:ln/>
+        </p:spPr>
+        <p:txBody>
+          <a:bodyPr wrap="square" lIns="0" tIns="0" rIns="0" bIns="0" rtlCol="0" anchor="ctr"/>
+          <a:lstStyle/>
+          <a:p>
+            <a:pPr algn="ctr" indent="0" marL="0">
+              <a:buNone/>
+            </a:pPr>
+            <a:r>
+              <a:rPr lang="en-US" sz="1000" dirty="0">
+                <a:solidFill>
+                  <a:srgbClr val="64748B"/>
+                </a:solidFill>
+                <a:latin typeface="Arial" pitchFamily="34" charset="0"/>
+                <a:ea typeface="Arial" pitchFamily="34" charset="-122"/>
+                <a:cs typeface="Arial" pitchFamily="34" charset="-120"/>
+              </a:rPr>
+              <a:t>✅ 3 枚</a:t>
+            </a:r>
+            <a:endParaRPr lang="en-US" sz="1000" dirty="0"/>
+          </a:p>
+        </p:txBody>
+      </p:sp>
+      <p:sp>
+        <p:nvSpPr>
+          <p:cNvPr id="57" name="Shape 55"/>
+          <p:cNvSpPr/>
+          <p:nvPr/>
+        </p:nvSpPr>
+        <p:spPr>
+          <a:xfrm>
+            <a:off x="4663440" y="3931920"/>
+            <a:ext cx="2011680" cy="365760"/>
+          </a:xfrm>
+          <a:prstGeom prst="rect">
+            <a:avLst/>
+          </a:prstGeom>
+          <a:solidFill>
+            <a:srgbClr val="FFFFFF"/>
+          </a:solidFill>
+          <a:ln/>
+        </p:spPr>
+      </p:sp>
+      <p:sp>
+        <p:nvSpPr>
+          <p:cNvPr id="58" name="Text 56"/>
+          <p:cNvSpPr/>
+          <p:nvPr/>
+        </p:nvSpPr>
+        <p:spPr>
+          <a:xfrm>
+            <a:off x="4663440" y="3931920"/>
+            <a:ext cx="2011680" cy="365760"/>
+          </a:xfrm>
+          <a:prstGeom prst="rect">
+            <a:avLst/>
+          </a:prstGeom>
+          <a:noFill/>
+          <a:ln/>
+        </p:spPr>
+        <p:txBody>
+          <a:bodyPr wrap="square" lIns="0" tIns="0" rIns="0" bIns="0" rtlCol="0" anchor="ctr"/>
+          <a:lstStyle/>
+          <a:p>
+            <a:pPr algn="ctr" indent="0" marL="0">
+              <a:buNone/>
+            </a:pPr>
+            <a:r>
+              <a:rPr lang="en-US" sz="1000" dirty="0">
+                <a:solidFill>
+                  <a:srgbClr val="64748B"/>
+                </a:solidFill>
+                <a:latin typeface="Arial" pitchFamily="34" charset="0"/>
+                <a:ea typeface="Arial" pitchFamily="34" charset="-122"/>
+                <a:cs typeface="Arial" pitchFamily="34" charset="-120"/>
+              </a:rPr>
+              <a:t>✅ 50 分</a:t>
+            </a:r>
+            <a:endParaRPr lang="en-US" sz="1000" dirty="0"/>
+          </a:p>
+        </p:txBody>
+      </p:sp>
+      <p:sp>
+        <p:nvSpPr>
+          <p:cNvPr id="59" name="Shape 57"/>
+          <p:cNvSpPr/>
+          <p:nvPr/>
+        </p:nvSpPr>
+        <p:spPr>
+          <a:xfrm>
+            <a:off x="6766560" y="3931920"/>
+            <a:ext cx="2011680" cy="365760"/>
+          </a:xfrm>
+          <a:prstGeom prst="rect">
+            <a:avLst/>
+          </a:prstGeom>
+          <a:solidFill>
+            <a:srgbClr val="FFFFFF"/>
+          </a:solidFill>
+          <a:ln/>
+        </p:spPr>
+      </p:sp>
+      <p:sp>
+        <p:nvSpPr>
+          <p:cNvPr id="60" name="Text 58"/>
+          <p:cNvSpPr/>
+          <p:nvPr/>
+        </p:nvSpPr>
+        <p:spPr>
+          <a:xfrm>
+            <a:off x="6766560" y="3931920"/>
+            <a:ext cx="2011680" cy="365760"/>
+          </a:xfrm>
+          <a:prstGeom prst="rect">
+            <a:avLst/>
+          </a:prstGeom>
+          <a:noFill/>
+          <a:ln/>
+        </p:spPr>
+        <p:txBody>
+          <a:bodyPr wrap="square" lIns="0" tIns="0" rIns="0" bIns="0" rtlCol="0" anchor="ctr"/>
+          <a:lstStyle/>
+          <a:p>
+            <a:pPr algn="ctr" indent="0" marL="0">
+              <a:buNone/>
+            </a:pPr>
+            <a:r>
+              <a:rPr lang="en-US" sz="1000" dirty="0">
+                <a:solidFill>
+                  <a:srgbClr val="64748B"/>
+                </a:solidFill>
+                <a:latin typeface="Arial" pitchFamily="34" charset="0"/>
+                <a:ea typeface="Arial" pitchFamily="34" charset="-122"/>
+                <a:cs typeface="Arial" pitchFamily="34" charset="-120"/>
+              </a:rPr>
+              <a:t>✅ 65 分</a:t>
+            </a:r>
+            <a:endParaRPr lang="en-US" sz="1000" dirty="0"/>
+          </a:p>
+        </p:txBody>
+      </p:sp>
+      <p:sp>
+        <p:nvSpPr>
+          <p:cNvPr id="61" name="Text 59"/>
+          <p:cNvSpPr/>
+          <p:nvPr/>
+        </p:nvSpPr>
+        <p:spPr>
+          <a:xfrm>
+            <a:off x="640080" y="4480560"/>
+            <a:ext cx="7863840" cy="365760"/>
+          </a:xfrm>
+          <a:prstGeom prst="rect">
+            <a:avLst/>
+          </a:prstGeom>
+          <a:noFill/>
+          <a:ln/>
+        </p:spPr>
+        <p:txBody>
+          <a:bodyPr wrap="square" lIns="0" tIns="0" rIns="0" bIns="0" rtlCol="0" anchor="ctr"/>
+          <a:lstStyle/>
+          <a:p>
+            <a:pPr algn="ctr" indent="0" marL="0">
+              <a:buNone/>
+            </a:pPr>
+            <a:r>
+              <a:rPr lang="en-US" sz="1400" b="1" dirty="0">
                 <a:solidFill>
                   <a:srgbClr val="028090"/>
                 </a:solidFill>
@@ -2933,872 +4545,9 @@
                 <a:ea typeface="Arial" pitchFamily="34" charset="-122"/>
                 <a:cs typeface="Arial" pitchFamily="34" charset="-120"/>
               </a:rPr>
-              <a:t>前端</a:t>
-            </a:r>
-            <a:endParaRPr lang="en-US" sz="1200" dirty="0"/>
-          </a:p>
-        </p:txBody>
-      </p:sp>
-      <p:sp>
-        <p:nvSpPr>
-          <p:cNvPr id="8" name="Text 6"/>
-          <p:cNvSpPr/>
-          <p:nvPr/>
-        </p:nvSpPr>
-        <p:spPr>
-          <a:xfrm>
-            <a:off x="2011680" y="1280160"/>
-            <a:ext cx="2194560" cy="512064"/>
-          </a:xfrm>
-          <a:prstGeom prst="rect">
-            <a:avLst/>
-          </a:prstGeom>
-          <a:noFill/>
-          <a:ln/>
-        </p:spPr>
-        <p:txBody>
-          <a:bodyPr wrap="square" lIns="0" tIns="0" rIns="0" bIns="0" rtlCol="0" anchor="ctr"/>
-          <a:lstStyle/>
-          <a:p>
-            <a:pPr indent="0" marL="0">
-              <a:buNone/>
-            </a:pPr>
-            <a:r>
-              <a:rPr lang="en-US" sz="1400" b="1" dirty="0">
-                <a:solidFill>
-                  <a:srgbClr val="0F172A"/>
-                </a:solidFill>
-                <a:latin typeface="Arial" pitchFamily="34" charset="0"/>
-                <a:ea typeface="Arial" pitchFamily="34" charset="-122"/>
-                <a:cs typeface="Arial" pitchFamily="34" charset="-120"/>
-              </a:rPr>
-              <a:t>React 19 + Vite 8</a:t>
+              <a:t>✅ 全部 18 项测试通过</a:t>
             </a:r>
             <a:endParaRPr lang="en-US" sz="1400" dirty="0"/>
-          </a:p>
-        </p:txBody>
-      </p:sp>
-      <p:sp>
-        <p:nvSpPr>
-          <p:cNvPr id="9" name="Text 7"/>
-          <p:cNvSpPr/>
-          <p:nvPr/>
-        </p:nvSpPr>
-        <p:spPr>
-          <a:xfrm>
-            <a:off x="4297680" y="1280160"/>
-            <a:ext cx="4023360" cy="512064"/>
-          </a:xfrm>
-          <a:prstGeom prst="rect">
-            <a:avLst/>
-          </a:prstGeom>
-          <a:noFill/>
-          <a:ln/>
-        </p:spPr>
-        <p:txBody>
-          <a:bodyPr wrap="square" lIns="0" tIns="0" rIns="0" bIns="0" rtlCol="0" anchor="ctr"/>
-          <a:lstStyle/>
-          <a:p>
-            <a:pPr indent="0" marL="0">
-              <a:buNone/>
-            </a:pPr>
-            <a:r>
-              <a:rPr lang="en-US" sz="1100" dirty="0">
-                <a:solidFill>
-                  <a:srgbClr val="64748B"/>
-                </a:solidFill>
-                <a:latin typeface="Arial" pitchFamily="34" charset="0"/>
-                <a:ea typeface="Arial" pitchFamily="34" charset="-122"/>
-                <a:cs typeface="Arial" pitchFamily="34" charset="-120"/>
-              </a:rPr>
-              <a:t>TypeScript 6.0 · Tailwind CSS 4 · React Router 7 · TanStack Query 5</a:t>
-            </a:r>
-            <a:endParaRPr lang="en-US" sz="1100" dirty="0"/>
-          </a:p>
-        </p:txBody>
-      </p:sp>
-      <p:sp>
-        <p:nvSpPr>
-          <p:cNvPr id="10" name="Shape 8"/>
-          <p:cNvSpPr/>
-          <p:nvPr/>
-        </p:nvSpPr>
-        <p:spPr>
-          <a:xfrm>
-            <a:off x="640080" y="1892808"/>
-            <a:ext cx="7863840" cy="512064"/>
-          </a:xfrm>
-          <a:prstGeom prst="rect">
-            <a:avLst/>
-          </a:prstGeom>
-          <a:solidFill>
-            <a:srgbClr val="FFFFFF"/>
-          </a:solidFill>
-          <a:ln/>
-        </p:spPr>
-      </p:sp>
-      <p:sp>
-        <p:nvSpPr>
-          <p:cNvPr id="11" name="Shape 9"/>
-          <p:cNvSpPr/>
-          <p:nvPr/>
-        </p:nvSpPr>
-        <p:spPr>
-          <a:xfrm>
-            <a:off x="640080" y="1892808"/>
-            <a:ext cx="54864" cy="512064"/>
-          </a:xfrm>
-          <a:prstGeom prst="rect">
-            <a:avLst/>
-          </a:prstGeom>
-          <a:solidFill>
-            <a:srgbClr val="028090"/>
-          </a:solidFill>
-          <a:ln/>
-        </p:spPr>
-      </p:sp>
-      <p:sp>
-        <p:nvSpPr>
-          <p:cNvPr id="12" name="Text 10"/>
-          <p:cNvSpPr/>
-          <p:nvPr/>
-        </p:nvSpPr>
-        <p:spPr>
-          <a:xfrm>
-            <a:off x="914400" y="1892808"/>
-            <a:ext cx="1005840" cy="512064"/>
-          </a:xfrm>
-          <a:prstGeom prst="rect">
-            <a:avLst/>
-          </a:prstGeom>
-          <a:noFill/>
-          <a:ln/>
-        </p:spPr>
-        <p:txBody>
-          <a:bodyPr wrap="square" lIns="0" tIns="0" rIns="0" bIns="0" rtlCol="0" anchor="ctr"/>
-          <a:lstStyle/>
-          <a:p>
-            <a:pPr indent="0" marL="0">
-              <a:buNone/>
-            </a:pPr>
-            <a:r>
-              <a:rPr lang="en-US" sz="1200" b="1" dirty="0">
-                <a:solidFill>
-                  <a:srgbClr val="028090"/>
-                </a:solidFill>
-                <a:latin typeface="Arial" pitchFamily="34" charset="0"/>
-                <a:ea typeface="Arial" pitchFamily="34" charset="-122"/>
-                <a:cs typeface="Arial" pitchFamily="34" charset="-120"/>
-              </a:rPr>
-              <a:t>后端</a:t>
-            </a:r>
-            <a:endParaRPr lang="en-US" sz="1200" dirty="0"/>
-          </a:p>
-        </p:txBody>
-      </p:sp>
-      <p:sp>
-        <p:nvSpPr>
-          <p:cNvPr id="13" name="Text 11"/>
-          <p:cNvSpPr/>
-          <p:nvPr/>
-        </p:nvSpPr>
-        <p:spPr>
-          <a:xfrm>
-            <a:off x="2011680" y="1892808"/>
-            <a:ext cx="2194560" cy="512064"/>
-          </a:xfrm>
-          <a:prstGeom prst="rect">
-            <a:avLst/>
-          </a:prstGeom>
-          <a:noFill/>
-          <a:ln/>
-        </p:spPr>
-        <p:txBody>
-          <a:bodyPr wrap="square" lIns="0" tIns="0" rIns="0" bIns="0" rtlCol="0" anchor="ctr"/>
-          <a:lstStyle/>
-          <a:p>
-            <a:pPr indent="0" marL="0">
-              <a:buNone/>
-            </a:pPr>
-            <a:r>
-              <a:rPr lang="en-US" sz="1400" b="1" dirty="0">
-                <a:solidFill>
-                  <a:srgbClr val="0F172A"/>
-                </a:solidFill>
-                <a:latin typeface="Arial" pitchFamily="34" charset="0"/>
-                <a:ea typeface="Arial" pitchFamily="34" charset="-122"/>
-                <a:cs typeface="Arial" pitchFamily="34" charset="-120"/>
-              </a:rPr>
-              <a:t>Python FastAPI</a:t>
-            </a:r>
-            <a:endParaRPr lang="en-US" sz="1400" dirty="0"/>
-          </a:p>
-        </p:txBody>
-      </p:sp>
-      <p:sp>
-        <p:nvSpPr>
-          <p:cNvPr id="14" name="Text 12"/>
-          <p:cNvSpPr/>
-          <p:nvPr/>
-        </p:nvSpPr>
-        <p:spPr>
-          <a:xfrm>
-            <a:off x="4297680" y="1892808"/>
-            <a:ext cx="4023360" cy="512064"/>
-          </a:xfrm>
-          <a:prstGeom prst="rect">
-            <a:avLst/>
-          </a:prstGeom>
-          <a:noFill/>
-          <a:ln/>
-        </p:spPr>
-        <p:txBody>
-          <a:bodyPr wrap="square" lIns="0" tIns="0" rIns="0" bIns="0" rtlCol="0" anchor="ctr"/>
-          <a:lstStyle/>
-          <a:p>
-            <a:pPr indent="0" marL="0">
-              <a:buNone/>
-            </a:pPr>
-            <a:r>
-              <a:rPr lang="en-US" sz="1100" dirty="0">
-                <a:solidFill>
-                  <a:srgbClr val="64748B"/>
-                </a:solidFill>
-                <a:latin typeface="Arial" pitchFamily="34" charset="0"/>
-                <a:ea typeface="Arial" pitchFamily="34" charset="-122"/>
-                <a:cs typeface="Arial" pitchFamily="34" charset="-120"/>
-              </a:rPr>
-              <a:t>SQLAlchemy 2.0 · Celery 5 · Redis 7 · JWT (Argon2)</a:t>
-            </a:r>
-            <a:endParaRPr lang="en-US" sz="1100" dirty="0"/>
-          </a:p>
-        </p:txBody>
-      </p:sp>
-      <p:sp>
-        <p:nvSpPr>
-          <p:cNvPr id="15" name="Shape 13"/>
-          <p:cNvSpPr/>
-          <p:nvPr/>
-        </p:nvSpPr>
-        <p:spPr>
-          <a:xfrm>
-            <a:off x="640080" y="2505456"/>
-            <a:ext cx="7863840" cy="512064"/>
-          </a:xfrm>
-          <a:prstGeom prst="rect">
-            <a:avLst/>
-          </a:prstGeom>
-          <a:solidFill>
-            <a:srgbClr val="F8FAFC"/>
-          </a:solidFill>
-          <a:ln/>
-        </p:spPr>
-      </p:sp>
-      <p:sp>
-        <p:nvSpPr>
-          <p:cNvPr id="16" name="Shape 14"/>
-          <p:cNvSpPr/>
-          <p:nvPr/>
-        </p:nvSpPr>
-        <p:spPr>
-          <a:xfrm>
-            <a:off x="640080" y="2505456"/>
-            <a:ext cx="54864" cy="512064"/>
-          </a:xfrm>
-          <a:prstGeom prst="rect">
-            <a:avLst/>
-          </a:prstGeom>
-          <a:solidFill>
-            <a:srgbClr val="028090"/>
-          </a:solidFill>
-          <a:ln/>
-        </p:spPr>
-      </p:sp>
-      <p:sp>
-        <p:nvSpPr>
-          <p:cNvPr id="17" name="Text 15"/>
-          <p:cNvSpPr/>
-          <p:nvPr/>
-        </p:nvSpPr>
-        <p:spPr>
-          <a:xfrm>
-            <a:off x="914400" y="2505456"/>
-            <a:ext cx="1005840" cy="512064"/>
-          </a:xfrm>
-          <a:prstGeom prst="rect">
-            <a:avLst/>
-          </a:prstGeom>
-          <a:noFill/>
-          <a:ln/>
-        </p:spPr>
-        <p:txBody>
-          <a:bodyPr wrap="square" lIns="0" tIns="0" rIns="0" bIns="0" rtlCol="0" anchor="ctr"/>
-          <a:lstStyle/>
-          <a:p>
-            <a:pPr indent="0" marL="0">
-              <a:buNone/>
-            </a:pPr>
-            <a:r>
-              <a:rPr lang="en-US" sz="1200" b="1" dirty="0">
-                <a:solidFill>
-                  <a:srgbClr val="028090"/>
-                </a:solidFill>
-                <a:latin typeface="Arial" pitchFamily="34" charset="0"/>
-                <a:ea typeface="Arial" pitchFamily="34" charset="-122"/>
-                <a:cs typeface="Arial" pitchFamily="34" charset="-120"/>
-              </a:rPr>
-              <a:t>数据库</a:t>
-            </a:r>
-            <a:endParaRPr lang="en-US" sz="1200" dirty="0"/>
-          </a:p>
-        </p:txBody>
-      </p:sp>
-      <p:sp>
-        <p:nvSpPr>
-          <p:cNvPr id="18" name="Text 16"/>
-          <p:cNvSpPr/>
-          <p:nvPr/>
-        </p:nvSpPr>
-        <p:spPr>
-          <a:xfrm>
-            <a:off x="2011680" y="2505456"/>
-            <a:ext cx="2194560" cy="512064"/>
-          </a:xfrm>
-          <a:prstGeom prst="rect">
-            <a:avLst/>
-          </a:prstGeom>
-          <a:noFill/>
-          <a:ln/>
-        </p:spPr>
-        <p:txBody>
-          <a:bodyPr wrap="square" lIns="0" tIns="0" rIns="0" bIns="0" rtlCol="0" anchor="ctr"/>
-          <a:lstStyle/>
-          <a:p>
-            <a:pPr indent="0" marL="0">
-              <a:buNone/>
-            </a:pPr>
-            <a:r>
-              <a:rPr lang="en-US" sz="1400" b="1" dirty="0">
-                <a:solidFill>
-                  <a:srgbClr val="0F172A"/>
-                </a:solidFill>
-                <a:latin typeface="Arial" pitchFamily="34" charset="0"/>
-                <a:ea typeface="Arial" pitchFamily="34" charset="-122"/>
-                <a:cs typeface="Arial" pitchFamily="34" charset="-120"/>
-              </a:rPr>
-              <a:t>PostgreSQL 16</a:t>
-            </a:r>
-            <a:endParaRPr lang="en-US" sz="1400" dirty="0"/>
-          </a:p>
-        </p:txBody>
-      </p:sp>
-      <p:sp>
-        <p:nvSpPr>
-          <p:cNvPr id="19" name="Text 17"/>
-          <p:cNvSpPr/>
-          <p:nvPr/>
-        </p:nvSpPr>
-        <p:spPr>
-          <a:xfrm>
-            <a:off x="4297680" y="2505456"/>
-            <a:ext cx="4023360" cy="512064"/>
-          </a:xfrm>
-          <a:prstGeom prst="rect">
-            <a:avLst/>
-          </a:prstGeom>
-          <a:noFill/>
-          <a:ln/>
-        </p:spPr>
-        <p:txBody>
-          <a:bodyPr wrap="square" lIns="0" tIns="0" rIns="0" bIns="0" rtlCol="0" anchor="ctr"/>
-          <a:lstStyle/>
-          <a:p>
-            <a:pPr indent="0" marL="0">
-              <a:buNone/>
-            </a:pPr>
-            <a:r>
-              <a:rPr lang="en-US" sz="1100" dirty="0">
-                <a:solidFill>
-                  <a:srgbClr val="64748B"/>
-                </a:solidFill>
-                <a:latin typeface="Arial" pitchFamily="34" charset="0"/>
-                <a:ea typeface="Arial" pitchFamily="34" charset="-122"/>
-                <a:cs typeface="Arial" pitchFamily="34" charset="-120"/>
-              </a:rPr>
-              <a:t>Native UUID · TIMESTAMPTZ · JSONB · asyncpg 驱动 · Alembic</a:t>
-            </a:r>
-            <a:endParaRPr lang="en-US" sz="1100" dirty="0"/>
-          </a:p>
-        </p:txBody>
-      </p:sp>
-      <p:sp>
-        <p:nvSpPr>
-          <p:cNvPr id="20" name="Shape 18"/>
-          <p:cNvSpPr/>
-          <p:nvPr/>
-        </p:nvSpPr>
-        <p:spPr>
-          <a:xfrm>
-            <a:off x="640080" y="3118104"/>
-            <a:ext cx="7863840" cy="512064"/>
-          </a:xfrm>
-          <a:prstGeom prst="rect">
-            <a:avLst/>
-          </a:prstGeom>
-          <a:solidFill>
-            <a:srgbClr val="FFFFFF"/>
-          </a:solidFill>
-          <a:ln/>
-        </p:spPr>
-      </p:sp>
-      <p:sp>
-        <p:nvSpPr>
-          <p:cNvPr id="21" name="Shape 19"/>
-          <p:cNvSpPr/>
-          <p:nvPr/>
-        </p:nvSpPr>
-        <p:spPr>
-          <a:xfrm>
-            <a:off x="640080" y="3118104"/>
-            <a:ext cx="54864" cy="512064"/>
-          </a:xfrm>
-          <a:prstGeom prst="rect">
-            <a:avLst/>
-          </a:prstGeom>
-          <a:solidFill>
-            <a:srgbClr val="028090"/>
-          </a:solidFill>
-          <a:ln/>
-        </p:spPr>
-      </p:sp>
-      <p:sp>
-        <p:nvSpPr>
-          <p:cNvPr id="22" name="Text 20"/>
-          <p:cNvSpPr/>
-          <p:nvPr/>
-        </p:nvSpPr>
-        <p:spPr>
-          <a:xfrm>
-            <a:off x="914400" y="3118104"/>
-            <a:ext cx="1005840" cy="512064"/>
-          </a:xfrm>
-          <a:prstGeom prst="rect">
-            <a:avLst/>
-          </a:prstGeom>
-          <a:noFill/>
-          <a:ln/>
-        </p:spPr>
-        <p:txBody>
-          <a:bodyPr wrap="square" lIns="0" tIns="0" rIns="0" bIns="0" rtlCol="0" anchor="ctr"/>
-          <a:lstStyle/>
-          <a:p>
-            <a:pPr indent="0" marL="0">
-              <a:buNone/>
-            </a:pPr>
-            <a:r>
-              <a:rPr lang="en-US" sz="1200" b="1" dirty="0">
-                <a:solidFill>
-                  <a:srgbClr val="028090"/>
-                </a:solidFill>
-                <a:latin typeface="Arial" pitchFamily="34" charset="0"/>
-                <a:ea typeface="Arial" pitchFamily="34" charset="-122"/>
-                <a:cs typeface="Arial" pitchFamily="34" charset="-120"/>
-              </a:rPr>
-              <a:t>AI 引擎</a:t>
-            </a:r>
-            <a:endParaRPr lang="en-US" sz="1200" dirty="0"/>
-          </a:p>
-        </p:txBody>
-      </p:sp>
-      <p:sp>
-        <p:nvSpPr>
-          <p:cNvPr id="23" name="Text 21"/>
-          <p:cNvSpPr/>
-          <p:nvPr/>
-        </p:nvSpPr>
-        <p:spPr>
-          <a:xfrm>
-            <a:off x="2011680" y="3118104"/>
-            <a:ext cx="2194560" cy="512064"/>
-          </a:xfrm>
-          <a:prstGeom prst="rect">
-            <a:avLst/>
-          </a:prstGeom>
-          <a:noFill/>
-          <a:ln/>
-        </p:spPr>
-        <p:txBody>
-          <a:bodyPr wrap="square" lIns="0" tIns="0" rIns="0" bIns="0" rtlCol="0" anchor="ctr"/>
-          <a:lstStyle/>
-          <a:p>
-            <a:pPr indent="0" marL="0">
-              <a:buNone/>
-            </a:pPr>
-            <a:r>
-              <a:rPr lang="en-US" sz="1400" b="1" dirty="0">
-                <a:solidFill>
-                  <a:srgbClr val="0F172A"/>
-                </a:solidFill>
-                <a:latin typeface="Arial" pitchFamily="34" charset="0"/>
-                <a:ea typeface="Arial" pitchFamily="34" charset="-122"/>
-                <a:cs typeface="Arial" pitchFamily="34" charset="-120"/>
-              </a:rPr>
-              <a:t>DeepSeek API</a:t>
-            </a:r>
-            <a:endParaRPr lang="en-US" sz="1400" dirty="0"/>
-          </a:p>
-        </p:txBody>
-      </p:sp>
-      <p:sp>
-        <p:nvSpPr>
-          <p:cNvPr id="24" name="Text 22"/>
-          <p:cNvSpPr/>
-          <p:nvPr/>
-        </p:nvSpPr>
-        <p:spPr>
-          <a:xfrm>
-            <a:off x="4297680" y="3118104"/>
-            <a:ext cx="4023360" cy="512064"/>
-          </a:xfrm>
-          <a:prstGeom prst="rect">
-            <a:avLst/>
-          </a:prstGeom>
-          <a:noFill/>
-          <a:ln/>
-        </p:spPr>
-        <p:txBody>
-          <a:bodyPr wrap="square" lIns="0" tIns="0" rIns="0" bIns="0" rtlCol="0" anchor="ctr"/>
-          <a:lstStyle/>
-          <a:p>
-            <a:pPr indent="0" marL="0">
-              <a:buNone/>
-            </a:pPr>
-            <a:r>
-              <a:rPr lang="en-US" sz="1100" dirty="0">
-                <a:solidFill>
-                  <a:srgbClr val="64748B"/>
-                </a:solidFill>
-                <a:latin typeface="Arial" pitchFamily="34" charset="0"/>
-                <a:ea typeface="Arial" pitchFamily="34" charset="-122"/>
-                <a:cs typeface="Arial" pitchFamily="34" charset="-120"/>
-              </a:rPr>
-              <a:t>DeepSeek-Chat · DeepSeek-Reasoner · 熔断器 · 速率限制</a:t>
-            </a:r>
-            <a:endParaRPr lang="en-US" sz="1100" dirty="0"/>
-          </a:p>
-        </p:txBody>
-      </p:sp>
-      <p:sp>
-        <p:nvSpPr>
-          <p:cNvPr id="25" name="Shape 23"/>
-          <p:cNvSpPr/>
-          <p:nvPr/>
-        </p:nvSpPr>
-        <p:spPr>
-          <a:xfrm>
-            <a:off x="640080" y="3730752"/>
-            <a:ext cx="7863840" cy="512064"/>
-          </a:xfrm>
-          <a:prstGeom prst="rect">
-            <a:avLst/>
-          </a:prstGeom>
-          <a:solidFill>
-            <a:srgbClr val="F8FAFC"/>
-          </a:solidFill>
-          <a:ln/>
-        </p:spPr>
-      </p:sp>
-      <p:sp>
-        <p:nvSpPr>
-          <p:cNvPr id="26" name="Shape 24"/>
-          <p:cNvSpPr/>
-          <p:nvPr/>
-        </p:nvSpPr>
-        <p:spPr>
-          <a:xfrm>
-            <a:off x="640080" y="3730752"/>
-            <a:ext cx="54864" cy="512064"/>
-          </a:xfrm>
-          <a:prstGeom prst="rect">
-            <a:avLst/>
-          </a:prstGeom>
-          <a:solidFill>
-            <a:srgbClr val="028090"/>
-          </a:solidFill>
-          <a:ln/>
-        </p:spPr>
-      </p:sp>
-      <p:sp>
-        <p:nvSpPr>
-          <p:cNvPr id="27" name="Text 25"/>
-          <p:cNvSpPr/>
-          <p:nvPr/>
-        </p:nvSpPr>
-        <p:spPr>
-          <a:xfrm>
-            <a:off x="914400" y="3730752"/>
-            <a:ext cx="1005840" cy="512064"/>
-          </a:xfrm>
-          <a:prstGeom prst="rect">
-            <a:avLst/>
-          </a:prstGeom>
-          <a:noFill/>
-          <a:ln/>
-        </p:spPr>
-        <p:txBody>
-          <a:bodyPr wrap="square" lIns="0" tIns="0" rIns="0" bIns="0" rtlCol="0" anchor="ctr"/>
-          <a:lstStyle/>
-          <a:p>
-            <a:pPr indent="0" marL="0">
-              <a:buNone/>
-            </a:pPr>
-            <a:r>
-              <a:rPr lang="en-US" sz="1200" b="1" dirty="0">
-                <a:solidFill>
-                  <a:srgbClr val="028090"/>
-                </a:solidFill>
-                <a:latin typeface="Arial" pitchFamily="34" charset="0"/>
-                <a:ea typeface="Arial" pitchFamily="34" charset="-122"/>
-                <a:cs typeface="Arial" pitchFamily="34" charset="-120"/>
-              </a:rPr>
-              <a:t>存储</a:t>
-            </a:r>
-            <a:endParaRPr lang="en-US" sz="1200" dirty="0"/>
-          </a:p>
-        </p:txBody>
-      </p:sp>
-      <p:sp>
-        <p:nvSpPr>
-          <p:cNvPr id="28" name="Text 26"/>
-          <p:cNvSpPr/>
-          <p:nvPr/>
-        </p:nvSpPr>
-        <p:spPr>
-          <a:xfrm>
-            <a:off x="2011680" y="3730752"/>
-            <a:ext cx="2194560" cy="512064"/>
-          </a:xfrm>
-          <a:prstGeom prst="rect">
-            <a:avLst/>
-          </a:prstGeom>
-          <a:noFill/>
-          <a:ln/>
-        </p:spPr>
-        <p:txBody>
-          <a:bodyPr wrap="square" lIns="0" tIns="0" rIns="0" bIns="0" rtlCol="0" anchor="ctr"/>
-          <a:lstStyle/>
-          <a:p>
-            <a:pPr indent="0" marL="0">
-              <a:buNone/>
-            </a:pPr>
-            <a:r>
-              <a:rPr lang="en-US" sz="1400" b="1" dirty="0">
-                <a:solidFill>
-                  <a:srgbClr val="0F172A"/>
-                </a:solidFill>
-                <a:latin typeface="Arial" pitchFamily="34" charset="0"/>
-                <a:ea typeface="Arial" pitchFamily="34" charset="-122"/>
-                <a:cs typeface="Arial" pitchFamily="34" charset="-120"/>
-              </a:rPr>
-              <a:t>MinIO</a:t>
-            </a:r>
-            <a:endParaRPr lang="en-US" sz="1400" dirty="0"/>
-          </a:p>
-        </p:txBody>
-      </p:sp>
-      <p:sp>
-        <p:nvSpPr>
-          <p:cNvPr id="29" name="Text 27"/>
-          <p:cNvSpPr/>
-          <p:nvPr/>
-        </p:nvSpPr>
-        <p:spPr>
-          <a:xfrm>
-            <a:off x="4297680" y="3730752"/>
-            <a:ext cx="4023360" cy="512064"/>
-          </a:xfrm>
-          <a:prstGeom prst="rect">
-            <a:avLst/>
-          </a:prstGeom>
-          <a:noFill/>
-          <a:ln/>
-        </p:spPr>
-        <p:txBody>
-          <a:bodyPr wrap="square" lIns="0" tIns="0" rIns="0" bIns="0" rtlCol="0" anchor="ctr"/>
-          <a:lstStyle/>
-          <a:p>
-            <a:pPr indent="0" marL="0">
-              <a:buNone/>
-            </a:pPr>
-            <a:r>
-              <a:rPr lang="en-US" sz="1100" dirty="0">
-                <a:solidFill>
-                  <a:srgbClr val="64748B"/>
-                </a:solidFill>
-                <a:latin typeface="Arial" pitchFamily="34" charset="0"/>
-                <a:ea typeface="Arial" pitchFamily="34" charset="-122"/>
-                <a:cs typeface="Arial" pitchFamily="34" charset="-120"/>
-              </a:rPr>
-              <a:t>S3 兼容 · 文档/版本/导出统一管理</a:t>
-            </a:r>
-            <a:endParaRPr lang="en-US" sz="1100" dirty="0"/>
-          </a:p>
-        </p:txBody>
-      </p:sp>
-      <p:sp>
-        <p:nvSpPr>
-          <p:cNvPr id="30" name="Shape 28"/>
-          <p:cNvSpPr/>
-          <p:nvPr/>
-        </p:nvSpPr>
-        <p:spPr>
-          <a:xfrm>
-            <a:off x="640080" y="4343400"/>
-            <a:ext cx="7863840" cy="512064"/>
-          </a:xfrm>
-          <a:prstGeom prst="rect">
-            <a:avLst/>
-          </a:prstGeom>
-          <a:solidFill>
-            <a:srgbClr val="FFFFFF"/>
-          </a:solidFill>
-          <a:ln/>
-        </p:spPr>
-      </p:sp>
-      <p:sp>
-        <p:nvSpPr>
-          <p:cNvPr id="31" name="Shape 29"/>
-          <p:cNvSpPr/>
-          <p:nvPr/>
-        </p:nvSpPr>
-        <p:spPr>
-          <a:xfrm>
-            <a:off x="640080" y="4343400"/>
-            <a:ext cx="54864" cy="512064"/>
-          </a:xfrm>
-          <a:prstGeom prst="rect">
-            <a:avLst/>
-          </a:prstGeom>
-          <a:solidFill>
-            <a:srgbClr val="028090"/>
-          </a:solidFill>
-          <a:ln/>
-        </p:spPr>
-      </p:sp>
-      <p:sp>
-        <p:nvSpPr>
-          <p:cNvPr id="32" name="Text 30"/>
-          <p:cNvSpPr/>
-          <p:nvPr/>
-        </p:nvSpPr>
-        <p:spPr>
-          <a:xfrm>
-            <a:off x="914400" y="4343400"/>
-            <a:ext cx="1005840" cy="512064"/>
-          </a:xfrm>
-          <a:prstGeom prst="rect">
-            <a:avLst/>
-          </a:prstGeom>
-          <a:noFill/>
-          <a:ln/>
-        </p:spPr>
-        <p:txBody>
-          <a:bodyPr wrap="square" lIns="0" tIns="0" rIns="0" bIns="0" rtlCol="0" anchor="ctr"/>
-          <a:lstStyle/>
-          <a:p>
-            <a:pPr indent="0" marL="0">
-              <a:buNone/>
-            </a:pPr>
-            <a:r>
-              <a:rPr lang="en-US" sz="1200" b="1" dirty="0">
-                <a:solidFill>
-                  <a:srgbClr val="028090"/>
-                </a:solidFill>
-                <a:latin typeface="Arial" pitchFamily="34" charset="0"/>
-                <a:ea typeface="Arial" pitchFamily="34" charset="-122"/>
-                <a:cs typeface="Arial" pitchFamily="34" charset="-120"/>
-              </a:rPr>
-              <a:t>部署</a:t>
-            </a:r>
-            <a:endParaRPr lang="en-US" sz="1200" dirty="0"/>
-          </a:p>
-        </p:txBody>
-      </p:sp>
-      <p:sp>
-        <p:nvSpPr>
-          <p:cNvPr id="33" name="Text 31"/>
-          <p:cNvSpPr/>
-          <p:nvPr/>
-        </p:nvSpPr>
-        <p:spPr>
-          <a:xfrm>
-            <a:off x="2011680" y="4343400"/>
-            <a:ext cx="2194560" cy="512064"/>
-          </a:xfrm>
-          <a:prstGeom prst="rect">
-            <a:avLst/>
-          </a:prstGeom>
-          <a:noFill/>
-          <a:ln/>
-        </p:spPr>
-        <p:txBody>
-          <a:bodyPr wrap="square" lIns="0" tIns="0" rIns="0" bIns="0" rtlCol="0" anchor="ctr"/>
-          <a:lstStyle/>
-          <a:p>
-            <a:pPr indent="0" marL="0">
-              <a:buNone/>
-            </a:pPr>
-            <a:r>
-              <a:rPr lang="en-US" sz="1400" b="1" dirty="0">
-                <a:solidFill>
-                  <a:srgbClr val="0F172A"/>
-                </a:solidFill>
-                <a:latin typeface="Arial" pitchFamily="34" charset="0"/>
-                <a:ea typeface="Arial" pitchFamily="34" charset="-122"/>
-                <a:cs typeface="Arial" pitchFamily="34" charset="-120"/>
-              </a:rPr>
-              <a:t>Docker Compose</a:t>
-            </a:r>
-            <a:endParaRPr lang="en-US" sz="1400" dirty="0"/>
-          </a:p>
-        </p:txBody>
-      </p:sp>
-      <p:sp>
-        <p:nvSpPr>
-          <p:cNvPr id="34" name="Text 32"/>
-          <p:cNvSpPr/>
-          <p:nvPr/>
-        </p:nvSpPr>
-        <p:spPr>
-          <a:xfrm>
-            <a:off x="4297680" y="4343400"/>
-            <a:ext cx="4023360" cy="512064"/>
-          </a:xfrm>
-          <a:prstGeom prst="rect">
-            <a:avLst/>
-          </a:prstGeom>
-          <a:noFill/>
-          <a:ln/>
-        </p:spPr>
-        <p:txBody>
-          <a:bodyPr wrap="square" lIns="0" tIns="0" rIns="0" bIns="0" rtlCol="0" anchor="ctr"/>
-          <a:lstStyle/>
-          <a:p>
-            <a:pPr indent="0" marL="0">
-              <a:buNone/>
-            </a:pPr>
-            <a:r>
-              <a:rPr lang="en-US" sz="1100" dirty="0">
-                <a:solidFill>
-                  <a:srgbClr val="64748B"/>
-                </a:solidFill>
-                <a:latin typeface="Arial" pitchFamily="34" charset="0"/>
-                <a:ea typeface="Arial" pitchFamily="34" charset="-122"/>
-                <a:cs typeface="Arial" pitchFamily="34" charset="-120"/>
-              </a:rPr>
-              <a:t>PostgreSQL + Redis + MinIO + API + Worker 一键编排</a:t>
-            </a:r>
-            <a:endParaRPr lang="en-US" sz="1100" dirty="0"/>
           </a:p>
         </p:txBody>
       </p:sp>
@@ -3816,7 +4565,7 @@
     <p:bg>
       <p:bgPr>
         <a:solidFill>
-          <a:srgbClr val="0F172A"/>
+          <a:srgbClr val="FFFFFF"/>
         </a:solidFill>
       </p:bgPr>
     </p:bg>
@@ -3881,13 +4630,13 @@
             <a:r>
               <a:rPr lang="en-US" sz="3200" b="1" dirty="0">
                 <a:solidFill>
-                  <a:srgbClr val="FFFFFF"/>
+                  <a:srgbClr val="0F172A"/>
                 </a:solidFill>
                 <a:latin typeface="Arial Black" pitchFamily="34" charset="0"/>
                 <a:ea typeface="Arial Black" pitchFamily="34" charset="-122"/>
                 <a:cs typeface="Arial Black" pitchFamily="34" charset="-120"/>
               </a:rPr>
-              <a:t>核心功能</a:t>
+              <a:t>AI 处理效果</a:t>
             </a:r>
             <a:endParaRPr lang="en-US" sz="3200" dirty="0"/>
           </a:p>
@@ -3921,14 +4670,14 @@
         </p:nvSpPr>
         <p:spPr>
           <a:xfrm>
-            <a:off x="640080" y="1234440"/>
-            <a:ext cx="2560320" cy="3520440"/>
-          </a:xfrm>
-          <a:prstGeom prst="rect">
-            <a:avLst/>
-          </a:prstGeom>
-          <a:solidFill>
-            <a:srgbClr val="FFFFFF"/>
+            <a:off x="640080" y="1188720"/>
+            <a:ext cx="7863840" cy="1005840"/>
+          </a:xfrm>
+          <a:prstGeom prst="rect">
+            <a:avLst/>
+          </a:prstGeom>
+          <a:solidFill>
+            <a:srgbClr val="F8FAFC"/>
           </a:solidFill>
           <a:ln/>
           <a:effectLst>
@@ -3948,8 +4697,8 @@
         </p:nvSpPr>
         <p:spPr>
           <a:xfrm>
-            <a:off x="640080" y="1234440"/>
-            <a:ext cx="2560320" cy="45720"/>
+            <a:off x="640080" y="1188720"/>
+            <a:ext cx="54864" cy="1005840"/>
           </a:xfrm>
           <a:prstGeom prst="rect">
             <a:avLst/>
@@ -3968,8 +4717,8 @@
         </p:nvSpPr>
         <p:spPr>
           <a:xfrm>
-            <a:off x="822960" y="1417320"/>
-            <a:ext cx="2194560" cy="384048"/>
+            <a:off x="914400" y="1261872"/>
+            <a:ext cx="1828800" cy="274320"/>
           </a:xfrm>
           <a:prstGeom prst="rect">
             <a:avLst/>
@@ -3985,7 +4734,7 @@
               <a:buNone/>
             </a:pPr>
             <a:r>
-              <a:rPr lang="en-US" sz="1600" b="1" dirty="0">
+              <a:rPr lang="en-US" sz="1300" b="1" dirty="0">
                 <a:solidFill>
                   <a:srgbClr val="2563EB"/>
                 </a:solidFill>
@@ -3993,9 +4742,9 @@
                 <a:ea typeface="Arial" pitchFamily="34" charset="-122"/>
                 <a:cs typeface="Arial" pitchFamily="34" charset="-120"/>
               </a:rPr>
-              <a:t>文档处理</a:t>
-            </a:r>
-            <a:endParaRPr lang="en-US" sz="1600" dirty="0"/>
+              <a:t>DOCX 校对</a:t>
+            </a:r>
+            <a:endParaRPr lang="en-US" sz="1300" dirty="0"/>
           </a:p>
         </p:txBody>
       </p:sp>
@@ -4007,8 +4756,8 @@
         </p:nvSpPr>
         <p:spPr>
           <a:xfrm>
-            <a:off x="868680" y="1920240"/>
-            <a:ext cx="2103120" cy="457200"/>
+            <a:off x="914400" y="1554480"/>
+            <a:ext cx="7406640" cy="548640"/>
           </a:xfrm>
           <a:prstGeom prst="rect">
             <a:avLst/>
@@ -4024,192 +4773,36 @@
               <a:buNone/>
             </a:pPr>
             <a:r>
-              <a:rPr lang="en-US" sz="1150" dirty="0">
-                <a:solidFill>
-                  <a:srgbClr val="0F172A"/>
-                </a:solidFill>
-                <a:latin typeface="Arial" pitchFamily="34" charset="0"/>
-                <a:ea typeface="Arial" pitchFamily="34" charset="-122"/>
-                <a:cs typeface="Arial" pitchFamily="34" charset="-120"/>
-              </a:rPr>
-              <a:t>✓ 多格式上传与解析</a:t>
-            </a:r>
-            <a:endParaRPr lang="en-US" sz="1150" dirty="0"/>
-          </a:p>
-        </p:txBody>
-      </p:sp>
-      <p:sp>
-        <p:nvSpPr>
-          <p:cNvPr id="9" name="Text 7"/>
-          <p:cNvSpPr/>
-          <p:nvPr/>
-        </p:nvSpPr>
-        <p:spPr>
-          <a:xfrm>
-            <a:off x="868680" y="2450592"/>
-            <a:ext cx="2103120" cy="457200"/>
-          </a:xfrm>
-          <a:prstGeom prst="rect">
-            <a:avLst/>
-          </a:prstGeom>
-          <a:noFill/>
-          <a:ln/>
-        </p:spPr>
-        <p:txBody>
-          <a:bodyPr wrap="square" lIns="0" tIns="0" rIns="0" bIns="0" rtlCol="0" anchor="ctr"/>
-          <a:lstStyle/>
-          <a:p>
-            <a:pPr indent="0" marL="0">
-              <a:buNone/>
-            </a:pPr>
-            <a:r>
-              <a:rPr lang="en-US" sz="1150" dirty="0">
-                <a:solidFill>
-                  <a:srgbClr val="0F172A"/>
-                </a:solidFill>
-                <a:latin typeface="Arial" pitchFamily="34" charset="0"/>
-                <a:ea typeface="Arial" pitchFamily="34" charset="-122"/>
-                <a:cs typeface="Arial" pitchFamily="34" charset="-120"/>
-              </a:rPr>
-              <a:t>✓ 元数据与标签管理</a:t>
-            </a:r>
-            <a:endParaRPr lang="en-US" sz="1150" dirty="0"/>
-          </a:p>
-        </p:txBody>
-      </p:sp>
-      <p:sp>
-        <p:nvSpPr>
-          <p:cNvPr id="10" name="Text 8"/>
-          <p:cNvSpPr/>
-          <p:nvPr/>
-        </p:nvSpPr>
-        <p:spPr>
-          <a:xfrm>
-            <a:off x="868680" y="2980944"/>
-            <a:ext cx="2103120" cy="457200"/>
-          </a:xfrm>
-          <a:prstGeom prst="rect">
-            <a:avLst/>
-          </a:prstGeom>
-          <a:noFill/>
-          <a:ln/>
-        </p:spPr>
-        <p:txBody>
-          <a:bodyPr wrap="square" lIns="0" tIns="0" rIns="0" bIns="0" rtlCol="0" anchor="ctr"/>
-          <a:lstStyle/>
-          <a:p>
-            <a:pPr indent="0" marL="0">
-              <a:buNone/>
-            </a:pPr>
-            <a:r>
-              <a:rPr lang="en-US" sz="1150" dirty="0">
-                <a:solidFill>
-                  <a:srgbClr val="0F172A"/>
-                </a:solidFill>
-                <a:latin typeface="Arial" pitchFamily="34" charset="0"/>
-                <a:ea typeface="Arial" pitchFamily="34" charset="-122"/>
-                <a:cs typeface="Arial" pitchFamily="34" charset="-120"/>
-              </a:rPr>
-              <a:t>✓ 全文检索与预览</a:t>
-            </a:r>
-            <a:endParaRPr lang="en-US" sz="1150" dirty="0"/>
-          </a:p>
-        </p:txBody>
-      </p:sp>
-      <p:sp>
-        <p:nvSpPr>
-          <p:cNvPr id="11" name="Text 9"/>
-          <p:cNvSpPr/>
-          <p:nvPr/>
-        </p:nvSpPr>
-        <p:spPr>
-          <a:xfrm>
-            <a:off x="868680" y="3511296"/>
-            <a:ext cx="2103120" cy="457200"/>
-          </a:xfrm>
-          <a:prstGeom prst="rect">
-            <a:avLst/>
-          </a:prstGeom>
-          <a:noFill/>
-          <a:ln/>
-        </p:spPr>
-        <p:txBody>
-          <a:bodyPr wrap="square" lIns="0" tIns="0" rIns="0" bIns="0" rtlCol="0" anchor="ctr"/>
-          <a:lstStyle/>
-          <a:p>
-            <a:pPr indent="0" marL="0">
-              <a:buNone/>
-            </a:pPr>
-            <a:r>
-              <a:rPr lang="en-US" sz="1150" dirty="0">
-                <a:solidFill>
-                  <a:srgbClr val="0F172A"/>
-                </a:solidFill>
-                <a:latin typeface="Arial" pitchFamily="34" charset="0"/>
-                <a:ea typeface="Arial" pitchFamily="34" charset="-122"/>
-                <a:cs typeface="Arial" pitchFamily="34" charset="-120"/>
-              </a:rPr>
-              <a:t>✓ 多格式导出 (PDF/Word/MD)</a:t>
-            </a:r>
-            <a:endParaRPr lang="en-US" sz="1150" dirty="0"/>
-          </a:p>
-        </p:txBody>
-      </p:sp>
-      <p:sp>
-        <p:nvSpPr>
-          <p:cNvPr id="12" name="Text 10"/>
-          <p:cNvSpPr/>
-          <p:nvPr/>
-        </p:nvSpPr>
-        <p:spPr>
-          <a:xfrm>
-            <a:off x="868680" y="4041648"/>
-            <a:ext cx="2103120" cy="457200"/>
-          </a:xfrm>
-          <a:prstGeom prst="rect">
-            <a:avLst/>
-          </a:prstGeom>
-          <a:noFill/>
-          <a:ln/>
-        </p:spPr>
-        <p:txBody>
-          <a:bodyPr wrap="square" lIns="0" tIns="0" rIns="0" bIns="0" rtlCol="0" anchor="ctr"/>
-          <a:lstStyle/>
-          <a:p>
-            <a:pPr indent="0" marL="0">
-              <a:buNone/>
-            </a:pPr>
-            <a:r>
-              <a:rPr lang="en-US" sz="1150" dirty="0">
-                <a:solidFill>
-                  <a:srgbClr val="0F172A"/>
-                </a:solidFill>
-                <a:latin typeface="Arial" pitchFamily="34" charset="0"/>
-                <a:ea typeface="Arial" pitchFamily="34" charset="-122"/>
-                <a:cs typeface="Arial" pitchFamily="34" charset="-120"/>
-              </a:rPr>
-              <a:t>✓ 拖拽上传 + 文件夹组织</a:t>
-            </a:r>
-            <a:endParaRPr lang="en-US" sz="1150" dirty="0"/>
-          </a:p>
-        </p:txBody>
-      </p:sp>
-      <p:sp>
-        <p:nvSpPr>
-          <p:cNvPr id="13" name="Shape 11"/>
-          <p:cNvSpPr/>
-          <p:nvPr/>
-        </p:nvSpPr>
-        <p:spPr>
-          <a:xfrm>
-            <a:off x="3429000" y="1234440"/>
-            <a:ext cx="2560320" cy="3520440"/>
-          </a:xfrm>
-          <a:prstGeom prst="rect">
-            <a:avLst/>
-          </a:prstGeom>
-          <a:solidFill>
-            <a:srgbClr val="FFFFFF"/>
+              <a:rPr lang="en-US" sz="1050" dirty="0">
+                <a:solidFill>
+                  <a:srgbClr val="64748B"/>
+                </a:solidFill>
+                <a:latin typeface="Arial" pitchFamily="34" charset="0"/>
+                <a:ea typeface="Arial" pitchFamily="34" charset="-122"/>
+                <a:cs typeface="Arial" pitchFamily="34" charset="-120"/>
+              </a:rPr>
+              <a:t>智能文档助手可高效完成日常办公文档的撰写、编辑与优化工作，适配职场报告、学生作文、工作总结、方案策划等多种场景。</a:t>
+            </a:r>
+            <a:endParaRPr lang="en-US" sz="1050" dirty="0"/>
+          </a:p>
+        </p:txBody>
+      </p:sp>
+      <p:sp>
+        <p:nvSpPr>
+          <p:cNvPr id="9" name="Shape 7"/>
+          <p:cNvSpPr/>
+          <p:nvPr/>
+        </p:nvSpPr>
+        <p:spPr>
+          <a:xfrm>
+            <a:off x="640080" y="2377440"/>
+            <a:ext cx="7863840" cy="1005840"/>
+          </a:xfrm>
+          <a:prstGeom prst="rect">
+            <a:avLst/>
+          </a:prstGeom>
+          <a:solidFill>
+            <a:srgbClr val="F8FAFC"/>
           </a:solidFill>
           <a:ln/>
           <a:effectLst>
@@ -4223,14 +4816,14 @@
       </p:sp>
       <p:sp>
         <p:nvSpPr>
-          <p:cNvPr id="14" name="Shape 12"/>
-          <p:cNvSpPr/>
-          <p:nvPr/>
-        </p:nvSpPr>
-        <p:spPr>
-          <a:xfrm>
-            <a:off x="3429000" y="1234440"/>
-            <a:ext cx="2560320" cy="45720"/>
+          <p:cNvPr id="10" name="Shape 8"/>
+          <p:cNvSpPr/>
+          <p:nvPr/>
+        </p:nvSpPr>
+        <p:spPr>
+          <a:xfrm>
+            <a:off x="640080" y="2377440"/>
+            <a:ext cx="54864" cy="1005840"/>
           </a:xfrm>
           <a:prstGeom prst="rect">
             <a:avLst/>
@@ -4243,14 +4836,14 @@
       </p:sp>
       <p:sp>
         <p:nvSpPr>
-          <p:cNvPr id="15" name="Text 13"/>
-          <p:cNvSpPr/>
-          <p:nvPr/>
-        </p:nvSpPr>
-        <p:spPr>
-          <a:xfrm>
-            <a:off x="3611880" y="1417320"/>
-            <a:ext cx="2194560" cy="384048"/>
+          <p:cNvPr id="11" name="Text 9"/>
+          <p:cNvSpPr/>
+          <p:nvPr/>
+        </p:nvSpPr>
+        <p:spPr>
+          <a:xfrm>
+            <a:off x="914400" y="2450592"/>
+            <a:ext cx="1828800" cy="274320"/>
           </a:xfrm>
           <a:prstGeom prst="rect">
             <a:avLst/>
@@ -4266,7 +4859,7 @@
               <a:buNone/>
             </a:pPr>
             <a:r>
-              <a:rPr lang="en-US" sz="1600" b="1" dirty="0">
+              <a:rPr lang="en-US" sz="1300" b="1" dirty="0">
                 <a:solidFill>
                   <a:srgbClr val="2563EB"/>
                 </a:solidFill>
@@ -4274,22 +4867,22 @@
                 <a:ea typeface="Arial" pitchFamily="34" charset="-122"/>
                 <a:cs typeface="Arial" pitchFamily="34" charset="-120"/>
               </a:rPr>
-              <a:t>AI 能力</a:t>
-            </a:r>
-            <a:endParaRPr lang="en-US" sz="1600" dirty="0"/>
-          </a:p>
-        </p:txBody>
-      </p:sp>
-      <p:sp>
-        <p:nvSpPr>
-          <p:cNvPr id="16" name="Text 14"/>
-          <p:cNvSpPr/>
-          <p:nvPr/>
-        </p:nvSpPr>
-        <p:spPr>
-          <a:xfrm>
-            <a:off x="3657600" y="1920240"/>
-            <a:ext cx="2103120" cy="457200"/>
+              <a:t>MD 重写</a:t>
+            </a:r>
+            <a:endParaRPr lang="en-US" sz="1300" dirty="0"/>
+          </a:p>
+        </p:txBody>
+      </p:sp>
+      <p:sp>
+        <p:nvSpPr>
+          <p:cNvPr id="12" name="Text 10"/>
+          <p:cNvSpPr/>
+          <p:nvPr/>
+        </p:nvSpPr>
+        <p:spPr>
+          <a:xfrm>
+            <a:off x="914400" y="2743200"/>
+            <a:ext cx="7406640" cy="548640"/>
           </a:xfrm>
           <a:prstGeom prst="rect">
             <a:avLst/>
@@ -4305,192 +4898,36 @@
               <a:buNone/>
             </a:pPr>
             <a:r>
-              <a:rPr lang="en-US" sz="1150" dirty="0">
-                <a:solidFill>
-                  <a:srgbClr val="0F172A"/>
-                </a:solidFill>
-                <a:latin typeface="Arial" pitchFamily="34" charset="0"/>
-                <a:ea typeface="Arial" pitchFamily="34" charset="-122"/>
-                <a:cs typeface="Arial" pitchFamily="34" charset="-120"/>
-              </a:rPr>
-              <a:t>✓ 智能校对（拼写/语法/风格）</a:t>
-            </a:r>
-            <a:endParaRPr lang="en-US" sz="1150" dirty="0"/>
-          </a:p>
-        </p:txBody>
-      </p:sp>
-      <p:sp>
-        <p:nvSpPr>
-          <p:cNvPr id="17" name="Text 15"/>
-          <p:cNvSpPr/>
-          <p:nvPr/>
-        </p:nvSpPr>
-        <p:spPr>
-          <a:xfrm>
-            <a:off x="3657600" y="2450592"/>
-            <a:ext cx="2103120" cy="457200"/>
-          </a:xfrm>
-          <a:prstGeom prst="rect">
-            <a:avLst/>
-          </a:prstGeom>
-          <a:noFill/>
-          <a:ln/>
-        </p:spPr>
-        <p:txBody>
-          <a:bodyPr wrap="square" lIns="0" tIns="0" rIns="0" bIns="0" rtlCol="0" anchor="ctr"/>
-          <a:lstStyle/>
-          <a:p>
-            <a:pPr indent="0" marL="0">
-              <a:buNone/>
-            </a:pPr>
-            <a:r>
-              <a:rPr lang="en-US" sz="1150" dirty="0">
-                <a:solidFill>
-                  <a:srgbClr val="0F172A"/>
-                </a:solidFill>
-                <a:latin typeface="Arial" pitchFamily="34" charset="0"/>
-                <a:ea typeface="Arial" pitchFamily="34" charset="-122"/>
-                <a:cs typeface="Arial" pitchFamily="34" charset="-120"/>
-              </a:rPr>
-              <a:t>✓ 内容重写（语气/受众/篇幅）</a:t>
-            </a:r>
-            <a:endParaRPr lang="en-US" sz="1150" dirty="0"/>
-          </a:p>
-        </p:txBody>
-      </p:sp>
-      <p:sp>
-        <p:nvSpPr>
-          <p:cNvPr id="18" name="Text 16"/>
-          <p:cNvSpPr/>
-          <p:nvPr/>
-        </p:nvSpPr>
-        <p:spPr>
-          <a:xfrm>
-            <a:off x="3657600" y="2980944"/>
-            <a:ext cx="2103120" cy="457200"/>
-          </a:xfrm>
-          <a:prstGeom prst="rect">
-            <a:avLst/>
-          </a:prstGeom>
-          <a:noFill/>
-          <a:ln/>
-        </p:spPr>
-        <p:txBody>
-          <a:bodyPr wrap="square" lIns="0" tIns="0" rIns="0" bIns="0" rtlCol="0" anchor="ctr"/>
-          <a:lstStyle/>
-          <a:p>
-            <a:pPr indent="0" marL="0">
-              <a:buNone/>
-            </a:pPr>
-            <a:r>
-              <a:rPr lang="en-US" sz="1150" dirty="0">
-                <a:solidFill>
-                  <a:srgbClr val="0F172A"/>
-                </a:solidFill>
-                <a:latin typeface="Arial" pitchFamily="34" charset="0"/>
-                <a:ea typeface="Arial" pitchFamily="34" charset="-122"/>
-                <a:cs typeface="Arial" pitchFamily="34" charset="-120"/>
-              </a:rPr>
-              <a:t>✓ 自动摘要（短/中/长/要点）</a:t>
-            </a:r>
-            <a:endParaRPr lang="en-US" sz="1150" dirty="0"/>
-          </a:p>
-        </p:txBody>
-      </p:sp>
-      <p:sp>
-        <p:nvSpPr>
-          <p:cNvPr id="19" name="Text 17"/>
-          <p:cNvSpPr/>
-          <p:nvPr/>
-        </p:nvSpPr>
-        <p:spPr>
-          <a:xfrm>
-            <a:off x="3657600" y="3511296"/>
-            <a:ext cx="2103120" cy="457200"/>
-          </a:xfrm>
-          <a:prstGeom prst="rect">
-            <a:avLst/>
-          </a:prstGeom>
-          <a:noFill/>
-          <a:ln/>
-        </p:spPr>
-        <p:txBody>
-          <a:bodyPr wrap="square" lIns="0" tIns="0" rIns="0" bIns="0" rtlCol="0" anchor="ctr"/>
-          <a:lstStyle/>
-          <a:p>
-            <a:pPr indent="0" marL="0">
-              <a:buNone/>
-            </a:pPr>
-            <a:r>
-              <a:rPr lang="en-US" sz="1150" dirty="0">
-                <a:solidFill>
-                  <a:srgbClr val="0F172A"/>
-                </a:solidFill>
-                <a:latin typeface="Arial" pitchFamily="34" charset="0"/>
-                <a:ea typeface="Arial" pitchFamily="34" charset="-122"/>
-                <a:cs typeface="Arial" pitchFamily="34" charset="-120"/>
-              </a:rPr>
-              <a:t>✓ 信息提取（实体/表格/关键值）</a:t>
-            </a:r>
-            <a:endParaRPr lang="en-US" sz="1150" dirty="0"/>
-          </a:p>
-        </p:txBody>
-      </p:sp>
-      <p:sp>
-        <p:nvSpPr>
-          <p:cNvPr id="20" name="Text 18"/>
-          <p:cNvSpPr/>
-          <p:nvPr/>
-        </p:nvSpPr>
-        <p:spPr>
-          <a:xfrm>
-            <a:off x="3657600" y="4041648"/>
-            <a:ext cx="2103120" cy="457200"/>
-          </a:xfrm>
-          <a:prstGeom prst="rect">
-            <a:avLst/>
-          </a:prstGeom>
-          <a:noFill/>
-          <a:ln/>
-        </p:spPr>
-        <p:txBody>
-          <a:bodyPr wrap="square" lIns="0" tIns="0" rIns="0" bIns="0" rtlCol="0" anchor="ctr"/>
-          <a:lstStyle/>
-          <a:p>
-            <a:pPr indent="0" marL="0">
-              <a:buNone/>
-            </a:pPr>
-            <a:r>
-              <a:rPr lang="en-US" sz="1150" dirty="0">
-                <a:solidFill>
-                  <a:srgbClr val="0F172A"/>
-                </a:solidFill>
-                <a:latin typeface="Arial" pitchFamily="34" charset="0"/>
-                <a:ea typeface="Arial" pitchFamily="34" charset="-122"/>
-                <a:cs typeface="Arial" pitchFamily="34" charset="-120"/>
-              </a:rPr>
-              <a:t>✓ 格式转换（7种格式互转）</a:t>
-            </a:r>
-            <a:endParaRPr lang="en-US" sz="1150" dirty="0"/>
-          </a:p>
-        </p:txBody>
-      </p:sp>
-      <p:sp>
-        <p:nvSpPr>
-          <p:cNvPr id="21" name="Shape 19"/>
-          <p:cNvSpPr/>
-          <p:nvPr/>
-        </p:nvSpPr>
-        <p:spPr>
-          <a:xfrm>
-            <a:off x="6217920" y="1234440"/>
-            <a:ext cx="2560320" cy="3520440"/>
-          </a:xfrm>
-          <a:prstGeom prst="rect">
-            <a:avLst/>
-          </a:prstGeom>
-          <a:solidFill>
-            <a:srgbClr val="FFFFFF"/>
+              <a:rPr lang="en-US" sz="1050" dirty="0">
+                <a:solidFill>
+                  <a:srgbClr val="64748B"/>
+                </a:solidFill>
+                <a:latin typeface="Arial" pitchFamily="34" charset="0"/>
+                <a:ea typeface="Arial" pitchFamily="34" charset="-122"/>
+                <a:cs typeface="Arial" pitchFamily="34" charset="-120"/>
+              </a:rPr>
+              <a:t>用途：全面检测智能文档处理助手的文本编辑、格式排版、元素渲染、内容处理、智能解析及指令执行等功能的可用性、准确性和稳定性。</a:t>
+            </a:r>
+            <a:endParaRPr lang="en-US" sz="1050" dirty="0"/>
+          </a:p>
+        </p:txBody>
+      </p:sp>
+      <p:sp>
+        <p:nvSpPr>
+          <p:cNvPr id="13" name="Shape 11"/>
+          <p:cNvSpPr/>
+          <p:nvPr/>
+        </p:nvSpPr>
+        <p:spPr>
+          <a:xfrm>
+            <a:off x="640080" y="3566160"/>
+            <a:ext cx="7863840" cy="1005840"/>
+          </a:xfrm>
+          <a:prstGeom prst="rect">
+            <a:avLst/>
+          </a:prstGeom>
+          <a:solidFill>
+            <a:srgbClr val="F8FAFC"/>
           </a:solidFill>
           <a:ln/>
           <a:effectLst>
@@ -4504,14 +4941,14 @@
       </p:sp>
       <p:sp>
         <p:nvSpPr>
-          <p:cNvPr id="22" name="Shape 20"/>
-          <p:cNvSpPr/>
-          <p:nvPr/>
-        </p:nvSpPr>
-        <p:spPr>
-          <a:xfrm>
-            <a:off x="6217920" y="1234440"/>
-            <a:ext cx="2560320" cy="45720"/>
+          <p:cNvPr id="14" name="Shape 12"/>
+          <p:cNvSpPr/>
+          <p:nvPr/>
+        </p:nvSpPr>
+        <p:spPr>
+          <a:xfrm>
+            <a:off x="640080" y="3566160"/>
+            <a:ext cx="54864" cy="1005840"/>
           </a:xfrm>
           <a:prstGeom prst="rect">
             <a:avLst/>
@@ -4524,14 +4961,14 @@
       </p:sp>
       <p:sp>
         <p:nvSpPr>
-          <p:cNvPr id="23" name="Text 21"/>
-          <p:cNvSpPr/>
-          <p:nvPr/>
-        </p:nvSpPr>
-        <p:spPr>
-          <a:xfrm>
-            <a:off x="6400800" y="1417320"/>
-            <a:ext cx="2194560" cy="384048"/>
+          <p:cNvPr id="15" name="Text 13"/>
+          <p:cNvSpPr/>
+          <p:nvPr/>
+        </p:nvSpPr>
+        <p:spPr>
+          <a:xfrm>
+            <a:off x="914400" y="3639312"/>
+            <a:ext cx="1828800" cy="274320"/>
           </a:xfrm>
           <a:prstGeom prst="rect">
             <a:avLst/>
@@ -4547,7 +4984,7 @@
               <a:buNone/>
             </a:pPr>
             <a:r>
-              <a:rPr lang="en-US" sz="1600" b="1" dirty="0">
+              <a:rPr lang="en-US" sz="1300" b="1" dirty="0">
                 <a:solidFill>
                   <a:srgbClr val="2563EB"/>
                 </a:solidFill>
@@ -4555,22 +4992,22 @@
                 <a:ea typeface="Arial" pitchFamily="34" charset="-122"/>
                 <a:cs typeface="Arial" pitchFamily="34" charset="-120"/>
               </a:rPr>
-              <a:t>協作与集成</a:t>
-            </a:r>
-            <a:endParaRPr lang="en-US" sz="1600" dirty="0"/>
-          </a:p>
-        </p:txBody>
-      </p:sp>
-      <p:sp>
-        <p:nvSpPr>
-          <p:cNvPr id="24" name="Text 22"/>
-          <p:cNvSpPr/>
-          <p:nvPr/>
-        </p:nvSpPr>
-        <p:spPr>
-          <a:xfrm>
-            <a:off x="6446520" y="1920240"/>
-            <a:ext cx="2103120" cy="457200"/>
+              <a:t>PDF 摘要</a:t>
+            </a:r>
+            <a:endParaRPr lang="en-US" sz="1300" dirty="0"/>
+          </a:p>
+        </p:txBody>
+      </p:sp>
+      <p:sp>
+        <p:nvSpPr>
+          <p:cNvPr id="16" name="Text 14"/>
+          <p:cNvSpPr/>
+          <p:nvPr/>
+        </p:nvSpPr>
+        <p:spPr>
+          <a:xfrm>
+            <a:off x="914400" y="3931920"/>
+            <a:ext cx="7406640" cy="548640"/>
           </a:xfrm>
           <a:prstGeom prst="rect">
             <a:avLst/>
@@ -4586,173 +5023,17 @@
               <a:buNone/>
             </a:pPr>
             <a:r>
-              <a:rPr lang="en-US" sz="1150" dirty="0">
-                <a:solidFill>
-                  <a:srgbClr val="0F172A"/>
-                </a:solidFill>
-                <a:latin typeface="Arial" pitchFamily="34" charset="0"/>
-                <a:ea typeface="Arial" pitchFamily="34" charset="-122"/>
-                <a:cs typeface="Arial" pitchFamily="34" charset="-120"/>
-              </a:rPr>
-              <a:t>✓ 实时 WebSocket 协同编辑</a:t>
-            </a:r>
-            <a:endParaRPr lang="en-US" sz="1150" dirty="0"/>
-          </a:p>
-        </p:txBody>
-      </p:sp>
-      <p:sp>
-        <p:nvSpPr>
-          <p:cNvPr id="25" name="Text 23"/>
-          <p:cNvSpPr/>
-          <p:nvPr/>
-        </p:nvSpPr>
-        <p:spPr>
-          <a:xfrm>
-            <a:off x="6446520" y="2450592"/>
-            <a:ext cx="2103120" cy="457200"/>
-          </a:xfrm>
-          <a:prstGeom prst="rect">
-            <a:avLst/>
-          </a:prstGeom>
-          <a:noFill/>
-          <a:ln/>
-        </p:spPr>
-        <p:txBody>
-          <a:bodyPr wrap="square" lIns="0" tIns="0" rIns="0" bIns="0" rtlCol="0" anchor="ctr"/>
-          <a:lstStyle/>
-          <a:p>
-            <a:pPr indent="0" marL="0">
-              <a:buNone/>
-            </a:pPr>
-            <a:r>
-              <a:rPr lang="en-US" sz="1150" dirty="0">
-                <a:solidFill>
-                  <a:srgbClr val="0F172A"/>
-                </a:solidFill>
-                <a:latin typeface="Arial" pitchFamily="34" charset="0"/>
-                <a:ea typeface="Arial" pitchFamily="34" charset="-122"/>
-                <a:cs typeface="Arial" pitchFamily="34" charset="-120"/>
-              </a:rPr>
-              <a:t>✓ 版本历史与 Diff 对比</a:t>
-            </a:r>
-            <a:endParaRPr lang="en-US" sz="1150" dirty="0"/>
-          </a:p>
-        </p:txBody>
-      </p:sp>
-      <p:sp>
-        <p:nvSpPr>
-          <p:cNvPr id="26" name="Text 24"/>
-          <p:cNvSpPr/>
-          <p:nvPr/>
-        </p:nvSpPr>
-        <p:spPr>
-          <a:xfrm>
-            <a:off x="6446520" y="2980944"/>
-            <a:ext cx="2103120" cy="457200"/>
-          </a:xfrm>
-          <a:prstGeom prst="rect">
-            <a:avLst/>
-          </a:prstGeom>
-          <a:noFill/>
-          <a:ln/>
-        </p:spPr>
-        <p:txBody>
-          <a:bodyPr wrap="square" lIns="0" tIns="0" rIns="0" bIns="0" rtlCol="0" anchor="ctr"/>
-          <a:lstStyle/>
-          <a:p>
-            <a:pPr indent="0" marL="0">
-              <a:buNone/>
-            </a:pPr>
-            <a:r>
-              <a:rPr lang="en-US" sz="1150" dirty="0">
-                <a:solidFill>
-                  <a:srgbClr val="0F172A"/>
-                </a:solidFill>
-                <a:latin typeface="Arial" pitchFamily="34" charset="0"/>
-                <a:ea typeface="Arial" pitchFamily="34" charset="-122"/>
-                <a:cs typeface="Arial" pitchFamily="34" charset="-120"/>
-              </a:rPr>
-              <a:t>✓ 三级权限（Owner/Edit/View）</a:t>
-            </a:r>
-            <a:endParaRPr lang="en-US" sz="1150" dirty="0"/>
-          </a:p>
-        </p:txBody>
-      </p:sp>
-      <p:sp>
-        <p:nvSpPr>
-          <p:cNvPr id="27" name="Text 25"/>
-          <p:cNvSpPr/>
-          <p:nvPr/>
-        </p:nvSpPr>
-        <p:spPr>
-          <a:xfrm>
-            <a:off x="6446520" y="3511296"/>
-            <a:ext cx="2103120" cy="457200"/>
-          </a:xfrm>
-          <a:prstGeom prst="rect">
-            <a:avLst/>
-          </a:prstGeom>
-          <a:noFill/>
-          <a:ln/>
-        </p:spPr>
-        <p:txBody>
-          <a:bodyPr wrap="square" lIns="0" tIns="0" rIns="0" bIns="0" rtlCol="0" anchor="ctr"/>
-          <a:lstStyle/>
-          <a:p>
-            <a:pPr indent="0" marL="0">
-              <a:buNone/>
-            </a:pPr>
-            <a:r>
-              <a:rPr lang="en-US" sz="1150" dirty="0">
-                <a:solidFill>
-                  <a:srgbClr val="0F172A"/>
-                </a:solidFill>
-                <a:latin typeface="Arial" pitchFamily="34" charset="0"/>
-                <a:ea typeface="Arial" pitchFamily="34" charset="-122"/>
-                <a:cs typeface="Arial" pitchFamily="34" charset="-120"/>
-              </a:rPr>
-              <a:t>✓ GitHub OAuth 一键登录</a:t>
-            </a:r>
-            <a:endParaRPr lang="en-US" sz="1150" dirty="0"/>
-          </a:p>
-        </p:txBody>
-      </p:sp>
-      <p:sp>
-        <p:nvSpPr>
-          <p:cNvPr id="28" name="Text 26"/>
-          <p:cNvSpPr/>
-          <p:nvPr/>
-        </p:nvSpPr>
-        <p:spPr>
-          <a:xfrm>
-            <a:off x="6446520" y="4041648"/>
-            <a:ext cx="2103120" cy="457200"/>
-          </a:xfrm>
-          <a:prstGeom prst="rect">
-            <a:avLst/>
-          </a:prstGeom>
-          <a:noFill/>
-          <a:ln/>
-        </p:spPr>
-        <p:txBody>
-          <a:bodyPr wrap="square" lIns="0" tIns="0" rIns="0" bIns="0" rtlCol="0" anchor="ctr"/>
-          <a:lstStyle/>
-          <a:p>
-            <a:pPr indent="0" marL="0">
-              <a:buNone/>
-            </a:pPr>
-            <a:r>
-              <a:rPr lang="en-US" sz="1150" dirty="0">
-                <a:solidFill>
-                  <a:srgbClr val="0F172A"/>
-                </a:solidFill>
-                <a:latin typeface="Arial" pitchFamily="34" charset="0"/>
-                <a:ea typeface="Arial" pitchFamily="34" charset="-122"/>
-                <a:cs typeface="Arial" pitchFamily="34" charset="-120"/>
-              </a:rPr>
-              <a:t>✓ GitHub 仓库文件直接导入</a:t>
-            </a:r>
-            <a:endParaRPr lang="en-US" sz="1150" dirty="0"/>
+              <a:rPr lang="en-US" sz="1050" dirty="0">
+                <a:solidFill>
+                  <a:srgbClr val="64748B"/>
+                </a:solidFill>
+                <a:latin typeface="Arial" pitchFamily="34" charset="0"/>
+                <a:ea typeface="Arial" pitchFamily="34" charset="-122"/>
+                <a:cs typeface="Arial" pitchFamily="34" charset="-120"/>
+              </a:rPr>
+              <a:t>This document is a comprehensive test plan for an intelligent document processing assistant, covering text editing, formatting, element rendering, content processing, and command execution.</a:t>
+            </a:r>
+            <a:endParaRPr lang="en-US" sz="1050" dirty="0"/>
           </a:p>
         </p:txBody>
       </p:sp>
@@ -4841,7 +5122,7 @@
                 <a:ea typeface="Arial Black" pitchFamily="34" charset="-122"/>
                 <a:cs typeface="Arial Black" pitchFamily="34" charset="-120"/>
               </a:rPr>
-              <a:t>前端架构 — React 19 + Vite 8</a:t>
+              <a:t>技术栈</a:t>
             </a:r>
             <a:endParaRPr lang="en-US" sz="3200" dirty="0"/>
           </a:p>
@@ -4869,14 +5150,54 @@
       </p:sp>
       <p:sp>
         <p:nvSpPr>
-          <p:cNvPr id="5" name="Text 3"/>
-          <p:cNvSpPr/>
-          <p:nvPr/>
-        </p:nvSpPr>
-        <p:spPr>
-          <a:xfrm>
-            <a:off x="640080" y="1143000"/>
-            <a:ext cx="3840480" cy="347472"/>
+          <p:cNvPr id="5" name="Shape 3"/>
+          <p:cNvSpPr/>
+          <p:nvPr/>
+        </p:nvSpPr>
+        <p:spPr>
+          <a:xfrm>
+            <a:off x="640080" y="1280160"/>
+            <a:ext cx="7863840" cy="512064"/>
+          </a:xfrm>
+          <a:prstGeom prst="rect">
+            <a:avLst/>
+          </a:prstGeom>
+          <a:solidFill>
+            <a:srgbClr val="F8FAFC"/>
+          </a:solidFill>
+          <a:ln/>
+        </p:spPr>
+      </p:sp>
+      <p:sp>
+        <p:nvSpPr>
+          <p:cNvPr id="6" name="Shape 4"/>
+          <p:cNvSpPr/>
+          <p:nvPr/>
+        </p:nvSpPr>
+        <p:spPr>
+          <a:xfrm>
+            <a:off x="640080" y="1280160"/>
+            <a:ext cx="54864" cy="512064"/>
+          </a:xfrm>
+          <a:prstGeom prst="rect">
+            <a:avLst/>
+          </a:prstGeom>
+          <a:solidFill>
+            <a:srgbClr val="028090"/>
+          </a:solidFill>
+          <a:ln/>
+        </p:spPr>
+      </p:sp>
+      <p:sp>
+        <p:nvSpPr>
+          <p:cNvPr id="7" name="Text 5"/>
+          <p:cNvSpPr/>
+          <p:nvPr/>
+        </p:nvSpPr>
+        <p:spPr>
+          <a:xfrm>
+            <a:off x="914400" y="1280160"/>
+            <a:ext cx="1005840" cy="512064"/>
           </a:xfrm>
           <a:prstGeom prst="rect">
             <a:avLst/>
@@ -4892,30 +5213,30 @@
               <a:buNone/>
             </a:pPr>
             <a:r>
-              <a:rPr lang="en-US" sz="1600" b="1" dirty="0">
-                <a:solidFill>
-                  <a:srgbClr val="2563EB"/>
-                </a:solidFill>
-                <a:latin typeface="Arial" pitchFamily="34" charset="0"/>
-                <a:ea typeface="Arial" pitchFamily="34" charset="-122"/>
-                <a:cs typeface="Arial" pitchFamily="34" charset="-120"/>
-              </a:rPr>
-              <a:t>技术架构</a:t>
-            </a:r>
-            <a:endParaRPr lang="en-US" sz="1600" dirty="0"/>
-          </a:p>
-        </p:txBody>
-      </p:sp>
-      <p:sp>
-        <p:nvSpPr>
-          <p:cNvPr id="6" name="Text 4"/>
-          <p:cNvSpPr/>
-          <p:nvPr/>
-        </p:nvSpPr>
-        <p:spPr>
-          <a:xfrm>
-            <a:off x="822960" y="1600200"/>
-            <a:ext cx="3840480" cy="347472"/>
+              <a:rPr lang="en-US" sz="1200" b="1" dirty="0">
+                <a:solidFill>
+                  <a:srgbClr val="028090"/>
+                </a:solidFill>
+                <a:latin typeface="Arial" pitchFamily="34" charset="0"/>
+                <a:ea typeface="Arial" pitchFamily="34" charset="-122"/>
+                <a:cs typeface="Arial" pitchFamily="34" charset="-120"/>
+              </a:rPr>
+              <a:t>前端</a:t>
+            </a:r>
+            <a:endParaRPr lang="en-US" sz="1200" dirty="0"/>
+          </a:p>
+        </p:txBody>
+      </p:sp>
+      <p:sp>
+        <p:nvSpPr>
+          <p:cNvPr id="8" name="Text 6"/>
+          <p:cNvSpPr/>
+          <p:nvPr/>
+        </p:nvSpPr>
+        <p:spPr>
+          <a:xfrm>
+            <a:off x="2011680" y="1280160"/>
+            <a:ext cx="2011680" cy="512064"/>
           </a:xfrm>
           <a:prstGeom prst="rect">
             <a:avLst/>
@@ -4931,7 +5252,7 @@
               <a:buNone/>
             </a:pPr>
             <a:r>
-              <a:rPr lang="en-US" sz="1150" dirty="0">
+              <a:rPr lang="en-US" sz="1400" b="1" dirty="0">
                 <a:solidFill>
                   <a:srgbClr val="0F172A"/>
                 </a:solidFill>
@@ -4939,22 +5260,22 @@
                 <a:ea typeface="Arial" pitchFamily="34" charset="-122"/>
                 <a:cs typeface="Arial" pitchFamily="34" charset="-120"/>
               </a:rPr>
-              <a:t>▸ React 19 + Hooks 函数式组件</a:t>
-            </a:r>
-            <a:endParaRPr lang="en-US" sz="1150" dirty="0"/>
-          </a:p>
-        </p:txBody>
-      </p:sp>
-      <p:sp>
-        <p:nvSpPr>
-          <p:cNvPr id="7" name="Text 5"/>
-          <p:cNvSpPr/>
-          <p:nvPr/>
-        </p:nvSpPr>
-        <p:spPr>
-          <a:xfrm>
-            <a:off x="822960" y="1984248"/>
-            <a:ext cx="3840480" cy="347472"/>
+              <a:t>React 19 + Vite 8</a:t>
+            </a:r>
+            <a:endParaRPr lang="en-US" sz="1400" dirty="0"/>
+          </a:p>
+        </p:txBody>
+      </p:sp>
+      <p:sp>
+        <p:nvSpPr>
+          <p:cNvPr id="9" name="Text 7"/>
+          <p:cNvSpPr/>
+          <p:nvPr/>
+        </p:nvSpPr>
+        <p:spPr>
+          <a:xfrm>
+            <a:off x="4297680" y="1280160"/>
+            <a:ext cx="4023360" cy="512064"/>
           </a:xfrm>
           <a:prstGeom prst="rect">
             <a:avLst/>
@@ -4970,7 +5291,125 @@
               <a:buNone/>
             </a:pPr>
             <a:r>
-              <a:rPr lang="en-US" sz="1150" dirty="0">
+              <a:rPr lang="en-US" sz="1100" dirty="0">
+                <a:solidFill>
+                  <a:srgbClr val="64748B"/>
+                </a:solidFill>
+                <a:latin typeface="Arial" pitchFamily="34" charset="0"/>
+                <a:ea typeface="Arial" pitchFamily="34" charset="-122"/>
+                <a:cs typeface="Arial" pitchFamily="34" charset="-120"/>
+              </a:rPr>
+              <a:t>TypeScript 6.0 · Tailwind CSS 4 · React Router 7 · TanStack Query 5</a:t>
+            </a:r>
+            <a:endParaRPr lang="en-US" sz="1100" dirty="0"/>
+          </a:p>
+        </p:txBody>
+      </p:sp>
+      <p:sp>
+        <p:nvSpPr>
+          <p:cNvPr id="10" name="Shape 8"/>
+          <p:cNvSpPr/>
+          <p:nvPr/>
+        </p:nvSpPr>
+        <p:spPr>
+          <a:xfrm>
+            <a:off x="640080" y="1892808"/>
+            <a:ext cx="7863840" cy="512064"/>
+          </a:xfrm>
+          <a:prstGeom prst="rect">
+            <a:avLst/>
+          </a:prstGeom>
+          <a:solidFill>
+            <a:srgbClr val="FFFFFF"/>
+          </a:solidFill>
+          <a:ln/>
+        </p:spPr>
+      </p:sp>
+      <p:sp>
+        <p:nvSpPr>
+          <p:cNvPr id="11" name="Shape 9"/>
+          <p:cNvSpPr/>
+          <p:nvPr/>
+        </p:nvSpPr>
+        <p:spPr>
+          <a:xfrm>
+            <a:off x="640080" y="1892808"/>
+            <a:ext cx="54864" cy="512064"/>
+          </a:xfrm>
+          <a:prstGeom prst="rect">
+            <a:avLst/>
+          </a:prstGeom>
+          <a:solidFill>
+            <a:srgbClr val="028090"/>
+          </a:solidFill>
+          <a:ln/>
+        </p:spPr>
+      </p:sp>
+      <p:sp>
+        <p:nvSpPr>
+          <p:cNvPr id="12" name="Text 10"/>
+          <p:cNvSpPr/>
+          <p:nvPr/>
+        </p:nvSpPr>
+        <p:spPr>
+          <a:xfrm>
+            <a:off x="914400" y="1892808"/>
+            <a:ext cx="1005840" cy="512064"/>
+          </a:xfrm>
+          <a:prstGeom prst="rect">
+            <a:avLst/>
+          </a:prstGeom>
+          <a:noFill/>
+          <a:ln/>
+        </p:spPr>
+        <p:txBody>
+          <a:bodyPr wrap="square" lIns="0" tIns="0" rIns="0" bIns="0" rtlCol="0" anchor="ctr"/>
+          <a:lstStyle/>
+          <a:p>
+            <a:pPr indent="0" marL="0">
+              <a:buNone/>
+            </a:pPr>
+            <a:r>
+              <a:rPr lang="en-US" sz="1200" b="1" dirty="0">
+                <a:solidFill>
+                  <a:srgbClr val="028090"/>
+                </a:solidFill>
+                <a:latin typeface="Arial" pitchFamily="34" charset="0"/>
+                <a:ea typeface="Arial" pitchFamily="34" charset="-122"/>
+                <a:cs typeface="Arial" pitchFamily="34" charset="-120"/>
+              </a:rPr>
+              <a:t>后端</a:t>
+            </a:r>
+            <a:endParaRPr lang="en-US" sz="1200" dirty="0"/>
+          </a:p>
+        </p:txBody>
+      </p:sp>
+      <p:sp>
+        <p:nvSpPr>
+          <p:cNvPr id="13" name="Text 11"/>
+          <p:cNvSpPr/>
+          <p:nvPr/>
+        </p:nvSpPr>
+        <p:spPr>
+          <a:xfrm>
+            <a:off x="2011680" y="1892808"/>
+            <a:ext cx="2011680" cy="512064"/>
+          </a:xfrm>
+          <a:prstGeom prst="rect">
+            <a:avLst/>
+          </a:prstGeom>
+          <a:noFill/>
+          <a:ln/>
+        </p:spPr>
+        <p:txBody>
+          <a:bodyPr wrap="square" lIns="0" tIns="0" rIns="0" bIns="0" rtlCol="0" anchor="ctr"/>
+          <a:lstStyle/>
+          <a:p>
+            <a:pPr indent="0" marL="0">
+              <a:buNone/>
+            </a:pPr>
+            <a:r>
+              <a:rPr lang="en-US" sz="1400" b="1" dirty="0">
                 <a:solidFill>
                   <a:srgbClr val="0F172A"/>
                 </a:solidFill>
@@ -4978,22 +5417,22 @@
                 <a:ea typeface="Arial" pitchFamily="34" charset="-122"/>
                 <a:cs typeface="Arial" pitchFamily="34" charset="-120"/>
               </a:rPr>
-              <a:t>▸ Vite 8 极速构建 + HMR 热更新</a:t>
-            </a:r>
-            <a:endParaRPr lang="en-US" sz="1150" dirty="0"/>
-          </a:p>
-        </p:txBody>
-      </p:sp>
-      <p:sp>
-        <p:nvSpPr>
-          <p:cNvPr id="8" name="Text 6"/>
-          <p:cNvSpPr/>
-          <p:nvPr/>
-        </p:nvSpPr>
-        <p:spPr>
-          <a:xfrm>
-            <a:off x="822960" y="2368296"/>
-            <a:ext cx="3840480" cy="347472"/>
+              <a:t>Python FastAPI</a:t>
+            </a:r>
+            <a:endParaRPr lang="en-US" sz="1400" dirty="0"/>
+          </a:p>
+        </p:txBody>
+      </p:sp>
+      <p:sp>
+        <p:nvSpPr>
+          <p:cNvPr id="14" name="Text 12"/>
+          <p:cNvSpPr/>
+          <p:nvPr/>
+        </p:nvSpPr>
+        <p:spPr>
+          <a:xfrm>
+            <a:off x="4297680" y="1892808"/>
+            <a:ext cx="4023360" cy="512064"/>
           </a:xfrm>
           <a:prstGeom prst="rect">
             <a:avLst/>
@@ -5009,7 +5448,125 @@
               <a:buNone/>
             </a:pPr>
             <a:r>
-              <a:rPr lang="en-US" sz="1150" dirty="0">
+              <a:rPr lang="en-US" sz="1100" dirty="0">
+                <a:solidFill>
+                  <a:srgbClr val="64748B"/>
+                </a:solidFill>
+                <a:latin typeface="Arial" pitchFamily="34" charset="0"/>
+                <a:ea typeface="Arial" pitchFamily="34" charset="-122"/>
+                <a:cs typeface="Arial" pitchFamily="34" charset="-120"/>
+              </a:rPr>
+              <a:t>SQLAlchemy 2.0 · Celery 5 · Redis 7 · JWT (Argon2)</a:t>
+            </a:r>
+            <a:endParaRPr lang="en-US" sz="1100" dirty="0"/>
+          </a:p>
+        </p:txBody>
+      </p:sp>
+      <p:sp>
+        <p:nvSpPr>
+          <p:cNvPr id="15" name="Shape 13"/>
+          <p:cNvSpPr/>
+          <p:nvPr/>
+        </p:nvSpPr>
+        <p:spPr>
+          <a:xfrm>
+            <a:off x="640080" y="2505456"/>
+            <a:ext cx="7863840" cy="512064"/>
+          </a:xfrm>
+          <a:prstGeom prst="rect">
+            <a:avLst/>
+          </a:prstGeom>
+          <a:solidFill>
+            <a:srgbClr val="F8FAFC"/>
+          </a:solidFill>
+          <a:ln/>
+        </p:spPr>
+      </p:sp>
+      <p:sp>
+        <p:nvSpPr>
+          <p:cNvPr id="16" name="Shape 14"/>
+          <p:cNvSpPr/>
+          <p:nvPr/>
+        </p:nvSpPr>
+        <p:spPr>
+          <a:xfrm>
+            <a:off x="640080" y="2505456"/>
+            <a:ext cx="54864" cy="512064"/>
+          </a:xfrm>
+          <a:prstGeom prst="rect">
+            <a:avLst/>
+          </a:prstGeom>
+          <a:solidFill>
+            <a:srgbClr val="028090"/>
+          </a:solidFill>
+          <a:ln/>
+        </p:spPr>
+      </p:sp>
+      <p:sp>
+        <p:nvSpPr>
+          <p:cNvPr id="17" name="Text 15"/>
+          <p:cNvSpPr/>
+          <p:nvPr/>
+        </p:nvSpPr>
+        <p:spPr>
+          <a:xfrm>
+            <a:off x="914400" y="2505456"/>
+            <a:ext cx="1005840" cy="512064"/>
+          </a:xfrm>
+          <a:prstGeom prst="rect">
+            <a:avLst/>
+          </a:prstGeom>
+          <a:noFill/>
+          <a:ln/>
+        </p:spPr>
+        <p:txBody>
+          <a:bodyPr wrap="square" lIns="0" tIns="0" rIns="0" bIns="0" rtlCol="0" anchor="ctr"/>
+          <a:lstStyle/>
+          <a:p>
+            <a:pPr indent="0" marL="0">
+              <a:buNone/>
+            </a:pPr>
+            <a:r>
+              <a:rPr lang="en-US" sz="1200" b="1" dirty="0">
+                <a:solidFill>
+                  <a:srgbClr val="028090"/>
+                </a:solidFill>
+                <a:latin typeface="Arial" pitchFamily="34" charset="0"/>
+                <a:ea typeface="Arial" pitchFamily="34" charset="-122"/>
+                <a:cs typeface="Arial" pitchFamily="34" charset="-120"/>
+              </a:rPr>
+              <a:t>数据库</a:t>
+            </a:r>
+            <a:endParaRPr lang="en-US" sz="1200" dirty="0"/>
+          </a:p>
+        </p:txBody>
+      </p:sp>
+      <p:sp>
+        <p:nvSpPr>
+          <p:cNvPr id="18" name="Text 16"/>
+          <p:cNvSpPr/>
+          <p:nvPr/>
+        </p:nvSpPr>
+        <p:spPr>
+          <a:xfrm>
+            <a:off x="2011680" y="2505456"/>
+            <a:ext cx="2011680" cy="512064"/>
+          </a:xfrm>
+          <a:prstGeom prst="rect">
+            <a:avLst/>
+          </a:prstGeom>
+          <a:noFill/>
+          <a:ln/>
+        </p:spPr>
+        <p:txBody>
+          <a:bodyPr wrap="square" lIns="0" tIns="0" rIns="0" bIns="0" rtlCol="0" anchor="ctr"/>
+          <a:lstStyle/>
+          <a:p>
+            <a:pPr indent="0" marL="0">
+              <a:buNone/>
+            </a:pPr>
+            <a:r>
+              <a:rPr lang="en-US" sz="1400" b="1" dirty="0">
                 <a:solidFill>
                   <a:srgbClr val="0F172A"/>
                 </a:solidFill>
@@ -5017,22 +5574,22 @@
                 <a:ea typeface="Arial" pitchFamily="34" charset="-122"/>
                 <a:cs typeface="Arial" pitchFamily="34" charset="-120"/>
               </a:rPr>
-              <a:t>▸ Tailwind CSS 4 原子化样式系统</a:t>
-            </a:r>
-            <a:endParaRPr lang="en-US" sz="1150" dirty="0"/>
-          </a:p>
-        </p:txBody>
-      </p:sp>
-      <p:sp>
-        <p:nvSpPr>
-          <p:cNvPr id="9" name="Text 7"/>
-          <p:cNvSpPr/>
-          <p:nvPr/>
-        </p:nvSpPr>
-        <p:spPr>
-          <a:xfrm>
-            <a:off x="822960" y="2752344"/>
-            <a:ext cx="3840480" cy="347472"/>
+              <a:t>PostgreSQL 16</a:t>
+            </a:r>
+            <a:endParaRPr lang="en-US" sz="1400" dirty="0"/>
+          </a:p>
+        </p:txBody>
+      </p:sp>
+      <p:sp>
+        <p:nvSpPr>
+          <p:cNvPr id="19" name="Text 17"/>
+          <p:cNvSpPr/>
+          <p:nvPr/>
+        </p:nvSpPr>
+        <p:spPr>
+          <a:xfrm>
+            <a:off x="4297680" y="2505456"/>
+            <a:ext cx="4023360" cy="512064"/>
           </a:xfrm>
           <a:prstGeom prst="rect">
             <a:avLst/>
@@ -5048,7 +5605,125 @@
               <a:buNone/>
             </a:pPr>
             <a:r>
-              <a:rPr lang="en-US" sz="1150" dirty="0">
+              <a:rPr lang="en-US" sz="1100" dirty="0">
+                <a:solidFill>
+                  <a:srgbClr val="64748B"/>
+                </a:solidFill>
+                <a:latin typeface="Arial" pitchFamily="34" charset="0"/>
+                <a:ea typeface="Arial" pitchFamily="34" charset="-122"/>
+                <a:cs typeface="Arial" pitchFamily="34" charset="-120"/>
+              </a:rPr>
+              <a:t>Native UUID · TIMESTAMPTZ · JSONB · Alembic</a:t>
+            </a:r>
+            <a:endParaRPr lang="en-US" sz="1100" dirty="0"/>
+          </a:p>
+        </p:txBody>
+      </p:sp>
+      <p:sp>
+        <p:nvSpPr>
+          <p:cNvPr id="20" name="Shape 18"/>
+          <p:cNvSpPr/>
+          <p:nvPr/>
+        </p:nvSpPr>
+        <p:spPr>
+          <a:xfrm>
+            <a:off x="640080" y="3118104"/>
+            <a:ext cx="7863840" cy="512064"/>
+          </a:xfrm>
+          <a:prstGeom prst="rect">
+            <a:avLst/>
+          </a:prstGeom>
+          <a:solidFill>
+            <a:srgbClr val="FFFFFF"/>
+          </a:solidFill>
+          <a:ln/>
+        </p:spPr>
+      </p:sp>
+      <p:sp>
+        <p:nvSpPr>
+          <p:cNvPr id="21" name="Shape 19"/>
+          <p:cNvSpPr/>
+          <p:nvPr/>
+        </p:nvSpPr>
+        <p:spPr>
+          <a:xfrm>
+            <a:off x="640080" y="3118104"/>
+            <a:ext cx="54864" cy="512064"/>
+          </a:xfrm>
+          <a:prstGeom prst="rect">
+            <a:avLst/>
+          </a:prstGeom>
+          <a:solidFill>
+            <a:srgbClr val="028090"/>
+          </a:solidFill>
+          <a:ln/>
+        </p:spPr>
+      </p:sp>
+      <p:sp>
+        <p:nvSpPr>
+          <p:cNvPr id="22" name="Text 20"/>
+          <p:cNvSpPr/>
+          <p:nvPr/>
+        </p:nvSpPr>
+        <p:spPr>
+          <a:xfrm>
+            <a:off x="914400" y="3118104"/>
+            <a:ext cx="1005840" cy="512064"/>
+          </a:xfrm>
+          <a:prstGeom prst="rect">
+            <a:avLst/>
+          </a:prstGeom>
+          <a:noFill/>
+          <a:ln/>
+        </p:spPr>
+        <p:txBody>
+          <a:bodyPr wrap="square" lIns="0" tIns="0" rIns="0" bIns="0" rtlCol="0" anchor="ctr"/>
+          <a:lstStyle/>
+          <a:p>
+            <a:pPr indent="0" marL="0">
+              <a:buNone/>
+            </a:pPr>
+            <a:r>
+              <a:rPr lang="en-US" sz="1200" b="1" dirty="0">
+                <a:solidFill>
+                  <a:srgbClr val="028090"/>
+                </a:solidFill>
+                <a:latin typeface="Arial" pitchFamily="34" charset="0"/>
+                <a:ea typeface="Arial" pitchFamily="34" charset="-122"/>
+                <a:cs typeface="Arial" pitchFamily="34" charset="-120"/>
+              </a:rPr>
+              <a:t>AI</a:t>
+            </a:r>
+            <a:endParaRPr lang="en-US" sz="1200" dirty="0"/>
+          </a:p>
+        </p:txBody>
+      </p:sp>
+      <p:sp>
+        <p:nvSpPr>
+          <p:cNvPr id="23" name="Text 21"/>
+          <p:cNvSpPr/>
+          <p:nvPr/>
+        </p:nvSpPr>
+        <p:spPr>
+          <a:xfrm>
+            <a:off x="2011680" y="3118104"/>
+            <a:ext cx="2011680" cy="512064"/>
+          </a:xfrm>
+          <a:prstGeom prst="rect">
+            <a:avLst/>
+          </a:prstGeom>
+          <a:noFill/>
+          <a:ln/>
+        </p:spPr>
+        <p:txBody>
+          <a:bodyPr wrap="square" lIns="0" tIns="0" rIns="0" bIns="0" rtlCol="0" anchor="ctr"/>
+          <a:lstStyle/>
+          <a:p>
+            <a:pPr indent="0" marL="0">
+              <a:buNone/>
+            </a:pPr>
+            <a:r>
+              <a:rPr lang="en-US" sz="1400" b="1" dirty="0">
                 <a:solidFill>
                   <a:srgbClr val="0F172A"/>
                 </a:solidFill>
@@ -5056,22 +5731,22 @@
                 <a:ea typeface="Arial" pitchFamily="34" charset="-122"/>
                 <a:cs typeface="Arial" pitchFamily="34" charset="-120"/>
               </a:rPr>
-              <a:t>▸ TanStack Query 5 服务端状态管理</a:t>
-            </a:r>
-            <a:endParaRPr lang="en-US" sz="1150" dirty="0"/>
-          </a:p>
-        </p:txBody>
-      </p:sp>
-      <p:sp>
-        <p:nvSpPr>
-          <p:cNvPr id="10" name="Text 8"/>
-          <p:cNvSpPr/>
-          <p:nvPr/>
-        </p:nvSpPr>
-        <p:spPr>
-          <a:xfrm>
-            <a:off x="822960" y="3136392"/>
-            <a:ext cx="3840480" cy="347472"/>
+              <a:t>DeepSeek API</a:t>
+            </a:r>
+            <a:endParaRPr lang="en-US" sz="1400" dirty="0"/>
+          </a:p>
+        </p:txBody>
+      </p:sp>
+      <p:sp>
+        <p:nvSpPr>
+          <p:cNvPr id="24" name="Text 22"/>
+          <p:cNvSpPr/>
+          <p:nvPr/>
+        </p:nvSpPr>
+        <p:spPr>
+          <a:xfrm>
+            <a:off x="4297680" y="3118104"/>
+            <a:ext cx="4023360" cy="512064"/>
           </a:xfrm>
           <a:prstGeom prst="rect">
             <a:avLst/>
@@ -5087,7 +5762,125 @@
               <a:buNone/>
             </a:pPr>
             <a:r>
-              <a:rPr lang="en-US" sz="1150" dirty="0">
+              <a:rPr lang="en-US" sz="1100" dirty="0">
+                <a:solidFill>
+                  <a:srgbClr val="64748B"/>
+                </a:solidFill>
+                <a:latin typeface="Arial" pitchFamily="34" charset="0"/>
+                <a:ea typeface="Arial" pitchFamily="34" charset="-122"/>
+                <a:cs typeface="Arial" pitchFamily="34" charset="-120"/>
+              </a:rPr>
+              <a:t>Chat + Reasoner · 熔断器 · 速率限制 · 配额</a:t>
+            </a:r>
+            <a:endParaRPr lang="en-US" sz="1100" dirty="0"/>
+          </a:p>
+        </p:txBody>
+      </p:sp>
+      <p:sp>
+        <p:nvSpPr>
+          <p:cNvPr id="25" name="Shape 23"/>
+          <p:cNvSpPr/>
+          <p:nvPr/>
+        </p:nvSpPr>
+        <p:spPr>
+          <a:xfrm>
+            <a:off x="640080" y="3730752"/>
+            <a:ext cx="7863840" cy="512064"/>
+          </a:xfrm>
+          <a:prstGeom prst="rect">
+            <a:avLst/>
+          </a:prstGeom>
+          <a:solidFill>
+            <a:srgbClr val="F8FAFC"/>
+          </a:solidFill>
+          <a:ln/>
+        </p:spPr>
+      </p:sp>
+      <p:sp>
+        <p:nvSpPr>
+          <p:cNvPr id="26" name="Shape 24"/>
+          <p:cNvSpPr/>
+          <p:nvPr/>
+        </p:nvSpPr>
+        <p:spPr>
+          <a:xfrm>
+            <a:off x="640080" y="3730752"/>
+            <a:ext cx="54864" cy="512064"/>
+          </a:xfrm>
+          <a:prstGeom prst="rect">
+            <a:avLst/>
+          </a:prstGeom>
+          <a:solidFill>
+            <a:srgbClr val="028090"/>
+          </a:solidFill>
+          <a:ln/>
+        </p:spPr>
+      </p:sp>
+      <p:sp>
+        <p:nvSpPr>
+          <p:cNvPr id="27" name="Text 25"/>
+          <p:cNvSpPr/>
+          <p:nvPr/>
+        </p:nvSpPr>
+        <p:spPr>
+          <a:xfrm>
+            <a:off x="914400" y="3730752"/>
+            <a:ext cx="1005840" cy="512064"/>
+          </a:xfrm>
+          <a:prstGeom prst="rect">
+            <a:avLst/>
+          </a:prstGeom>
+          <a:noFill/>
+          <a:ln/>
+        </p:spPr>
+        <p:txBody>
+          <a:bodyPr wrap="square" lIns="0" tIns="0" rIns="0" bIns="0" rtlCol="0" anchor="ctr"/>
+          <a:lstStyle/>
+          <a:p>
+            <a:pPr indent="0" marL="0">
+              <a:buNone/>
+            </a:pPr>
+            <a:r>
+              <a:rPr lang="en-US" sz="1200" b="1" dirty="0">
+                <a:solidFill>
+                  <a:srgbClr val="028090"/>
+                </a:solidFill>
+                <a:latin typeface="Arial" pitchFamily="34" charset="0"/>
+                <a:ea typeface="Arial" pitchFamily="34" charset="-122"/>
+                <a:cs typeface="Arial" pitchFamily="34" charset="-120"/>
+              </a:rPr>
+              <a:t>存储</a:t>
+            </a:r>
+            <a:endParaRPr lang="en-US" sz="1200" dirty="0"/>
+          </a:p>
+        </p:txBody>
+      </p:sp>
+      <p:sp>
+        <p:nvSpPr>
+          <p:cNvPr id="28" name="Text 26"/>
+          <p:cNvSpPr/>
+          <p:nvPr/>
+        </p:nvSpPr>
+        <p:spPr>
+          <a:xfrm>
+            <a:off x="2011680" y="3730752"/>
+            <a:ext cx="2011680" cy="512064"/>
+          </a:xfrm>
+          <a:prstGeom prst="rect">
+            <a:avLst/>
+          </a:prstGeom>
+          <a:noFill/>
+          <a:ln/>
+        </p:spPr>
+        <p:txBody>
+          <a:bodyPr wrap="square" lIns="0" tIns="0" rIns="0" bIns="0" rtlCol="0" anchor="ctr"/>
+          <a:lstStyle/>
+          <a:p>
+            <a:pPr indent="0" marL="0">
+              <a:buNone/>
+            </a:pPr>
+            <a:r>
+              <a:rPr lang="en-US" sz="1400" b="1" dirty="0">
                 <a:solidFill>
                   <a:srgbClr val="0F172A"/>
                 </a:solidFill>
@@ -5095,22 +5888,22 @@
                 <a:ea typeface="Arial" pitchFamily="34" charset="-122"/>
                 <a:cs typeface="Arial" pitchFamily="34" charset="-120"/>
               </a:rPr>
-              <a:t>▸ React Router 7 懒加载路由</a:t>
-            </a:r>
-            <a:endParaRPr lang="en-US" sz="1150" dirty="0"/>
-          </a:p>
-        </p:txBody>
-      </p:sp>
-      <p:sp>
-        <p:nvSpPr>
-          <p:cNvPr id="11" name="Text 9"/>
-          <p:cNvSpPr/>
-          <p:nvPr/>
-        </p:nvSpPr>
-        <p:spPr>
-          <a:xfrm>
-            <a:off x="822960" y="3520440"/>
-            <a:ext cx="3840480" cy="347472"/>
+              <a:t>MinIO</a:t>
+            </a:r>
+            <a:endParaRPr lang="en-US" sz="1400" dirty="0"/>
+          </a:p>
+        </p:txBody>
+      </p:sp>
+      <p:sp>
+        <p:nvSpPr>
+          <p:cNvPr id="29" name="Text 27"/>
+          <p:cNvSpPr/>
+          <p:nvPr/>
+        </p:nvSpPr>
+        <p:spPr>
+          <a:xfrm>
+            <a:off x="4297680" y="3730752"/>
+            <a:ext cx="4023360" cy="512064"/>
           </a:xfrm>
           <a:prstGeom prst="rect">
             <a:avLst/>
@@ -5126,7 +5919,125 @@
               <a:buNone/>
             </a:pPr>
             <a:r>
-              <a:rPr lang="en-US" sz="1150" dirty="0">
+              <a:rPr lang="en-US" sz="1100" dirty="0">
+                <a:solidFill>
+                  <a:srgbClr val="64748B"/>
+                </a:solidFill>
+                <a:latin typeface="Arial" pitchFamily="34" charset="0"/>
+                <a:ea typeface="Arial" pitchFamily="34" charset="-122"/>
+                <a:cs typeface="Arial" pitchFamily="34" charset="-120"/>
+              </a:rPr>
+              <a:t>S3 兼容对象存储 · 文档/版本/导出管理</a:t>
+            </a:r>
+            <a:endParaRPr lang="en-US" sz="1100" dirty="0"/>
+          </a:p>
+        </p:txBody>
+      </p:sp>
+      <p:sp>
+        <p:nvSpPr>
+          <p:cNvPr id="30" name="Shape 28"/>
+          <p:cNvSpPr/>
+          <p:nvPr/>
+        </p:nvSpPr>
+        <p:spPr>
+          <a:xfrm>
+            <a:off x="640080" y="4343400"/>
+            <a:ext cx="7863840" cy="512064"/>
+          </a:xfrm>
+          <a:prstGeom prst="rect">
+            <a:avLst/>
+          </a:prstGeom>
+          <a:solidFill>
+            <a:srgbClr val="FFFFFF"/>
+          </a:solidFill>
+          <a:ln/>
+        </p:spPr>
+      </p:sp>
+      <p:sp>
+        <p:nvSpPr>
+          <p:cNvPr id="31" name="Shape 29"/>
+          <p:cNvSpPr/>
+          <p:nvPr/>
+        </p:nvSpPr>
+        <p:spPr>
+          <a:xfrm>
+            <a:off x="640080" y="4343400"/>
+            <a:ext cx="54864" cy="512064"/>
+          </a:xfrm>
+          <a:prstGeom prst="rect">
+            <a:avLst/>
+          </a:prstGeom>
+          <a:solidFill>
+            <a:srgbClr val="028090"/>
+          </a:solidFill>
+          <a:ln/>
+        </p:spPr>
+      </p:sp>
+      <p:sp>
+        <p:nvSpPr>
+          <p:cNvPr id="32" name="Text 30"/>
+          <p:cNvSpPr/>
+          <p:nvPr/>
+        </p:nvSpPr>
+        <p:spPr>
+          <a:xfrm>
+            <a:off x="914400" y="4343400"/>
+            <a:ext cx="1005840" cy="512064"/>
+          </a:xfrm>
+          <a:prstGeom prst="rect">
+            <a:avLst/>
+          </a:prstGeom>
+          <a:noFill/>
+          <a:ln/>
+        </p:spPr>
+        <p:txBody>
+          <a:bodyPr wrap="square" lIns="0" tIns="0" rIns="0" bIns="0" rtlCol="0" anchor="ctr"/>
+          <a:lstStyle/>
+          <a:p>
+            <a:pPr indent="0" marL="0">
+              <a:buNone/>
+            </a:pPr>
+            <a:r>
+              <a:rPr lang="en-US" sz="1200" b="1" dirty="0">
+                <a:solidFill>
+                  <a:srgbClr val="028090"/>
+                </a:solidFill>
+                <a:latin typeface="Arial" pitchFamily="34" charset="0"/>
+                <a:ea typeface="Arial" pitchFamily="34" charset="-122"/>
+                <a:cs typeface="Arial" pitchFamily="34" charset="-120"/>
+              </a:rPr>
+              <a:t>部署</a:t>
+            </a:r>
+            <a:endParaRPr lang="en-US" sz="1200" dirty="0"/>
+          </a:p>
+        </p:txBody>
+      </p:sp>
+      <p:sp>
+        <p:nvSpPr>
+          <p:cNvPr id="33" name="Text 31"/>
+          <p:cNvSpPr/>
+          <p:nvPr/>
+        </p:nvSpPr>
+        <p:spPr>
+          <a:xfrm>
+            <a:off x="2011680" y="4343400"/>
+            <a:ext cx="2011680" cy="512064"/>
+          </a:xfrm>
+          <a:prstGeom prst="rect">
+            <a:avLst/>
+          </a:prstGeom>
+          <a:noFill/>
+          <a:ln/>
+        </p:spPr>
+        <p:txBody>
+          <a:bodyPr wrap="square" lIns="0" tIns="0" rIns="0" bIns="0" rtlCol="0" anchor="ctr"/>
+          <a:lstStyle/>
+          <a:p>
+            <a:pPr indent="0" marL="0">
+              <a:buNone/>
+            </a:pPr>
+            <a:r>
+              <a:rPr lang="en-US" sz="1400" b="1" dirty="0">
                 <a:solidFill>
                   <a:srgbClr val="0F172A"/>
                 </a:solidFill>
@@ -5134,22 +6045,22 @@
                 <a:ea typeface="Arial" pitchFamily="34" charset="-122"/>
                 <a:cs typeface="Arial" pitchFamily="34" charset="-120"/>
               </a:rPr>
-              <a:t>▸ i18next 中英文国际化</a:t>
-            </a:r>
-            <a:endParaRPr lang="en-US" sz="1150" dirty="0"/>
-          </a:p>
-        </p:txBody>
-      </p:sp>
-      <p:sp>
-        <p:nvSpPr>
-          <p:cNvPr id="12" name="Text 10"/>
-          <p:cNvSpPr/>
-          <p:nvPr/>
-        </p:nvSpPr>
-        <p:spPr>
-          <a:xfrm>
-            <a:off x="822960" y="3904488"/>
-            <a:ext cx="3840480" cy="347472"/>
+              <a:t>Docker Compose</a:t>
+            </a:r>
+            <a:endParaRPr lang="en-US" sz="1400" dirty="0"/>
+          </a:p>
+        </p:txBody>
+      </p:sp>
+      <p:sp>
+        <p:nvSpPr>
+          <p:cNvPr id="34" name="Text 32"/>
+          <p:cNvSpPr/>
+          <p:nvPr/>
+        </p:nvSpPr>
+        <p:spPr>
+          <a:xfrm>
+            <a:off x="4297680" y="4343400"/>
+            <a:ext cx="4023360" cy="512064"/>
           </a:xfrm>
           <a:prstGeom prst="rect">
             <a:avLst/>
@@ -5165,368 +6076,17 @@
               <a:buNone/>
             </a:pPr>
             <a:r>
-              <a:rPr lang="en-US" sz="1150" dirty="0">
-                <a:solidFill>
-                  <a:srgbClr val="0F172A"/>
-                </a:solidFill>
-                <a:latin typeface="Arial" pitchFamily="34" charset="0"/>
-                <a:ea typeface="Arial" pitchFamily="34" charset="-122"/>
-                <a:cs typeface="Arial" pitchFamily="34" charset="-120"/>
-              </a:rPr>
-              <a:t>▸ 16 个可复用 UI 组件</a:t>
-            </a:r>
-            <a:endParaRPr lang="en-US" sz="1150" dirty="0"/>
-          </a:p>
-        </p:txBody>
-      </p:sp>
-      <p:sp>
-        <p:nvSpPr>
-          <p:cNvPr id="13" name="Text 11"/>
-          <p:cNvSpPr/>
-          <p:nvPr/>
-        </p:nvSpPr>
-        <p:spPr>
-          <a:xfrm>
-            <a:off x="4846320" y="1143000"/>
-            <a:ext cx="3840480" cy="347472"/>
-          </a:xfrm>
-          <a:prstGeom prst="rect">
-            <a:avLst/>
-          </a:prstGeom>
-          <a:noFill/>
-          <a:ln/>
-        </p:spPr>
-        <p:txBody>
-          <a:bodyPr wrap="square" lIns="0" tIns="0" rIns="0" bIns="0" rtlCol="0" anchor="ctr"/>
-          <a:lstStyle/>
-          <a:p>
-            <a:pPr indent="0" marL="0">
-              <a:buNone/>
-            </a:pPr>
-            <a:r>
-              <a:rPr lang="en-US" sz="1600" b="1" dirty="0">
-                <a:solidFill>
-                  <a:srgbClr val="2563EB"/>
-                </a:solidFill>
-                <a:latin typeface="Arial" pitchFamily="34" charset="0"/>
-                <a:ea typeface="Arial" pitchFamily="34" charset="-122"/>
-                <a:cs typeface="Arial" pitchFamily="34" charset="-120"/>
-              </a:rPr>
-              <a:t>页面与查看器</a:t>
-            </a:r>
-            <a:endParaRPr lang="en-US" sz="1600" dirty="0"/>
-          </a:p>
-        </p:txBody>
-      </p:sp>
-      <p:sp>
-        <p:nvSpPr>
-          <p:cNvPr id="14" name="Text 12"/>
-          <p:cNvSpPr/>
-          <p:nvPr/>
-        </p:nvSpPr>
-        <p:spPr>
-          <a:xfrm>
-            <a:off x="5029200" y="1600200"/>
-            <a:ext cx="3840480" cy="347472"/>
-          </a:xfrm>
-          <a:prstGeom prst="rect">
-            <a:avLst/>
-          </a:prstGeom>
-          <a:noFill/>
-          <a:ln/>
-        </p:spPr>
-        <p:txBody>
-          <a:bodyPr wrap="square" lIns="0" tIns="0" rIns="0" bIns="0" rtlCol="0" anchor="ctr"/>
-          <a:lstStyle/>
-          <a:p>
-            <a:pPr indent="0" marL="0">
-              <a:buNone/>
-            </a:pPr>
-            <a:r>
-              <a:rPr lang="en-US" sz="1150" dirty="0">
-                <a:solidFill>
-                  <a:srgbClr val="0F172A"/>
-                </a:solidFill>
-                <a:latin typeface="Arial" pitchFamily="34" charset="0"/>
-                <a:ea typeface="Arial" pitchFamily="34" charset="-122"/>
-                <a:cs typeface="Arial" pitchFamily="34" charset="-120"/>
-              </a:rPr>
-              <a:t>▸ Landing · Login · Register</a:t>
-            </a:r>
-            <a:endParaRPr lang="en-US" sz="1150" dirty="0"/>
-          </a:p>
-        </p:txBody>
-      </p:sp>
-      <p:sp>
-        <p:nvSpPr>
-          <p:cNvPr id="15" name="Text 13"/>
-          <p:cNvSpPr/>
-          <p:nvPr/>
-        </p:nvSpPr>
-        <p:spPr>
-          <a:xfrm>
-            <a:off x="5029200" y="1984248"/>
-            <a:ext cx="3840480" cy="347472"/>
-          </a:xfrm>
-          <a:prstGeom prst="rect">
-            <a:avLst/>
-          </a:prstGeom>
-          <a:noFill/>
-          <a:ln/>
-        </p:spPr>
-        <p:txBody>
-          <a:bodyPr wrap="square" lIns="0" tIns="0" rIns="0" bIns="0" rtlCol="0" anchor="ctr"/>
-          <a:lstStyle/>
-          <a:p>
-            <a:pPr indent="0" marL="0">
-              <a:buNone/>
-            </a:pPr>
-            <a:r>
-              <a:rPr lang="en-US" sz="1150" dirty="0">
-                <a:solidFill>
-                  <a:srgbClr val="0F172A"/>
-                </a:solidFill>
-                <a:latin typeface="Arial" pitchFamily="34" charset="0"/>
-                <a:ea typeface="Arial" pitchFamily="34" charset="-122"/>
-                <a:cs typeface="Arial" pitchFamily="34" charset="-120"/>
-              </a:rPr>
-              <a:t>▸ Dashboard（文档管理+上传）</a:t>
-            </a:r>
-            <a:endParaRPr lang="en-US" sz="1150" dirty="0"/>
-          </a:p>
-        </p:txBody>
-      </p:sp>
-      <p:sp>
-        <p:nvSpPr>
-          <p:cNvPr id="16" name="Text 14"/>
-          <p:cNvSpPr/>
-          <p:nvPr/>
-        </p:nvSpPr>
-        <p:spPr>
-          <a:xfrm>
-            <a:off x="5029200" y="2368296"/>
-            <a:ext cx="3840480" cy="347472"/>
-          </a:xfrm>
-          <a:prstGeom prst="rect">
-            <a:avLst/>
-          </a:prstGeom>
-          <a:noFill/>
-          <a:ln/>
-        </p:spPr>
-        <p:txBody>
-          <a:bodyPr wrap="square" lIns="0" tIns="0" rIns="0" bIns="0" rtlCol="0" anchor="ctr"/>
-          <a:lstStyle/>
-          <a:p>
-            <a:pPr indent="0" marL="0">
-              <a:buNone/>
-            </a:pPr>
-            <a:r>
-              <a:rPr lang="en-US" sz="1150" dirty="0">
-                <a:solidFill>
-                  <a:srgbClr val="0F172A"/>
-                </a:solidFill>
-                <a:latin typeface="Arial" pitchFamily="34" charset="0"/>
-                <a:ea typeface="Arial" pitchFamily="34" charset="-122"/>
-                <a:cs typeface="Arial" pitchFamily="34" charset="-120"/>
-              </a:rPr>
-              <a:t>▸ DocumentEditor（编辑器+AI面板）</a:t>
-            </a:r>
-            <a:endParaRPr lang="en-US" sz="1150" dirty="0"/>
-          </a:p>
-        </p:txBody>
-      </p:sp>
-      <p:sp>
-        <p:nvSpPr>
-          <p:cNvPr id="17" name="Text 15"/>
-          <p:cNvSpPr/>
-          <p:nvPr/>
-        </p:nvSpPr>
-        <p:spPr>
-          <a:xfrm>
-            <a:off x="5029200" y="2752344"/>
-            <a:ext cx="3840480" cy="347472"/>
-          </a:xfrm>
-          <a:prstGeom prst="rect">
-            <a:avLst/>
-          </a:prstGeom>
-          <a:noFill/>
-          <a:ln/>
-        </p:spPr>
-        <p:txBody>
-          <a:bodyPr wrap="square" lIns="0" tIns="0" rIns="0" bIns="0" rtlCol="0" anchor="ctr"/>
-          <a:lstStyle/>
-          <a:p>
-            <a:pPr indent="0" marL="0">
-              <a:buNone/>
-            </a:pPr>
-            <a:r>
-              <a:rPr lang="en-US" sz="1150" dirty="0">
-                <a:solidFill>
-                  <a:srgbClr val="0F172A"/>
-                </a:solidFill>
-                <a:latin typeface="Arial" pitchFamily="34" charset="0"/>
-                <a:ea typeface="Arial" pitchFamily="34" charset="-122"/>
-                <a:cs typeface="Arial" pitchFamily="34" charset="-120"/>
-              </a:rPr>
-              <a:t>▸ VersionHistory（版本列表+Diff）</a:t>
-            </a:r>
-            <a:endParaRPr lang="en-US" sz="1150" dirty="0"/>
-          </a:p>
-        </p:txBody>
-      </p:sp>
-      <p:sp>
-        <p:nvSpPr>
-          <p:cNvPr id="18" name="Text 16"/>
-          <p:cNvSpPr/>
-          <p:nvPr/>
-        </p:nvSpPr>
-        <p:spPr>
-          <a:xfrm>
-            <a:off x="5029200" y="3136392"/>
-            <a:ext cx="3840480" cy="347472"/>
-          </a:xfrm>
-          <a:prstGeom prst="rect">
-            <a:avLst/>
-          </a:prstGeom>
-          <a:noFill/>
-          <a:ln/>
-        </p:spPr>
-        <p:txBody>
-          <a:bodyPr wrap="square" lIns="0" tIns="0" rIns="0" bIns="0" rtlCol="0" anchor="ctr"/>
-          <a:lstStyle/>
-          <a:p>
-            <a:pPr indent="0" marL="0">
-              <a:buNone/>
-            </a:pPr>
-            <a:r>
-              <a:rPr lang="en-US" sz="1150" dirty="0">
-                <a:solidFill>
-                  <a:srgbClr val="0F172A"/>
-                </a:solidFill>
-                <a:latin typeface="Arial" pitchFamily="34" charset="0"/>
-                <a:ea typeface="Arial" pitchFamily="34" charset="-122"/>
-                <a:cs typeface="Arial" pitchFamily="34" charset="-120"/>
-              </a:rPr>
-              <a:t>▸ Collaboration（会话+邀请+权限）</a:t>
-            </a:r>
-            <a:endParaRPr lang="en-US" sz="1150" dirty="0"/>
-          </a:p>
-        </p:txBody>
-      </p:sp>
-      <p:sp>
-        <p:nvSpPr>
-          <p:cNvPr id="19" name="Text 17"/>
-          <p:cNvSpPr/>
-          <p:nvPr/>
-        </p:nvSpPr>
-        <p:spPr>
-          <a:xfrm>
-            <a:off x="5029200" y="3520440"/>
-            <a:ext cx="3840480" cy="347472"/>
-          </a:xfrm>
-          <a:prstGeom prst="rect">
-            <a:avLst/>
-          </a:prstGeom>
-          <a:noFill/>
-          <a:ln/>
-        </p:spPr>
-        <p:txBody>
-          <a:bodyPr wrap="square" lIns="0" tIns="0" rIns="0" bIns="0" rtlCol="0" anchor="ctr"/>
-          <a:lstStyle/>
-          <a:p>
-            <a:pPr indent="0" marL="0">
-              <a:buNone/>
-            </a:pPr>
-            <a:r>
-              <a:rPr lang="en-US" sz="1150" dirty="0">
-                <a:solidFill>
-                  <a:srgbClr val="0F172A"/>
-                </a:solidFill>
-                <a:latin typeface="Arial" pitchFamily="34" charset="0"/>
-                <a:ea typeface="Arial" pitchFamily="34" charset="-122"/>
-                <a:cs typeface="Arial" pitchFamily="34" charset="-120"/>
-              </a:rPr>
-              <a:t>▸ AdminDashboard · Settings</a:t>
-            </a:r>
-            <a:endParaRPr lang="en-US" sz="1150" dirty="0"/>
-          </a:p>
-        </p:txBody>
-      </p:sp>
-      <p:sp>
-        <p:nvSpPr>
-          <p:cNvPr id="20" name="Text 18"/>
-          <p:cNvSpPr/>
-          <p:nvPr/>
-        </p:nvSpPr>
-        <p:spPr>
-          <a:xfrm>
-            <a:off x="5029200" y="3904488"/>
-            <a:ext cx="3840480" cy="347472"/>
-          </a:xfrm>
-          <a:prstGeom prst="rect">
-            <a:avLst/>
-          </a:prstGeom>
-          <a:noFill/>
-          <a:ln/>
-        </p:spPr>
-        <p:txBody>
-          <a:bodyPr wrap="square" lIns="0" tIns="0" rIns="0" bIns="0" rtlCol="0" anchor="ctr"/>
-          <a:lstStyle/>
-          <a:p>
-            <a:pPr indent="0" marL="0">
-              <a:buNone/>
-            </a:pPr>
-            <a:r>
-              <a:rPr lang="en-US" sz="1150" dirty="0">
-                <a:solidFill>
-                  <a:srgbClr val="0F172A"/>
-                </a:solidFill>
-                <a:latin typeface="Arial" pitchFamily="34" charset="0"/>
-                <a:ea typeface="Arial" pitchFamily="34" charset="-122"/>
-                <a:cs typeface="Arial" pitchFamily="34" charset="-120"/>
-              </a:rPr>
-              <a:t>▸ AuthCallback · GitHubImport</a:t>
-            </a:r>
-            <a:endParaRPr lang="en-US" sz="1150" dirty="0"/>
-          </a:p>
-        </p:txBody>
-      </p:sp>
-      <p:sp>
-        <p:nvSpPr>
-          <p:cNvPr id="21" name="Text 19"/>
-          <p:cNvSpPr/>
-          <p:nvPr/>
-        </p:nvSpPr>
-        <p:spPr>
-          <a:xfrm>
-            <a:off x="5029200" y="4288536"/>
-            <a:ext cx="3840480" cy="347472"/>
-          </a:xfrm>
-          <a:prstGeom prst="rect">
-            <a:avLst/>
-          </a:prstGeom>
-          <a:noFill/>
-          <a:ln/>
-        </p:spPr>
-        <p:txBody>
-          <a:bodyPr wrap="square" lIns="0" tIns="0" rIns="0" bIns="0" rtlCol="0" anchor="ctr"/>
-          <a:lstStyle/>
-          <a:p>
-            <a:pPr indent="0" marL="0">
-              <a:buNone/>
-            </a:pPr>
-            <a:r>
-              <a:rPr lang="en-US" sz="1150" dirty="0">
-                <a:solidFill>
-                  <a:srgbClr val="0F172A"/>
-                </a:solidFill>
-                <a:latin typeface="Arial" pitchFamily="34" charset="0"/>
-                <a:ea typeface="Arial" pitchFamily="34" charset="-122"/>
-                <a:cs typeface="Arial" pitchFamily="34" charset="-120"/>
-              </a:rPr>
-              <a:t>▸ Viewers: PDF · PPTX · Image · Text</a:t>
-            </a:r>
-            <a:endParaRPr lang="en-US" sz="1150" dirty="0"/>
+              <a:rPr lang="en-US" sz="1100" dirty="0">
+                <a:solidFill>
+                  <a:srgbClr val="64748B"/>
+                </a:solidFill>
+                <a:latin typeface="Arial" pitchFamily="34" charset="0"/>
+                <a:ea typeface="Arial" pitchFamily="34" charset="-122"/>
+                <a:cs typeface="Arial" pitchFamily="34" charset="-120"/>
+              </a:rPr>
+              <a:t>PG + Redis + MinIO + API + Worker 一键编排</a:t>
+            </a:r>
+            <a:endParaRPr lang="en-US" sz="1100" dirty="0"/>
           </a:p>
         </p:txBody>
       </p:sp>
@@ -5607,7 +6167,7 @@
               <a:buNone/>
             </a:pPr>
             <a:r>
-              <a:rPr lang="en-US" sz="3000" b="1" dirty="0">
+              <a:rPr lang="en-US" sz="3200" b="1" dirty="0">
                 <a:solidFill>
                   <a:srgbClr val="0F172A"/>
                 </a:solidFill>
@@ -5615,9 +6175,9 @@
                 <a:ea typeface="Arial Black" pitchFamily="34" charset="-122"/>
                 <a:cs typeface="Arial Black" pitchFamily="34" charset="-120"/>
               </a:rPr>
-              <a:t>后端与数据库 — FastAPI + PostgreSQL 16</a:t>
-            </a:r>
-            <a:endParaRPr lang="en-US" sz="3000" dirty="0"/>
+              <a:t>前端架构</a:t>
+            </a:r>
+            <a:endParaRPr lang="en-US" sz="3200" dirty="0"/>
           </a:p>
         </p:txBody>
       </p:sp>
@@ -5650,7 +6210,7 @@
         <p:spPr>
           <a:xfrm>
             <a:off x="640080" y="1143000"/>
-            <a:ext cx="3840480" cy="347472"/>
+            <a:ext cx="3840480" cy="320040"/>
           </a:xfrm>
           <a:prstGeom prst="rect">
             <a:avLst/>
@@ -5674,7 +6234,7 @@
                 <a:ea typeface="Arial" pitchFamily="34" charset="-122"/>
                 <a:cs typeface="Arial" pitchFamily="34" charset="-120"/>
               </a:rPr>
-              <a:t>后端服务</a:t>
+              <a:t>技术架构</a:t>
             </a:r>
             <a:endParaRPr lang="en-US" sz="1600" dirty="0"/>
           </a:p>
@@ -5688,7 +6248,7 @@
         </p:nvSpPr>
         <p:spPr>
           <a:xfrm>
-            <a:off x="822960" y="1600200"/>
+            <a:off x="822960" y="1554480"/>
             <a:ext cx="3840480" cy="320040"/>
           </a:xfrm>
           <a:prstGeom prst="rect">
@@ -5713,7 +6273,7 @@
                 <a:ea typeface="Arial" pitchFamily="34" charset="-122"/>
                 <a:cs typeface="Arial" pitchFamily="34" charset="-120"/>
               </a:rPr>
-              <a:t>▸ 10 组 REST API 路由模块</a:t>
+              <a:t>▸ React 19 Hooks 函数式组件</a:t>
             </a:r>
             <a:endParaRPr lang="en-US" sz="1100" dirty="0"/>
           </a:p>
@@ -5727,7 +6287,7 @@
         </p:nvSpPr>
         <p:spPr>
           <a:xfrm>
-            <a:off x="822960" y="1947672"/>
+            <a:off x="822960" y="1920240"/>
             <a:ext cx="3840480" cy="320040"/>
           </a:xfrm>
           <a:prstGeom prst="rect">
@@ -5752,7 +6312,7 @@
                 <a:ea typeface="Arial" pitchFamily="34" charset="-122"/>
                 <a:cs typeface="Arial" pitchFamily="34" charset="-120"/>
               </a:rPr>
-              <a:t>▸ 8 个业务服务层</a:t>
+              <a:t>▸ Vite 8 极速构建 + HMR</a:t>
             </a:r>
             <a:endParaRPr lang="en-US" sz="1100" dirty="0"/>
           </a:p>
@@ -5766,7 +6326,7 @@
         </p:nvSpPr>
         <p:spPr>
           <a:xfrm>
-            <a:off x="822960" y="2295144"/>
+            <a:off x="822960" y="2286000"/>
             <a:ext cx="3840480" cy="320040"/>
           </a:xfrm>
           <a:prstGeom prst="rect">
@@ -5791,7 +6351,7 @@
                 <a:ea typeface="Arial" pitchFamily="34" charset="-122"/>
                 <a:cs typeface="Arial" pitchFamily="34" charset="-120"/>
               </a:rPr>
-              <a:t>▸ WebSocket 实时協作端点</a:t>
+              <a:t>▸ Tailwind CSS 4 原子化样式</a:t>
             </a:r>
             <a:endParaRPr lang="en-US" sz="1100" dirty="0"/>
           </a:p>
@@ -5805,7 +6365,7 @@
         </p:nvSpPr>
         <p:spPr>
           <a:xfrm>
-            <a:off x="822960" y="2642616"/>
+            <a:off x="822960" y="2651760"/>
             <a:ext cx="3840480" cy="320040"/>
           </a:xfrm>
           <a:prstGeom prst="rect">
@@ -5830,7 +6390,7 @@
                 <a:ea typeface="Arial" pitchFamily="34" charset="-122"/>
                 <a:cs typeface="Arial" pitchFamily="34" charset="-120"/>
               </a:rPr>
-              <a:t>▸ Celery 异步任务</a:t>
+              <a:t>▸ TanStack Query 5 状态管理</a:t>
             </a:r>
             <a:endParaRPr lang="en-US" sz="1100" dirty="0"/>
           </a:p>
@@ -5844,7 +6404,7 @@
         </p:nvSpPr>
         <p:spPr>
           <a:xfrm>
-            <a:off x="822960" y="2990088"/>
+            <a:off x="822960" y="3017520"/>
             <a:ext cx="3840480" cy="320040"/>
           </a:xfrm>
           <a:prstGeom prst="rect">
@@ -5869,7 +6429,7 @@
                 <a:ea typeface="Arial" pitchFamily="34" charset="-122"/>
                 <a:cs typeface="Arial" pitchFamily="34" charset="-120"/>
               </a:rPr>
-              <a:t>▸ JWT 双令牌认证</a:t>
+              <a:t>▸ React Router 7 懒加载路由</a:t>
             </a:r>
             <a:endParaRPr lang="en-US" sz="1100" dirty="0"/>
           </a:p>
@@ -5883,7 +6443,7 @@
         </p:nvSpPr>
         <p:spPr>
           <a:xfrm>
-            <a:off x="822960" y="3337560"/>
+            <a:off x="822960" y="3383280"/>
             <a:ext cx="3840480" cy="320040"/>
           </a:xfrm>
           <a:prstGeom prst="rect">
@@ -5908,7 +6468,7 @@
                 <a:ea typeface="Arial" pitchFamily="34" charset="-122"/>
                 <a:cs typeface="Arial" pitchFamily="34" charset="-120"/>
               </a:rPr>
-              <a:t>▸ 四级用户权限体系</a:t>
+              <a:t>▸ i18next 中英国际化</a:t>
             </a:r>
             <a:endParaRPr lang="en-US" sz="1100" dirty="0"/>
           </a:p>
@@ -5922,7 +6482,7 @@
         </p:nvSpPr>
         <p:spPr>
           <a:xfrm>
-            <a:off x="822960" y="3685032"/>
+            <a:off x="822960" y="3749040"/>
             <a:ext cx="3840480" cy="320040"/>
           </a:xfrm>
           <a:prstGeom prst="rect">
@@ -5947,7 +6507,7 @@
                 <a:ea typeface="Arial" pitchFamily="34" charset="-122"/>
                 <a:cs typeface="Arial" pitchFamily="34" charset="-120"/>
               </a:rPr>
-              <a:t>▸ Redis 多层缓存</a:t>
+              <a:t>▸ 16 个可复用 UI 组件</a:t>
             </a:r>
             <a:endParaRPr lang="en-US" sz="1100" dirty="0"/>
           </a:p>
@@ -5962,7 +6522,7 @@
         <p:spPr>
           <a:xfrm>
             <a:off x="4846320" y="1143000"/>
-            <a:ext cx="3840480" cy="347472"/>
+            <a:ext cx="3840480" cy="320040"/>
           </a:xfrm>
           <a:prstGeom prst="rect">
             <a:avLst/>
@@ -5986,7 +6546,7 @@
                 <a:ea typeface="Arial" pitchFamily="34" charset="-122"/>
                 <a:cs typeface="Arial" pitchFamily="34" charset="-120"/>
               </a:rPr>
-              <a:t>数据模型（16 张表）</a:t>
+              <a:t>页面 &amp; 查看器</a:t>
             </a:r>
             <a:endParaRPr lang="en-US" sz="1600" dirty="0"/>
           </a:p>
@@ -6000,7 +6560,7 @@
         </p:nvSpPr>
         <p:spPr>
           <a:xfrm>
-            <a:off x="5029200" y="1600200"/>
+            <a:off x="5029200" y="1554480"/>
             <a:ext cx="3840480" cy="320040"/>
           </a:xfrm>
           <a:prstGeom prst="rect">
@@ -6021,11 +6581,11 @@
                 <a:solidFill>
                   <a:srgbClr val="0F172A"/>
                 </a:solidFill>
-                <a:latin typeface="Consolas" pitchFamily="34" charset="0"/>
-                <a:ea typeface="Consolas" pitchFamily="34" charset="-122"/>
-                <a:cs typeface="Consolas" pitchFamily="34" charset="-120"/>
-              </a:rPr>
-              <a:t>▸ users · refresh_tokens</a:t>
+                <a:latin typeface="Arial" pitchFamily="34" charset="0"/>
+                <a:ea typeface="Arial" pitchFamily="34" charset="-122"/>
+                <a:cs typeface="Arial" pitchFamily="34" charset="-120"/>
+              </a:rPr>
+              <a:t>▸ Landing · Login · Register</a:t>
             </a:r>
             <a:endParaRPr lang="en-US" sz="1100" dirty="0"/>
           </a:p>
@@ -6039,7 +6599,7 @@
         </p:nvSpPr>
         <p:spPr>
           <a:xfrm>
-            <a:off x="5029200" y="1947672"/>
+            <a:off x="5029200" y="1920240"/>
             <a:ext cx="3840480" cy="320040"/>
           </a:xfrm>
           <a:prstGeom prst="rect">
@@ -6060,11 +6620,11 @@
                 <a:solidFill>
                   <a:srgbClr val="0F172A"/>
                 </a:solidFill>
-                <a:latin typeface="Consolas" pitchFamily="34" charset="0"/>
-                <a:ea typeface="Consolas" pitchFamily="34" charset="-122"/>
-                <a:cs typeface="Consolas" pitchFamily="34" charset="-120"/>
-              </a:rPr>
-              <a:t>▸ documents · document_versions</a:t>
+                <a:latin typeface="Arial" pitchFamily="34" charset="0"/>
+                <a:ea typeface="Arial" pitchFamily="34" charset="-122"/>
+                <a:cs typeface="Arial" pitchFamily="34" charset="-120"/>
+              </a:rPr>
+              <a:t>▸ Dashboard 文档管理中心</a:t>
             </a:r>
             <a:endParaRPr lang="en-US" sz="1100" dirty="0"/>
           </a:p>
@@ -6078,7 +6638,7 @@
         </p:nvSpPr>
         <p:spPr>
           <a:xfrm>
-            <a:off x="5029200" y="2295144"/>
+            <a:off x="5029200" y="2286000"/>
             <a:ext cx="3840480" cy="320040"/>
           </a:xfrm>
           <a:prstGeom prst="rect">
@@ -6099,11 +6659,11 @@
                 <a:solidFill>
                   <a:srgbClr val="0F172A"/>
                 </a:solidFill>
-                <a:latin typeface="Consolas" pitchFamily="34" charset="0"/>
-                <a:ea typeface="Consolas" pitchFamily="34" charset="-122"/>
-                <a:cs typeface="Consolas" pitchFamily="34" charset="-120"/>
-              </a:rPr>
-              <a:t>▸ operation_logs</a:t>
+                <a:latin typeface="Arial" pitchFamily="34" charset="0"/>
+                <a:ea typeface="Arial" pitchFamily="34" charset="-122"/>
+                <a:cs typeface="Arial" pitchFamily="34" charset="-120"/>
+              </a:rPr>
+              <a:t>▸ DocumentEditor 编辑器+AI</a:t>
             </a:r>
             <a:endParaRPr lang="en-US" sz="1100" dirty="0"/>
           </a:p>
@@ -6117,7 +6677,7 @@
         </p:nvSpPr>
         <p:spPr>
           <a:xfrm>
-            <a:off x="5029200" y="2642616"/>
+            <a:off x="5029200" y="2651760"/>
             <a:ext cx="3840480" cy="320040"/>
           </a:xfrm>
           <a:prstGeom prst="rect">
@@ -6138,11 +6698,11 @@
                 <a:solidFill>
                   <a:srgbClr val="0F172A"/>
                 </a:solidFill>
-                <a:latin typeface="Consolas" pitchFamily="34" charset="0"/>
-                <a:ea typeface="Consolas" pitchFamily="34" charset="-122"/>
-                <a:cs typeface="Consolas" pitchFamily="34" charset="-120"/>
-              </a:rPr>
-              <a:t>▸ collaboration_sessions · collaborators</a:t>
+                <a:latin typeface="Arial" pitchFamily="34" charset="0"/>
+                <a:ea typeface="Arial" pitchFamily="34" charset="-122"/>
+                <a:cs typeface="Arial" pitchFamily="34" charset="-120"/>
+              </a:rPr>
+              <a:t>▸ VersionHistory 版本+Diff</a:t>
             </a:r>
             <a:endParaRPr lang="en-US" sz="1100" dirty="0"/>
           </a:p>
@@ -6156,7 +6716,7 @@
         </p:nvSpPr>
         <p:spPr>
           <a:xfrm>
-            <a:off x="5029200" y="2990088"/>
+            <a:off x="5029200" y="3017520"/>
             <a:ext cx="3840480" cy="320040"/>
           </a:xfrm>
           <a:prstGeom prst="rect">
@@ -6177,11 +6737,11 @@
                 <a:solidFill>
                   <a:srgbClr val="0F172A"/>
                 </a:solidFill>
-                <a:latin typeface="Consolas" pitchFamily="34" charset="0"/>
-                <a:ea typeface="Consolas" pitchFamily="34" charset="-122"/>
-                <a:cs typeface="Consolas" pitchFamily="34" charset="-120"/>
-              </a:rPr>
-              <a:t>▸ collaboration_invitations</a:t>
+                <a:latin typeface="Arial" pitchFamily="34" charset="0"/>
+                <a:ea typeface="Arial" pitchFamily="34" charset="-122"/>
+                <a:cs typeface="Arial" pitchFamily="34" charset="-120"/>
+              </a:rPr>
+              <a:t>▸ Collaboration 协作管理</a:t>
             </a:r>
             <a:endParaRPr lang="en-US" sz="1100" dirty="0"/>
           </a:p>
@@ -6195,7 +6755,7 @@
         </p:nvSpPr>
         <p:spPr>
           <a:xfrm>
-            <a:off x="5029200" y="3337560"/>
+            <a:off x="5029200" y="3383280"/>
             <a:ext cx="3840480" cy="320040"/>
           </a:xfrm>
           <a:prstGeom prst="rect">
@@ -6216,11 +6776,11 @@
                 <a:solidFill>
                   <a:srgbClr val="0F172A"/>
                 </a:solidFill>
-                <a:latin typeface="Consolas" pitchFamily="34" charset="0"/>
-                <a:ea typeface="Consolas" pitchFamily="34" charset="-122"/>
-                <a:cs typeface="Consolas" pitchFamily="34" charset="-120"/>
-              </a:rPr>
-              <a:t>▸ ai_processing_jobs</a:t>
+                <a:latin typeface="Arial" pitchFamily="34" charset="0"/>
+                <a:ea typeface="Arial" pitchFamily="34" charset="-122"/>
+                <a:cs typeface="Arial" pitchFamily="34" charset="-120"/>
+              </a:rPr>
+              <a:t>▸ AdminDashboard 管理后台</a:t>
             </a:r>
             <a:endParaRPr lang="en-US" sz="1100" dirty="0"/>
           </a:p>
@@ -6234,7 +6794,7 @@
         </p:nvSpPr>
         <p:spPr>
           <a:xfrm>
-            <a:off x="5029200" y="3685032"/>
+            <a:off x="5029200" y="3749040"/>
             <a:ext cx="3840480" cy="320040"/>
           </a:xfrm>
           <a:prstGeom prst="rect">
@@ -6255,11 +6815,11 @@
                 <a:solidFill>
                   <a:srgbClr val="0F172A"/>
                 </a:solidFill>
-                <a:latin typeface="Consolas" pitchFamily="34" charset="0"/>
-                <a:ea typeface="Consolas" pitchFamily="34" charset="-122"/>
-                <a:cs typeface="Consolas" pitchFamily="34" charset="-120"/>
-              </a:rPr>
-              <a:t>▸ tier_definitions · enterprise_api_keys</a:t>
+                <a:latin typeface="Arial" pitchFamily="34" charset="0"/>
+                <a:ea typeface="Arial" pitchFamily="34" charset="-122"/>
+                <a:cs typeface="Arial" pitchFamily="34" charset="-120"/>
+              </a:rPr>
+              <a:t>▸ GitHubImport 代码导入</a:t>
             </a:r>
             <a:endParaRPr lang="en-US" sz="1100" dirty="0"/>
           </a:p>
@@ -6273,7 +6833,7 @@
         </p:nvSpPr>
         <p:spPr>
           <a:xfrm>
-            <a:off x="5029200" y="4032504"/>
+            <a:off x="5029200" y="4114800"/>
             <a:ext cx="3840480" cy="320040"/>
           </a:xfrm>
           <a:prstGeom prst="rect">
@@ -6294,11 +6854,11 @@
                 <a:solidFill>
                   <a:srgbClr val="0F172A"/>
                 </a:solidFill>
-                <a:latin typeface="Consolas" pitchFamily="34" charset="0"/>
-                <a:ea typeface="Consolas" pitchFamily="34" charset="-122"/>
-                <a:cs typeface="Consolas" pitchFamily="34" charset="-120"/>
-              </a:rPr>
-              <a:t>▸ cache_invalidation_keys · oauth_accounts</a:t>
+                <a:latin typeface="Arial" pitchFamily="34" charset="0"/>
+                <a:ea typeface="Arial" pitchFamily="34" charset="-122"/>
+                <a:cs typeface="Arial" pitchFamily="34" charset="-120"/>
+              </a:rPr>
+              <a:t>▸ Viewer: PDF·PPTX·Image·Text</a:t>
             </a:r>
             <a:endParaRPr lang="en-US" sz="1100" dirty="0"/>
           </a:p>
@@ -6389,7 +6949,7 @@
                 <a:ea typeface="Arial Black" pitchFamily="34" charset="-122"/>
                 <a:cs typeface="Arial Black" pitchFamily="34" charset="-120"/>
               </a:rPr>
-              <a:t>技术亮点</a:t>
+              <a:t>后端与数据库</a:t>
             </a:r>
             <a:endParaRPr lang="en-US" sz="3200" dirty="0"/>
           </a:p>
@@ -6417,70 +6977,120 @@
       </p:sp>
       <p:sp>
         <p:nvSpPr>
-          <p:cNvPr id="5" name="Shape 3"/>
-          <p:cNvSpPr/>
-          <p:nvPr/>
-        </p:nvSpPr>
-        <p:spPr>
-          <a:xfrm>
-            <a:off x="594360" y="1188720"/>
-            <a:ext cx="3886200" cy="1143000"/>
-          </a:xfrm>
-          <a:prstGeom prst="rect">
-            <a:avLst/>
-          </a:prstGeom>
-          <a:solidFill>
-            <a:srgbClr val="F8FAFC"/>
-          </a:solidFill>
-          <a:ln/>
-          <a:effectLst>
-            <a:outerShdw sx="100000" sy="100000" kx="0" ky="0" algn="bl" rotWithShape="0" blurRad="50800" dist="25400" dir="8100000">
-              <a:srgbClr val="000000">
-                <a:alpha val="10000"/>
-              </a:srgbClr>
-            </a:outerShdw>
-          </a:effectLst>
-        </p:spPr>
-      </p:sp>
-      <p:sp>
-        <p:nvSpPr>
-          <p:cNvPr id="6" name="Shape 4"/>
-          <p:cNvSpPr/>
-          <p:nvPr/>
-        </p:nvSpPr>
-        <p:spPr>
-          <a:xfrm>
-            <a:off x="594360" y="1188720"/>
-            <a:ext cx="54864" cy="1143000"/>
-          </a:xfrm>
-          <a:prstGeom prst="rect">
-            <a:avLst/>
-          </a:prstGeom>
-          <a:solidFill>
-            <a:srgbClr val="2563EB"/>
-          </a:solidFill>
-          <a:ln/>
-        </p:spPr>
-      </p:sp>
-      <p:sp>
-        <p:nvSpPr>
-          <p:cNvPr id="7" name="Shape 5"/>
-          <p:cNvSpPr/>
-          <p:nvPr/>
-        </p:nvSpPr>
-        <p:spPr>
-          <a:xfrm>
-            <a:off x="822960" y="1325880"/>
-            <a:ext cx="960120" cy="274320"/>
-          </a:xfrm>
-          <a:prstGeom prst="rect">
-            <a:avLst/>
-          </a:prstGeom>
-          <a:solidFill>
-            <a:srgbClr val="2563EB"/>
-          </a:solidFill>
-          <a:ln/>
-        </p:spPr>
+          <p:cNvPr id="5" name="Text 3"/>
+          <p:cNvSpPr/>
+          <p:nvPr/>
+        </p:nvSpPr>
+        <p:spPr>
+          <a:xfrm>
+            <a:off x="640080" y="1143000"/>
+            <a:ext cx="3840480" cy="320040"/>
+          </a:xfrm>
+          <a:prstGeom prst="rect">
+            <a:avLst/>
+          </a:prstGeom>
+          <a:noFill/>
+          <a:ln/>
+        </p:spPr>
+        <p:txBody>
+          <a:bodyPr wrap="square" lIns="0" tIns="0" rIns="0" bIns="0" rtlCol="0" anchor="ctr"/>
+          <a:lstStyle/>
+          <a:p>
+            <a:pPr indent="0" marL="0">
+              <a:buNone/>
+            </a:pPr>
+            <a:r>
+              <a:rPr lang="en-US" sz="1600" b="1" dirty="0">
+                <a:solidFill>
+                  <a:srgbClr val="2563EB"/>
+                </a:solidFill>
+                <a:latin typeface="Arial" pitchFamily="34" charset="0"/>
+                <a:ea typeface="Arial" pitchFamily="34" charset="-122"/>
+                <a:cs typeface="Arial" pitchFamily="34" charset="-120"/>
+              </a:rPr>
+              <a:t>后端服务</a:t>
+            </a:r>
+            <a:endParaRPr lang="en-US" sz="1600" dirty="0"/>
+          </a:p>
+        </p:txBody>
+      </p:sp>
+      <p:sp>
+        <p:nvSpPr>
+          <p:cNvPr id="6" name="Text 4"/>
+          <p:cNvSpPr/>
+          <p:nvPr/>
+        </p:nvSpPr>
+        <p:spPr>
+          <a:xfrm>
+            <a:off x="822960" y="1554480"/>
+            <a:ext cx="3840480" cy="320040"/>
+          </a:xfrm>
+          <a:prstGeom prst="rect">
+            <a:avLst/>
+          </a:prstGeom>
+          <a:noFill/>
+          <a:ln/>
+        </p:spPr>
+        <p:txBody>
+          <a:bodyPr wrap="square" lIns="0" tIns="0" rIns="0" bIns="0" rtlCol="0" anchor="ctr"/>
+          <a:lstStyle/>
+          <a:p>
+            <a:pPr indent="0" marL="0">
+              <a:buNone/>
+            </a:pPr>
+            <a:r>
+              <a:rPr lang="en-US" sz="1100" dirty="0">
+                <a:solidFill>
+                  <a:srgbClr val="0F172A"/>
+                </a:solidFill>
+                <a:latin typeface="Arial" pitchFamily="34" charset="0"/>
+                <a:ea typeface="Arial" pitchFamily="34" charset="-122"/>
+                <a:cs typeface="Arial" pitchFamily="34" charset="-120"/>
+              </a:rPr>
+              <a:t>▸ 10 组 REST API 路由模块</a:t>
+            </a:r>
+            <a:endParaRPr lang="en-US" sz="1100" dirty="0"/>
+          </a:p>
+        </p:txBody>
+      </p:sp>
+      <p:sp>
+        <p:nvSpPr>
+          <p:cNvPr id="7" name="Text 5"/>
+          <p:cNvSpPr/>
+          <p:nvPr/>
+        </p:nvSpPr>
+        <p:spPr>
+          <a:xfrm>
+            <a:off x="822960" y="1901952"/>
+            <a:ext cx="3840480" cy="320040"/>
+          </a:xfrm>
+          <a:prstGeom prst="rect">
+            <a:avLst/>
+          </a:prstGeom>
+          <a:noFill/>
+          <a:ln/>
+        </p:spPr>
+        <p:txBody>
+          <a:bodyPr wrap="square" lIns="0" tIns="0" rIns="0" bIns="0" rtlCol="0" anchor="ctr"/>
+          <a:lstStyle/>
+          <a:p>
+            <a:pPr indent="0" marL="0">
+              <a:buNone/>
+            </a:pPr>
+            <a:r>
+              <a:rPr lang="en-US" sz="1100" dirty="0">
+                <a:solidFill>
+                  <a:srgbClr val="0F172A"/>
+                </a:solidFill>
+                <a:latin typeface="Arial" pitchFamily="34" charset="0"/>
+                <a:ea typeface="Arial" pitchFamily="34" charset="-122"/>
+                <a:cs typeface="Arial" pitchFamily="34" charset="-120"/>
+              </a:rPr>
+              <a:t>▸ 8 个业务服务层</a:t>
+            </a:r>
+            <a:endParaRPr lang="en-US" sz="1100" dirty="0"/>
+          </a:p>
+        </p:txBody>
       </p:sp>
       <p:sp>
         <p:nvSpPr>
@@ -6490,32 +7100,266 @@
         </p:nvSpPr>
         <p:spPr>
           <a:xfrm>
-            <a:off x="822960" y="1325880"/>
-            <a:ext cx="960120" cy="274320"/>
-          </a:xfrm>
-          <a:prstGeom prst="rect">
-            <a:avLst/>
-          </a:prstGeom>
-          <a:noFill/>
-          <a:ln/>
-        </p:spPr>
-        <p:txBody>
-          <a:bodyPr wrap="square" lIns="0" tIns="0" rIns="0" bIns="0" rtlCol="0" anchor="ctr"/>
-          <a:lstStyle/>
-          <a:p>
-            <a:pPr algn="ctr" indent="0" marL="0">
-              <a:buNone/>
-            </a:pPr>
-            <a:r>
-              <a:rPr lang="en-US" sz="1000" b="1" dirty="0">
-                <a:solidFill>
-                  <a:srgbClr val="FFFFFF"/>
-                </a:solidFill>
-                <a:latin typeface="Arial" pitchFamily="34" charset="0"/>
-                <a:ea typeface="Arial" pitchFamily="34" charset="-122"/>
-                <a:cs typeface="Arial" pitchFamily="34" charset="-120"/>
-              </a:rPr>
-              <a:t>Frontend</a:t>
+            <a:off x="822960" y="2249424"/>
+            <a:ext cx="3840480" cy="320040"/>
+          </a:xfrm>
+          <a:prstGeom prst="rect">
+            <a:avLst/>
+          </a:prstGeom>
+          <a:noFill/>
+          <a:ln/>
+        </p:spPr>
+        <p:txBody>
+          <a:bodyPr wrap="square" lIns="0" tIns="0" rIns="0" bIns="0" rtlCol="0" anchor="ctr"/>
+          <a:lstStyle/>
+          <a:p>
+            <a:pPr indent="0" marL="0">
+              <a:buNone/>
+            </a:pPr>
+            <a:r>
+              <a:rPr lang="en-US" sz="1100" dirty="0">
+                <a:solidFill>
+                  <a:srgbClr val="0F172A"/>
+                </a:solidFill>
+                <a:latin typeface="Arial" pitchFamily="34" charset="0"/>
+                <a:ea typeface="Arial" pitchFamily="34" charset="-122"/>
+                <a:cs typeface="Arial" pitchFamily="34" charset="-120"/>
+              </a:rPr>
+              <a:t>▸ WebSocket 实时协作端点</a:t>
+            </a:r>
+            <a:endParaRPr lang="en-US" sz="1100" dirty="0"/>
+          </a:p>
+        </p:txBody>
+      </p:sp>
+      <p:sp>
+        <p:nvSpPr>
+          <p:cNvPr id="9" name="Text 7"/>
+          <p:cNvSpPr/>
+          <p:nvPr/>
+        </p:nvSpPr>
+        <p:spPr>
+          <a:xfrm>
+            <a:off x="822960" y="2596896"/>
+            <a:ext cx="3840480" cy="320040"/>
+          </a:xfrm>
+          <a:prstGeom prst="rect">
+            <a:avLst/>
+          </a:prstGeom>
+          <a:noFill/>
+          <a:ln/>
+        </p:spPr>
+        <p:txBody>
+          <a:bodyPr wrap="square" lIns="0" tIns="0" rIns="0" bIns="0" rtlCol="0" anchor="ctr"/>
+          <a:lstStyle/>
+          <a:p>
+            <a:pPr indent="0" marL="0">
+              <a:buNone/>
+            </a:pPr>
+            <a:r>
+              <a:rPr lang="en-US" sz="1100" dirty="0">
+                <a:solidFill>
+                  <a:srgbClr val="0F172A"/>
+                </a:solidFill>
+                <a:latin typeface="Arial" pitchFamily="34" charset="0"/>
+                <a:ea typeface="Arial" pitchFamily="34" charset="-122"/>
+                <a:cs typeface="Arial" pitchFamily="34" charset="-120"/>
+              </a:rPr>
+              <a:t>▸ Celery 异步任务队列</a:t>
+            </a:r>
+            <a:endParaRPr lang="en-US" sz="1100" dirty="0"/>
+          </a:p>
+        </p:txBody>
+      </p:sp>
+      <p:sp>
+        <p:nvSpPr>
+          <p:cNvPr id="10" name="Text 8"/>
+          <p:cNvSpPr/>
+          <p:nvPr/>
+        </p:nvSpPr>
+        <p:spPr>
+          <a:xfrm>
+            <a:off x="822960" y="2944368"/>
+            <a:ext cx="3840480" cy="320040"/>
+          </a:xfrm>
+          <a:prstGeom prst="rect">
+            <a:avLst/>
+          </a:prstGeom>
+          <a:noFill/>
+          <a:ln/>
+        </p:spPr>
+        <p:txBody>
+          <a:bodyPr wrap="square" lIns="0" tIns="0" rIns="0" bIns="0" rtlCol="0" anchor="ctr"/>
+          <a:lstStyle/>
+          <a:p>
+            <a:pPr indent="0" marL="0">
+              <a:buNone/>
+            </a:pPr>
+            <a:r>
+              <a:rPr lang="en-US" sz="1100" dirty="0">
+                <a:solidFill>
+                  <a:srgbClr val="0F172A"/>
+                </a:solidFill>
+                <a:latin typeface="Arial" pitchFamily="34" charset="0"/>
+                <a:ea typeface="Arial" pitchFamily="34" charset="-122"/>
+                <a:cs typeface="Arial" pitchFamily="34" charset="-120"/>
+              </a:rPr>
+              <a:t>▸ JWT 双令牌认证</a:t>
+            </a:r>
+            <a:endParaRPr lang="en-US" sz="1100" dirty="0"/>
+          </a:p>
+        </p:txBody>
+      </p:sp>
+      <p:sp>
+        <p:nvSpPr>
+          <p:cNvPr id="11" name="Text 9"/>
+          <p:cNvSpPr/>
+          <p:nvPr/>
+        </p:nvSpPr>
+        <p:spPr>
+          <a:xfrm>
+            <a:off x="822960" y="3291840"/>
+            <a:ext cx="3840480" cy="320040"/>
+          </a:xfrm>
+          <a:prstGeom prst="rect">
+            <a:avLst/>
+          </a:prstGeom>
+          <a:noFill/>
+          <a:ln/>
+        </p:spPr>
+        <p:txBody>
+          <a:bodyPr wrap="square" lIns="0" tIns="0" rIns="0" bIns="0" rtlCol="0" anchor="ctr"/>
+          <a:lstStyle/>
+          <a:p>
+            <a:pPr indent="0" marL="0">
+              <a:buNone/>
+            </a:pPr>
+            <a:r>
+              <a:rPr lang="en-US" sz="1100" dirty="0">
+                <a:solidFill>
+                  <a:srgbClr val="0F172A"/>
+                </a:solidFill>
+                <a:latin typeface="Arial" pitchFamily="34" charset="0"/>
+                <a:ea typeface="Arial" pitchFamily="34" charset="-122"/>
+                <a:cs typeface="Arial" pitchFamily="34" charset="-120"/>
+              </a:rPr>
+              <a:t>▸ 四级用户权限体系</a:t>
+            </a:r>
+            <a:endParaRPr lang="en-US" sz="1100" dirty="0"/>
+          </a:p>
+        </p:txBody>
+      </p:sp>
+      <p:sp>
+        <p:nvSpPr>
+          <p:cNvPr id="12" name="Text 10"/>
+          <p:cNvSpPr/>
+          <p:nvPr/>
+        </p:nvSpPr>
+        <p:spPr>
+          <a:xfrm>
+            <a:off x="822960" y="3639312"/>
+            <a:ext cx="3840480" cy="320040"/>
+          </a:xfrm>
+          <a:prstGeom prst="rect">
+            <a:avLst/>
+          </a:prstGeom>
+          <a:noFill/>
+          <a:ln/>
+        </p:spPr>
+        <p:txBody>
+          <a:bodyPr wrap="square" lIns="0" tIns="0" rIns="0" bIns="0" rtlCol="0" anchor="ctr"/>
+          <a:lstStyle/>
+          <a:p>
+            <a:pPr indent="0" marL="0">
+              <a:buNone/>
+            </a:pPr>
+            <a:r>
+              <a:rPr lang="en-US" sz="1100" dirty="0">
+                <a:solidFill>
+                  <a:srgbClr val="0F172A"/>
+                </a:solidFill>
+                <a:latin typeface="Arial" pitchFamily="34" charset="0"/>
+                <a:ea typeface="Arial" pitchFamily="34" charset="-122"/>
+                <a:cs typeface="Arial" pitchFamily="34" charset="-120"/>
+              </a:rPr>
+              <a:t>▸ Redis 多层缓存</a:t>
+            </a:r>
+            <a:endParaRPr lang="en-US" sz="1100" dirty="0"/>
+          </a:p>
+        </p:txBody>
+      </p:sp>
+      <p:sp>
+        <p:nvSpPr>
+          <p:cNvPr id="13" name="Text 11"/>
+          <p:cNvSpPr/>
+          <p:nvPr/>
+        </p:nvSpPr>
+        <p:spPr>
+          <a:xfrm>
+            <a:off x="4846320" y="1143000"/>
+            <a:ext cx="3840480" cy="320040"/>
+          </a:xfrm>
+          <a:prstGeom prst="rect">
+            <a:avLst/>
+          </a:prstGeom>
+          <a:noFill/>
+          <a:ln/>
+        </p:spPr>
+        <p:txBody>
+          <a:bodyPr wrap="square" lIns="0" tIns="0" rIns="0" bIns="0" rtlCol="0" anchor="ctr"/>
+          <a:lstStyle/>
+          <a:p>
+            <a:pPr indent="0" marL="0">
+              <a:buNone/>
+            </a:pPr>
+            <a:r>
+              <a:rPr lang="en-US" sz="1600" b="1" dirty="0">
+                <a:solidFill>
+                  <a:srgbClr val="2563EB"/>
+                </a:solidFill>
+                <a:latin typeface="Arial" pitchFamily="34" charset="0"/>
+                <a:ea typeface="Arial" pitchFamily="34" charset="-122"/>
+                <a:cs typeface="Arial" pitchFamily="34" charset="-120"/>
+              </a:rPr>
+              <a:t>数据模型 (16 张表)</a:t>
+            </a:r>
+            <a:endParaRPr lang="en-US" sz="1600" dirty="0"/>
+          </a:p>
+        </p:txBody>
+      </p:sp>
+      <p:sp>
+        <p:nvSpPr>
+          <p:cNvPr id="14" name="Text 12"/>
+          <p:cNvSpPr/>
+          <p:nvPr/>
+        </p:nvSpPr>
+        <p:spPr>
+          <a:xfrm>
+            <a:off x="5029200" y="1554480"/>
+            <a:ext cx="3840480" cy="320040"/>
+          </a:xfrm>
+          <a:prstGeom prst="rect">
+            <a:avLst/>
+          </a:prstGeom>
+          <a:noFill/>
+          <a:ln/>
+        </p:spPr>
+        <p:txBody>
+          <a:bodyPr wrap="square" lIns="0" tIns="0" rIns="0" bIns="0" rtlCol="0" anchor="ctr"/>
+          <a:lstStyle/>
+          <a:p>
+            <a:pPr indent="0" marL="0">
+              <a:buNone/>
+            </a:pPr>
+            <a:r>
+              <a:rPr lang="en-US" sz="1000" dirty="0">
+                <a:solidFill>
+                  <a:srgbClr val="0F172A"/>
+                </a:solidFill>
+                <a:latin typeface="Consolas" pitchFamily="34" charset="0"/>
+                <a:ea typeface="Consolas" pitchFamily="34" charset="-122"/>
+                <a:cs typeface="Consolas" pitchFamily="34" charset="-120"/>
+              </a:rPr>
+              <a:t>▸ users · refresh_tokens</a:t>
             </a:r>
             <a:endParaRPr lang="en-US" sz="1000" dirty="0"/>
           </a:p>
@@ -6523,14 +7367,14 @@
       </p:sp>
       <p:sp>
         <p:nvSpPr>
-          <p:cNvPr id="9" name="Text 7"/>
-          <p:cNvSpPr/>
-          <p:nvPr/>
-        </p:nvSpPr>
-        <p:spPr>
-          <a:xfrm>
-            <a:off x="1920240" y="1298448"/>
-            <a:ext cx="2377440" cy="320040"/>
+          <p:cNvPr id="15" name="Text 13"/>
+          <p:cNvSpPr/>
+          <p:nvPr/>
+        </p:nvSpPr>
+        <p:spPr>
+          <a:xfrm>
+            <a:off x="5029200" y="1901952"/>
+            <a:ext cx="3840480" cy="320040"/>
           </a:xfrm>
           <a:prstGeom prst="rect">
             <a:avLst/>
@@ -6546,160 +7390,54 @@
               <a:buNone/>
             </a:pPr>
             <a:r>
-              <a:rPr lang="en-US" sz="1400" b="1" dirty="0">
+              <a:rPr lang="en-US" sz="1000" dirty="0">
                 <a:solidFill>
                   <a:srgbClr val="0F172A"/>
                 </a:solidFill>
-                <a:latin typeface="Arial" pitchFamily="34" charset="0"/>
-                <a:ea typeface="Arial" pitchFamily="34" charset="-122"/>
-                <a:cs typeface="Arial" pitchFamily="34" charset="-120"/>
-              </a:rPr>
-              <a:t>React 19 + Hooks</a:t>
-            </a:r>
-            <a:endParaRPr lang="en-US" sz="1400" dirty="0"/>
-          </a:p>
-        </p:txBody>
-      </p:sp>
-      <p:sp>
-        <p:nvSpPr>
-          <p:cNvPr id="10" name="Text 8"/>
-          <p:cNvSpPr/>
-          <p:nvPr/>
-        </p:nvSpPr>
-        <p:spPr>
-          <a:xfrm>
-            <a:off x="822960" y="1719072"/>
-            <a:ext cx="3429000" cy="502920"/>
-          </a:xfrm>
-          <a:prstGeom prst="rect">
-            <a:avLst/>
-          </a:prstGeom>
-          <a:noFill/>
-          <a:ln/>
-        </p:spPr>
-        <p:txBody>
-          <a:bodyPr wrap="square" lIns="0" tIns="0" rIns="0" bIns="0" rtlCol="0" anchor="t"/>
+                <a:latin typeface="Consolas" pitchFamily="34" charset="0"/>
+                <a:ea typeface="Consolas" pitchFamily="34" charset="-122"/>
+                <a:cs typeface="Consolas" pitchFamily="34" charset="-120"/>
+              </a:rPr>
+              <a:t>▸ documents · document_versions</a:t>
+            </a:r>
+            <a:endParaRPr lang="en-US" sz="1000" dirty="0"/>
+          </a:p>
+        </p:txBody>
+      </p:sp>
+      <p:sp>
+        <p:nvSpPr>
+          <p:cNvPr id="16" name="Text 14"/>
+          <p:cNvSpPr/>
+          <p:nvPr/>
+        </p:nvSpPr>
+        <p:spPr>
+          <a:xfrm>
+            <a:off x="5029200" y="2249424"/>
+            <a:ext cx="3840480" cy="320040"/>
+          </a:xfrm>
+          <a:prstGeom prst="rect">
+            <a:avLst/>
+          </a:prstGeom>
+          <a:noFill/>
+          <a:ln/>
+        </p:spPr>
+        <p:txBody>
+          <a:bodyPr wrap="square" lIns="0" tIns="0" rIns="0" bIns="0" rtlCol="0" anchor="ctr"/>
           <a:lstStyle/>
           <a:p>
             <a:pPr indent="0" marL="0">
               <a:buNone/>
             </a:pPr>
             <a:r>
-              <a:rPr lang="en-US" sz="1050" dirty="0">
-                <a:solidFill>
-                  <a:srgbClr val="64748B"/>
-                </a:solidFill>
-                <a:latin typeface="Arial" pitchFamily="34" charset="0"/>
-                <a:ea typeface="Arial" pitchFamily="34" charset="-122"/>
-                <a:cs typeface="Arial" pitchFamily="34" charset="-120"/>
-              </a:rPr>
-              <a:t>函数式组件 + Vite 8 HMR + Tailwind 原子化样式，首屏加载 &lt; 1s</a:t>
-            </a:r>
-            <a:endParaRPr lang="en-US" sz="1050" dirty="0"/>
-          </a:p>
-        </p:txBody>
-      </p:sp>
-      <p:sp>
-        <p:nvSpPr>
-          <p:cNvPr id="11" name="Shape 9"/>
-          <p:cNvSpPr/>
-          <p:nvPr/>
-        </p:nvSpPr>
-        <p:spPr>
-          <a:xfrm>
-            <a:off x="4663440" y="1188720"/>
-            <a:ext cx="3886200" cy="1143000"/>
-          </a:xfrm>
-          <a:prstGeom prst="rect">
-            <a:avLst/>
-          </a:prstGeom>
-          <a:solidFill>
-            <a:srgbClr val="F8FAFC"/>
-          </a:solidFill>
-          <a:ln/>
-          <a:effectLst>
-            <a:outerShdw sx="100000" sy="100000" kx="0" ky="0" algn="bl" rotWithShape="0" blurRad="50800" dist="25400" dir="8100000">
-              <a:srgbClr val="000000">
-                <a:alpha val="10000"/>
-              </a:srgbClr>
-            </a:outerShdw>
-          </a:effectLst>
-        </p:spPr>
-      </p:sp>
-      <p:sp>
-        <p:nvSpPr>
-          <p:cNvPr id="12" name="Shape 10"/>
-          <p:cNvSpPr/>
-          <p:nvPr/>
-        </p:nvSpPr>
-        <p:spPr>
-          <a:xfrm>
-            <a:off x="4663440" y="1188720"/>
-            <a:ext cx="54864" cy="1143000"/>
-          </a:xfrm>
-          <a:prstGeom prst="rect">
-            <a:avLst/>
-          </a:prstGeom>
-          <a:solidFill>
-            <a:srgbClr val="2563EB"/>
-          </a:solidFill>
-          <a:ln/>
-        </p:spPr>
-      </p:sp>
-      <p:sp>
-        <p:nvSpPr>
-          <p:cNvPr id="13" name="Shape 11"/>
-          <p:cNvSpPr/>
-          <p:nvPr/>
-        </p:nvSpPr>
-        <p:spPr>
-          <a:xfrm>
-            <a:off x="4892040" y="1325880"/>
-            <a:ext cx="960120" cy="274320"/>
-          </a:xfrm>
-          <a:prstGeom prst="rect">
-            <a:avLst/>
-          </a:prstGeom>
-          <a:solidFill>
-            <a:srgbClr val="2563EB"/>
-          </a:solidFill>
-          <a:ln/>
-        </p:spPr>
-      </p:sp>
-      <p:sp>
-        <p:nvSpPr>
-          <p:cNvPr id="14" name="Text 12"/>
-          <p:cNvSpPr/>
-          <p:nvPr/>
-        </p:nvSpPr>
-        <p:spPr>
-          <a:xfrm>
-            <a:off x="4892040" y="1325880"/>
-            <a:ext cx="960120" cy="274320"/>
-          </a:xfrm>
-          <a:prstGeom prst="rect">
-            <a:avLst/>
-          </a:prstGeom>
-          <a:noFill/>
-          <a:ln/>
-        </p:spPr>
-        <p:txBody>
-          <a:bodyPr wrap="square" lIns="0" tIns="0" rIns="0" bIns="0" rtlCol="0" anchor="ctr"/>
-          <a:lstStyle/>
-          <a:p>
-            <a:pPr algn="ctr" indent="0" marL="0">
-              <a:buNone/>
-            </a:pPr>
-            <a:r>
-              <a:rPr lang="en-US" sz="1000" b="1" dirty="0">
-                <a:solidFill>
-                  <a:srgbClr val="FFFFFF"/>
-                </a:solidFill>
-                <a:latin typeface="Arial" pitchFamily="34" charset="0"/>
-                <a:ea typeface="Arial" pitchFamily="34" charset="-122"/>
-                <a:cs typeface="Arial" pitchFamily="34" charset="-120"/>
-              </a:rPr>
-              <a:t>State</a:t>
+              <a:rPr lang="en-US" sz="1000" dirty="0">
+                <a:solidFill>
+                  <a:srgbClr val="0F172A"/>
+                </a:solidFill>
+                <a:latin typeface="Consolas" pitchFamily="34" charset="0"/>
+                <a:ea typeface="Consolas" pitchFamily="34" charset="-122"/>
+                <a:cs typeface="Consolas" pitchFamily="34" charset="-120"/>
+              </a:rPr>
+              <a:t>▸ collaboration_sessions</a:t>
             </a:r>
             <a:endParaRPr lang="en-US" sz="1000" dirty="0"/>
           </a:p>
@@ -6707,14 +7445,14 @@
       </p:sp>
       <p:sp>
         <p:nvSpPr>
-          <p:cNvPr id="15" name="Text 13"/>
-          <p:cNvSpPr/>
-          <p:nvPr/>
-        </p:nvSpPr>
-        <p:spPr>
-          <a:xfrm>
-            <a:off x="5989320" y="1298448"/>
-            <a:ext cx="2377440" cy="320040"/>
+          <p:cNvPr id="17" name="Text 15"/>
+          <p:cNvSpPr/>
+          <p:nvPr/>
+        </p:nvSpPr>
+        <p:spPr>
+          <a:xfrm>
+            <a:off x="5029200" y="2596896"/>
+            <a:ext cx="3840480" cy="320040"/>
           </a:xfrm>
           <a:prstGeom prst="rect">
             <a:avLst/>
@@ -6730,125 +7468,97 @@
               <a:buNone/>
             </a:pPr>
             <a:r>
-              <a:rPr lang="en-US" sz="1400" b="1" dirty="0">
+              <a:rPr lang="en-US" sz="1000" dirty="0">
                 <a:solidFill>
                   <a:srgbClr val="0F172A"/>
                 </a:solidFill>
-                <a:latin typeface="Arial" pitchFamily="34" charset="0"/>
-                <a:ea typeface="Arial" pitchFamily="34" charset="-122"/>
-                <a:cs typeface="Arial" pitchFamily="34" charset="-120"/>
-              </a:rPr>
-              <a:t>TanStack Query 5</a:t>
-            </a:r>
-            <a:endParaRPr lang="en-US" sz="1400" dirty="0"/>
-          </a:p>
-        </p:txBody>
-      </p:sp>
-      <p:sp>
-        <p:nvSpPr>
-          <p:cNvPr id="16" name="Text 14"/>
-          <p:cNvSpPr/>
-          <p:nvPr/>
-        </p:nvSpPr>
-        <p:spPr>
-          <a:xfrm>
-            <a:off x="4892040" y="1719072"/>
-            <a:ext cx="3429000" cy="502920"/>
-          </a:xfrm>
-          <a:prstGeom prst="rect">
-            <a:avLst/>
-          </a:prstGeom>
-          <a:noFill/>
-          <a:ln/>
-        </p:spPr>
-        <p:txBody>
-          <a:bodyPr wrap="square" lIns="0" tIns="0" rIns="0" bIns="0" rtlCol="0" anchor="t"/>
+                <a:latin typeface="Consolas" pitchFamily="34" charset="0"/>
+                <a:ea typeface="Consolas" pitchFamily="34" charset="-122"/>
+                <a:cs typeface="Consolas" pitchFamily="34" charset="-120"/>
+              </a:rPr>
+              <a:t>▸ collaborators · invitations</a:t>
+            </a:r>
+            <a:endParaRPr lang="en-US" sz="1000" dirty="0"/>
+          </a:p>
+        </p:txBody>
+      </p:sp>
+      <p:sp>
+        <p:nvSpPr>
+          <p:cNvPr id="18" name="Text 16"/>
+          <p:cNvSpPr/>
+          <p:nvPr/>
+        </p:nvSpPr>
+        <p:spPr>
+          <a:xfrm>
+            <a:off x="5029200" y="2944368"/>
+            <a:ext cx="3840480" cy="320040"/>
+          </a:xfrm>
+          <a:prstGeom prst="rect">
+            <a:avLst/>
+          </a:prstGeom>
+          <a:noFill/>
+          <a:ln/>
+        </p:spPr>
+        <p:txBody>
+          <a:bodyPr wrap="square" lIns="0" tIns="0" rIns="0" bIns="0" rtlCol="0" anchor="ctr"/>
           <a:lstStyle/>
           <a:p>
             <a:pPr indent="0" marL="0">
               <a:buNone/>
             </a:pPr>
             <a:r>
-              <a:rPr lang="en-US" sz="1050" dirty="0">
-                <a:solidFill>
-                  <a:srgbClr val="64748B"/>
-                </a:solidFill>
-                <a:latin typeface="Arial" pitchFamily="34" charset="0"/>
-                <a:ea typeface="Arial" pitchFamily="34" charset="-122"/>
-                <a:cs typeface="Arial" pitchFamily="34" charset="-120"/>
-              </a:rPr>
-              <a:t>声明式服务端状态管理，自动缓存/失效/重取，staleTime 30s</a:t>
-            </a:r>
-            <a:endParaRPr lang="en-US" sz="1050" dirty="0"/>
-          </a:p>
-        </p:txBody>
-      </p:sp>
-      <p:sp>
-        <p:nvSpPr>
-          <p:cNvPr id="17" name="Shape 15"/>
-          <p:cNvSpPr/>
-          <p:nvPr/>
-        </p:nvSpPr>
-        <p:spPr>
-          <a:xfrm>
-            <a:off x="594360" y="2532888"/>
-            <a:ext cx="3886200" cy="1143000"/>
-          </a:xfrm>
-          <a:prstGeom prst="rect">
-            <a:avLst/>
-          </a:prstGeom>
-          <a:solidFill>
-            <a:srgbClr val="F8FAFC"/>
-          </a:solidFill>
-          <a:ln/>
-          <a:effectLst>
-            <a:outerShdw sx="100000" sy="100000" kx="0" ky="0" algn="bl" rotWithShape="0" blurRad="50800" dist="25400" dir="8100000">
-              <a:srgbClr val="000000">
-                <a:alpha val="10000"/>
-              </a:srgbClr>
-            </a:outerShdw>
-          </a:effectLst>
-        </p:spPr>
-      </p:sp>
-      <p:sp>
-        <p:nvSpPr>
-          <p:cNvPr id="18" name="Shape 16"/>
-          <p:cNvSpPr/>
-          <p:nvPr/>
-        </p:nvSpPr>
-        <p:spPr>
-          <a:xfrm>
-            <a:off x="594360" y="2532888"/>
-            <a:ext cx="54864" cy="1143000"/>
-          </a:xfrm>
-          <a:prstGeom prst="rect">
-            <a:avLst/>
-          </a:prstGeom>
-          <a:solidFill>
-            <a:srgbClr val="2563EB"/>
-          </a:solidFill>
-          <a:ln/>
-        </p:spPr>
-      </p:sp>
-      <p:sp>
-        <p:nvSpPr>
-          <p:cNvPr id="19" name="Shape 17"/>
-          <p:cNvSpPr/>
-          <p:nvPr/>
-        </p:nvSpPr>
-        <p:spPr>
-          <a:xfrm>
-            <a:off x="822960" y="2670048"/>
-            <a:ext cx="960120" cy="274320"/>
-          </a:xfrm>
-          <a:prstGeom prst="rect">
-            <a:avLst/>
-          </a:prstGeom>
-          <a:solidFill>
-            <a:srgbClr val="2563EB"/>
-          </a:solidFill>
-          <a:ln/>
-        </p:spPr>
+              <a:rPr lang="en-US" sz="1000" dirty="0">
+                <a:solidFill>
+                  <a:srgbClr val="0F172A"/>
+                </a:solidFill>
+                <a:latin typeface="Consolas" pitchFamily="34" charset="0"/>
+                <a:ea typeface="Consolas" pitchFamily="34" charset="-122"/>
+                <a:cs typeface="Consolas" pitchFamily="34" charset="-120"/>
+              </a:rPr>
+              <a:t>▸ ai_processing_jobs</a:t>
+            </a:r>
+            <a:endParaRPr lang="en-US" sz="1000" dirty="0"/>
+          </a:p>
+        </p:txBody>
+      </p:sp>
+      <p:sp>
+        <p:nvSpPr>
+          <p:cNvPr id="19" name="Text 17"/>
+          <p:cNvSpPr/>
+          <p:nvPr/>
+        </p:nvSpPr>
+        <p:spPr>
+          <a:xfrm>
+            <a:off x="5029200" y="3291840"/>
+            <a:ext cx="3840480" cy="320040"/>
+          </a:xfrm>
+          <a:prstGeom prst="rect">
+            <a:avLst/>
+          </a:prstGeom>
+          <a:noFill/>
+          <a:ln/>
+        </p:spPr>
+        <p:txBody>
+          <a:bodyPr wrap="square" lIns="0" tIns="0" rIns="0" bIns="0" rtlCol="0" anchor="ctr"/>
+          <a:lstStyle/>
+          <a:p>
+            <a:pPr indent="0" marL="0">
+              <a:buNone/>
+            </a:pPr>
+            <a:r>
+              <a:rPr lang="en-US" sz="1000" dirty="0">
+                <a:solidFill>
+                  <a:srgbClr val="0F172A"/>
+                </a:solidFill>
+                <a:latin typeface="Consolas" pitchFamily="34" charset="0"/>
+                <a:ea typeface="Consolas" pitchFamily="34" charset="-122"/>
+                <a:cs typeface="Consolas" pitchFamily="34" charset="-120"/>
+              </a:rPr>
+              <a:t>▸ operation_logs</a:t>
+            </a:r>
+            <a:endParaRPr lang="en-US" sz="1000" dirty="0"/>
+          </a:p>
+        </p:txBody>
       </p:sp>
       <p:sp>
         <p:nvSpPr>
@@ -6858,32 +7568,32 @@
         </p:nvSpPr>
         <p:spPr>
           <a:xfrm>
-            <a:off x="822960" y="2670048"/>
-            <a:ext cx="960120" cy="274320"/>
-          </a:xfrm>
-          <a:prstGeom prst="rect">
-            <a:avLst/>
-          </a:prstGeom>
-          <a:noFill/>
-          <a:ln/>
-        </p:spPr>
-        <p:txBody>
-          <a:bodyPr wrap="square" lIns="0" tIns="0" rIns="0" bIns="0" rtlCol="0" anchor="ctr"/>
-          <a:lstStyle/>
-          <a:p>
-            <a:pPr algn="ctr" indent="0" marL="0">
-              <a:buNone/>
-            </a:pPr>
-            <a:r>
-              <a:rPr lang="en-US" sz="1000" b="1" dirty="0">
-                <a:solidFill>
-                  <a:srgbClr val="FFFFFF"/>
-                </a:solidFill>
-                <a:latin typeface="Arial" pitchFamily="34" charset="0"/>
-                <a:ea typeface="Arial" pitchFamily="34" charset="-122"/>
-                <a:cs typeface="Arial" pitchFamily="34" charset="-120"/>
-              </a:rPr>
-              <a:t>Auth</a:t>
+            <a:off x="5029200" y="3639312"/>
+            <a:ext cx="3840480" cy="320040"/>
+          </a:xfrm>
+          <a:prstGeom prst="rect">
+            <a:avLst/>
+          </a:prstGeom>
+          <a:noFill/>
+          <a:ln/>
+        </p:spPr>
+        <p:txBody>
+          <a:bodyPr wrap="square" lIns="0" tIns="0" rIns="0" bIns="0" rtlCol="0" anchor="ctr"/>
+          <a:lstStyle/>
+          <a:p>
+            <a:pPr indent="0" marL="0">
+              <a:buNone/>
+            </a:pPr>
+            <a:r>
+              <a:rPr lang="en-US" sz="1000" dirty="0">
+                <a:solidFill>
+                  <a:srgbClr val="0F172A"/>
+                </a:solidFill>
+                <a:latin typeface="Consolas" pitchFamily="34" charset="0"/>
+                <a:ea typeface="Consolas" pitchFamily="34" charset="-122"/>
+                <a:cs typeface="Consolas" pitchFamily="34" charset="-120"/>
+              </a:rPr>
+              <a:t>▸ tier_definitions</a:t>
             </a:r>
             <a:endParaRPr lang="en-US" sz="1000" dirty="0"/>
           </a:p>
@@ -6897,8 +7607,8 @@
         </p:nvSpPr>
         <p:spPr>
           <a:xfrm>
-            <a:off x="1920240" y="2642616"/>
-            <a:ext cx="2377440" cy="320040"/>
+            <a:off x="5029200" y="3986784"/>
+            <a:ext cx="3840480" cy="320040"/>
           </a:xfrm>
           <a:prstGeom prst="rect">
             <a:avLst/>
@@ -6914,17 +7624,17 @@
               <a:buNone/>
             </a:pPr>
             <a:r>
-              <a:rPr lang="en-US" sz="1400" b="1" dirty="0">
+              <a:rPr lang="en-US" sz="1000" dirty="0">
                 <a:solidFill>
                   <a:srgbClr val="0F172A"/>
                 </a:solidFill>
-                <a:latin typeface="Arial" pitchFamily="34" charset="0"/>
-                <a:ea typeface="Arial" pitchFamily="34" charset="-122"/>
-                <a:cs typeface="Arial" pitchFamily="34" charset="-120"/>
-              </a:rPr>
-              <a:t>JWT 双令牌</a:t>
-            </a:r>
-            <a:endParaRPr lang="en-US" sz="1400" dirty="0"/>
+                <a:latin typeface="Consolas" pitchFamily="34" charset="0"/>
+                <a:ea typeface="Consolas" pitchFamily="34" charset="-122"/>
+                <a:cs typeface="Consolas" pitchFamily="34" charset="-120"/>
+              </a:rPr>
+              <a:t>▸ enterprise_api_keys</a:t>
+            </a:r>
+            <a:endParaRPr lang="en-US" sz="1000" dirty="0"/>
           </a:p>
         </p:txBody>
       </p:sp>
@@ -6936,138 +7646,32 @@
         </p:nvSpPr>
         <p:spPr>
           <a:xfrm>
-            <a:off x="822960" y="3063240"/>
-            <a:ext cx="3429000" cy="502920"/>
-          </a:xfrm>
-          <a:prstGeom prst="rect">
-            <a:avLst/>
-          </a:prstGeom>
-          <a:noFill/>
-          <a:ln/>
-        </p:spPr>
-        <p:txBody>
-          <a:bodyPr wrap="square" lIns="0" tIns="0" rIns="0" bIns="0" rtlCol="0" anchor="t"/>
+            <a:off x="5029200" y="4334256"/>
+            <a:ext cx="3840480" cy="320040"/>
+          </a:xfrm>
+          <a:prstGeom prst="rect">
+            <a:avLst/>
+          </a:prstGeom>
+          <a:noFill/>
+          <a:ln/>
+        </p:spPr>
+        <p:txBody>
+          <a:bodyPr wrap="square" lIns="0" tIns="0" rIns="0" bIns="0" rtlCol="0" anchor="ctr"/>
           <a:lstStyle/>
           <a:p>
             <a:pPr indent="0" marL="0">
               <a:buNone/>
             </a:pPr>
             <a:r>
-              <a:rPr lang="en-US" sz="1050" dirty="0">
-                <a:solidFill>
-                  <a:srgbClr val="64748B"/>
-                </a:solidFill>
-                <a:latin typeface="Arial" pitchFamily="34" charset="0"/>
-                <a:ea typeface="Arial" pitchFamily="34" charset="-122"/>
-                <a:cs typeface="Arial" pitchFamily="34" charset="-120"/>
-              </a:rPr>
-              <a:t>Access 15min + Refresh 30天，Argon2 密码哈希，自动续期</a:t>
-            </a:r>
-            <a:endParaRPr lang="en-US" sz="1050" dirty="0"/>
-          </a:p>
-        </p:txBody>
-      </p:sp>
-      <p:sp>
-        <p:nvSpPr>
-          <p:cNvPr id="23" name="Shape 21"/>
-          <p:cNvSpPr/>
-          <p:nvPr/>
-        </p:nvSpPr>
-        <p:spPr>
-          <a:xfrm>
-            <a:off x="4663440" y="2532888"/>
-            <a:ext cx="3886200" cy="1143000"/>
-          </a:xfrm>
-          <a:prstGeom prst="rect">
-            <a:avLst/>
-          </a:prstGeom>
-          <a:solidFill>
-            <a:srgbClr val="F8FAFC"/>
-          </a:solidFill>
-          <a:ln/>
-          <a:effectLst>
-            <a:outerShdw sx="100000" sy="100000" kx="0" ky="0" algn="bl" rotWithShape="0" blurRad="50800" dist="25400" dir="8100000">
-              <a:srgbClr val="000000">
-                <a:alpha val="10000"/>
-              </a:srgbClr>
-            </a:outerShdw>
-          </a:effectLst>
-        </p:spPr>
-      </p:sp>
-      <p:sp>
-        <p:nvSpPr>
-          <p:cNvPr id="24" name="Shape 22"/>
-          <p:cNvSpPr/>
-          <p:nvPr/>
-        </p:nvSpPr>
-        <p:spPr>
-          <a:xfrm>
-            <a:off x="4663440" y="2532888"/>
-            <a:ext cx="54864" cy="1143000"/>
-          </a:xfrm>
-          <a:prstGeom prst="rect">
-            <a:avLst/>
-          </a:prstGeom>
-          <a:solidFill>
-            <a:srgbClr val="2563EB"/>
-          </a:solidFill>
-          <a:ln/>
-        </p:spPr>
-      </p:sp>
-      <p:sp>
-        <p:nvSpPr>
-          <p:cNvPr id="25" name="Shape 23"/>
-          <p:cNvSpPr/>
-          <p:nvPr/>
-        </p:nvSpPr>
-        <p:spPr>
-          <a:xfrm>
-            <a:off x="4892040" y="2670048"/>
-            <a:ext cx="960120" cy="274320"/>
-          </a:xfrm>
-          <a:prstGeom prst="rect">
-            <a:avLst/>
-          </a:prstGeom>
-          <a:solidFill>
-            <a:srgbClr val="2563EB"/>
-          </a:solidFill>
-          <a:ln/>
-        </p:spPr>
-      </p:sp>
-      <p:sp>
-        <p:nvSpPr>
-          <p:cNvPr id="26" name="Text 24"/>
-          <p:cNvSpPr/>
-          <p:nvPr/>
-        </p:nvSpPr>
-        <p:spPr>
-          <a:xfrm>
-            <a:off x="4892040" y="2670048"/>
-            <a:ext cx="960120" cy="274320"/>
-          </a:xfrm>
-          <a:prstGeom prst="rect">
-            <a:avLst/>
-          </a:prstGeom>
-          <a:noFill/>
-          <a:ln/>
-        </p:spPr>
-        <p:txBody>
-          <a:bodyPr wrap="square" lIns="0" tIns="0" rIns="0" bIns="0" rtlCol="0" anchor="ctr"/>
-          <a:lstStyle/>
-          <a:p>
-            <a:pPr algn="ctr" indent="0" marL="0">
-              <a:buNone/>
-            </a:pPr>
-            <a:r>
-              <a:rPr lang="en-US" sz="1000" b="1" dirty="0">
-                <a:solidFill>
-                  <a:srgbClr val="FFFFFF"/>
-                </a:solidFill>
-                <a:latin typeface="Arial" pitchFamily="34" charset="0"/>
-                <a:ea typeface="Arial" pitchFamily="34" charset="-122"/>
-                <a:cs typeface="Arial" pitchFamily="34" charset="-120"/>
-              </a:rPr>
-              <a:t>DB</a:t>
+              <a:rPr lang="en-US" sz="1000" dirty="0">
+                <a:solidFill>
+                  <a:srgbClr val="0F172A"/>
+                </a:solidFill>
+                <a:latin typeface="Consolas" pitchFamily="34" charset="0"/>
+                <a:ea typeface="Consolas" pitchFamily="34" charset="-122"/>
+                <a:cs typeface="Consolas" pitchFamily="34" charset="-120"/>
+              </a:rPr>
+              <a:t>▸ cache_invalidation_keys</a:t>
             </a:r>
             <a:endParaRPr lang="en-US" sz="1000" dirty="0"/>
           </a:p>
@@ -7075,14 +7679,14 @@
       </p:sp>
       <p:sp>
         <p:nvSpPr>
-          <p:cNvPr id="27" name="Text 25"/>
-          <p:cNvSpPr/>
-          <p:nvPr/>
-        </p:nvSpPr>
-        <p:spPr>
-          <a:xfrm>
-            <a:off x="5989320" y="2642616"/>
-            <a:ext cx="2377440" cy="320040"/>
+          <p:cNvPr id="23" name="Text 21"/>
+          <p:cNvSpPr/>
+          <p:nvPr/>
+        </p:nvSpPr>
+        <p:spPr>
+          <a:xfrm>
+            <a:off x="5029200" y="4681728"/>
+            <a:ext cx="3840480" cy="320040"/>
           </a:xfrm>
           <a:prstGeom prst="rect">
             <a:avLst/>
@@ -7098,424 +7702,17 @@
               <a:buNone/>
             </a:pPr>
             <a:r>
-              <a:rPr lang="en-US" sz="1400" b="1" dirty="0">
+              <a:rPr lang="en-US" sz="1000" dirty="0">
                 <a:solidFill>
                   <a:srgbClr val="0F172A"/>
                 </a:solidFill>
-                <a:latin typeface="Arial" pitchFamily="34" charset="0"/>
-                <a:ea typeface="Arial" pitchFamily="34" charset="-122"/>
-                <a:cs typeface="Arial" pitchFamily="34" charset="-120"/>
-              </a:rPr>
-              <a:t>PostgreSQL 16</a:t>
-            </a:r>
-            <a:endParaRPr lang="en-US" sz="1400" dirty="0"/>
-          </a:p>
-        </p:txBody>
-      </p:sp>
-      <p:sp>
-        <p:nvSpPr>
-          <p:cNvPr id="28" name="Text 26"/>
-          <p:cNvSpPr/>
-          <p:nvPr/>
-        </p:nvSpPr>
-        <p:spPr>
-          <a:xfrm>
-            <a:off x="4892040" y="3063240"/>
-            <a:ext cx="3429000" cy="502920"/>
-          </a:xfrm>
-          <a:prstGeom prst="rect">
-            <a:avLst/>
-          </a:prstGeom>
-          <a:noFill/>
-          <a:ln/>
-        </p:spPr>
-        <p:txBody>
-          <a:bodyPr wrap="square" lIns="0" tIns="0" rIns="0" bIns="0" rtlCol="0" anchor="t"/>
-          <a:lstStyle/>
-          <a:p>
-            <a:pPr indent="0" marL="0">
-              <a:buNone/>
-            </a:pPr>
-            <a:r>
-              <a:rPr lang="en-US" sz="1050" dirty="0">
-                <a:solidFill>
-                  <a:srgbClr val="64748B"/>
-                </a:solidFill>
-                <a:latin typeface="Arial" pitchFamily="34" charset="0"/>
-                <a:ea typeface="Arial" pitchFamily="34" charset="-122"/>
-                <a:cs typeface="Arial" pitchFamily="34" charset="-120"/>
-              </a:rPr>
-              <a:t>Native UUID 主键，JSONB 文档存储，TIMESTAMPTZ 时区感知</a:t>
-            </a:r>
-            <a:endParaRPr lang="en-US" sz="1050" dirty="0"/>
-          </a:p>
-        </p:txBody>
-      </p:sp>
-      <p:sp>
-        <p:nvSpPr>
-          <p:cNvPr id="29" name="Shape 27"/>
-          <p:cNvSpPr/>
-          <p:nvPr/>
-        </p:nvSpPr>
-        <p:spPr>
-          <a:xfrm>
-            <a:off x="594360" y="3877056"/>
-            <a:ext cx="3886200" cy="1143000"/>
-          </a:xfrm>
-          <a:prstGeom prst="rect">
-            <a:avLst/>
-          </a:prstGeom>
-          <a:solidFill>
-            <a:srgbClr val="F8FAFC"/>
-          </a:solidFill>
-          <a:ln/>
-          <a:effectLst>
-            <a:outerShdw sx="100000" sy="100000" kx="0" ky="0" algn="bl" rotWithShape="0" blurRad="50800" dist="25400" dir="8100000">
-              <a:srgbClr val="000000">
-                <a:alpha val="10000"/>
-              </a:srgbClr>
-            </a:outerShdw>
-          </a:effectLst>
-        </p:spPr>
-      </p:sp>
-      <p:sp>
-        <p:nvSpPr>
-          <p:cNvPr id="30" name="Shape 28"/>
-          <p:cNvSpPr/>
-          <p:nvPr/>
-        </p:nvSpPr>
-        <p:spPr>
-          <a:xfrm>
-            <a:off x="594360" y="3877056"/>
-            <a:ext cx="54864" cy="1143000"/>
-          </a:xfrm>
-          <a:prstGeom prst="rect">
-            <a:avLst/>
-          </a:prstGeom>
-          <a:solidFill>
-            <a:srgbClr val="2563EB"/>
-          </a:solidFill>
-          <a:ln/>
-        </p:spPr>
-      </p:sp>
-      <p:sp>
-        <p:nvSpPr>
-          <p:cNvPr id="31" name="Shape 29"/>
-          <p:cNvSpPr/>
-          <p:nvPr/>
-        </p:nvSpPr>
-        <p:spPr>
-          <a:xfrm>
-            <a:off x="822960" y="4014216"/>
-            <a:ext cx="960120" cy="274320"/>
-          </a:xfrm>
-          <a:prstGeom prst="rect">
-            <a:avLst/>
-          </a:prstGeom>
-          <a:solidFill>
-            <a:srgbClr val="2563EB"/>
-          </a:solidFill>
-          <a:ln/>
-        </p:spPr>
-      </p:sp>
-      <p:sp>
-        <p:nvSpPr>
-          <p:cNvPr id="32" name="Text 30"/>
-          <p:cNvSpPr/>
-          <p:nvPr/>
-        </p:nvSpPr>
-        <p:spPr>
-          <a:xfrm>
-            <a:off x="822960" y="4014216"/>
-            <a:ext cx="960120" cy="274320"/>
-          </a:xfrm>
-          <a:prstGeom prst="rect">
-            <a:avLst/>
-          </a:prstGeom>
-          <a:noFill/>
-          <a:ln/>
-        </p:spPr>
-        <p:txBody>
-          <a:bodyPr wrap="square" lIns="0" tIns="0" rIns="0" bIns="0" rtlCol="0" anchor="ctr"/>
-          <a:lstStyle/>
-          <a:p>
-            <a:pPr algn="ctr" indent="0" marL="0">
-              <a:buNone/>
-            </a:pPr>
-            <a:r>
-              <a:rPr lang="en-US" sz="1000" b="1" dirty="0">
-                <a:solidFill>
-                  <a:srgbClr val="FFFFFF"/>
-                </a:solidFill>
-                <a:latin typeface="Arial" pitchFamily="34" charset="0"/>
-                <a:ea typeface="Arial" pitchFamily="34" charset="-122"/>
-                <a:cs typeface="Arial" pitchFamily="34" charset="-120"/>
-              </a:rPr>
-              <a:t>ORM</a:t>
+                <a:latin typeface="Consolas" pitchFamily="34" charset="0"/>
+                <a:ea typeface="Consolas" pitchFamily="34" charset="-122"/>
+                <a:cs typeface="Consolas" pitchFamily="34" charset="-120"/>
+              </a:rPr>
+              <a:t>▸ oauth_accounts</a:t>
             </a:r>
             <a:endParaRPr lang="en-US" sz="1000" dirty="0"/>
-          </a:p>
-        </p:txBody>
-      </p:sp>
-      <p:sp>
-        <p:nvSpPr>
-          <p:cNvPr id="33" name="Text 31"/>
-          <p:cNvSpPr/>
-          <p:nvPr/>
-        </p:nvSpPr>
-        <p:spPr>
-          <a:xfrm>
-            <a:off x="1920240" y="3986784"/>
-            <a:ext cx="2377440" cy="320040"/>
-          </a:xfrm>
-          <a:prstGeom prst="rect">
-            <a:avLst/>
-          </a:prstGeom>
-          <a:noFill/>
-          <a:ln/>
-        </p:spPr>
-        <p:txBody>
-          <a:bodyPr wrap="square" lIns="0" tIns="0" rIns="0" bIns="0" rtlCol="0" anchor="ctr"/>
-          <a:lstStyle/>
-          <a:p>
-            <a:pPr indent="0" marL="0">
-              <a:buNone/>
-            </a:pPr>
-            <a:r>
-              <a:rPr lang="en-US" sz="1400" b="1" dirty="0">
-                <a:solidFill>
-                  <a:srgbClr val="0F172A"/>
-                </a:solidFill>
-                <a:latin typeface="Arial" pitchFamily="34" charset="0"/>
-                <a:ea typeface="Arial" pitchFamily="34" charset="-122"/>
-                <a:cs typeface="Arial" pitchFamily="34" charset="-120"/>
-              </a:rPr>
-              <a:t>SQLAlchemy 2.0</a:t>
-            </a:r>
-            <a:endParaRPr lang="en-US" sz="1400" dirty="0"/>
-          </a:p>
-        </p:txBody>
-      </p:sp>
-      <p:sp>
-        <p:nvSpPr>
-          <p:cNvPr id="34" name="Text 32"/>
-          <p:cNvSpPr/>
-          <p:nvPr/>
-        </p:nvSpPr>
-        <p:spPr>
-          <a:xfrm>
-            <a:off x="822960" y="4407408"/>
-            <a:ext cx="3429000" cy="502920"/>
-          </a:xfrm>
-          <a:prstGeom prst="rect">
-            <a:avLst/>
-          </a:prstGeom>
-          <a:noFill/>
-          <a:ln/>
-        </p:spPr>
-        <p:txBody>
-          <a:bodyPr wrap="square" lIns="0" tIns="0" rIns="0" bIns="0" rtlCol="0" anchor="t"/>
-          <a:lstStyle/>
-          <a:p>
-            <a:pPr indent="0" marL="0">
-              <a:buNone/>
-            </a:pPr>
-            <a:r>
-              <a:rPr lang="en-US" sz="1050" dirty="0">
-                <a:solidFill>
-                  <a:srgbClr val="64748B"/>
-                </a:solidFill>
-                <a:latin typeface="Arial" pitchFamily="34" charset="0"/>
-                <a:ea typeface="Arial" pitchFamily="34" charset="-122"/>
-                <a:cs typeface="Arial" pitchFamily="34" charset="-120"/>
-              </a:rPr>
-              <a:t>全异步查询引擎，声明式模型，Alembic 版本化迁移</a:t>
-            </a:r>
-            <a:endParaRPr lang="en-US" sz="1050" dirty="0"/>
-          </a:p>
-        </p:txBody>
-      </p:sp>
-      <p:sp>
-        <p:nvSpPr>
-          <p:cNvPr id="35" name="Shape 33"/>
-          <p:cNvSpPr/>
-          <p:nvPr/>
-        </p:nvSpPr>
-        <p:spPr>
-          <a:xfrm>
-            <a:off x="4663440" y="3877056"/>
-            <a:ext cx="3886200" cy="1143000"/>
-          </a:xfrm>
-          <a:prstGeom prst="rect">
-            <a:avLst/>
-          </a:prstGeom>
-          <a:solidFill>
-            <a:srgbClr val="F8FAFC"/>
-          </a:solidFill>
-          <a:ln/>
-          <a:effectLst>
-            <a:outerShdw sx="100000" sy="100000" kx="0" ky="0" algn="bl" rotWithShape="0" blurRad="50800" dist="25400" dir="8100000">
-              <a:srgbClr val="000000">
-                <a:alpha val="10000"/>
-              </a:srgbClr>
-            </a:outerShdw>
-          </a:effectLst>
-        </p:spPr>
-      </p:sp>
-      <p:sp>
-        <p:nvSpPr>
-          <p:cNvPr id="36" name="Shape 34"/>
-          <p:cNvSpPr/>
-          <p:nvPr/>
-        </p:nvSpPr>
-        <p:spPr>
-          <a:xfrm>
-            <a:off x="4663440" y="3877056"/>
-            <a:ext cx="54864" cy="1143000"/>
-          </a:xfrm>
-          <a:prstGeom prst="rect">
-            <a:avLst/>
-          </a:prstGeom>
-          <a:solidFill>
-            <a:srgbClr val="2563EB"/>
-          </a:solidFill>
-          <a:ln/>
-        </p:spPr>
-      </p:sp>
-      <p:sp>
-        <p:nvSpPr>
-          <p:cNvPr id="37" name="Shape 35"/>
-          <p:cNvSpPr/>
-          <p:nvPr/>
-        </p:nvSpPr>
-        <p:spPr>
-          <a:xfrm>
-            <a:off x="4892040" y="4014216"/>
-            <a:ext cx="960120" cy="274320"/>
-          </a:xfrm>
-          <a:prstGeom prst="rect">
-            <a:avLst/>
-          </a:prstGeom>
-          <a:solidFill>
-            <a:srgbClr val="2563EB"/>
-          </a:solidFill>
-          <a:ln/>
-        </p:spPr>
-      </p:sp>
-      <p:sp>
-        <p:nvSpPr>
-          <p:cNvPr id="38" name="Text 36"/>
-          <p:cNvSpPr/>
-          <p:nvPr/>
-        </p:nvSpPr>
-        <p:spPr>
-          <a:xfrm>
-            <a:off x="4892040" y="4014216"/>
-            <a:ext cx="960120" cy="274320"/>
-          </a:xfrm>
-          <a:prstGeom prst="rect">
-            <a:avLst/>
-          </a:prstGeom>
-          <a:noFill/>
-          <a:ln/>
-        </p:spPr>
-        <p:txBody>
-          <a:bodyPr wrap="square" lIns="0" tIns="0" rIns="0" bIns="0" rtlCol="0" anchor="ctr"/>
-          <a:lstStyle/>
-          <a:p>
-            <a:pPr algn="ctr" indent="0" marL="0">
-              <a:buNone/>
-            </a:pPr>
-            <a:r>
-              <a:rPr lang="en-US" sz="1000" b="1" dirty="0">
-                <a:solidFill>
-                  <a:srgbClr val="FFFFFF"/>
-                </a:solidFill>
-                <a:latin typeface="Arial" pitchFamily="34" charset="0"/>
-                <a:ea typeface="Arial" pitchFamily="34" charset="-122"/>
-                <a:cs typeface="Arial" pitchFamily="34" charset="-120"/>
-              </a:rPr>
-              <a:t>Task</a:t>
-            </a:r>
-            <a:endParaRPr lang="en-US" sz="1000" dirty="0"/>
-          </a:p>
-        </p:txBody>
-      </p:sp>
-      <p:sp>
-        <p:nvSpPr>
-          <p:cNvPr id="39" name="Text 37"/>
-          <p:cNvSpPr/>
-          <p:nvPr/>
-        </p:nvSpPr>
-        <p:spPr>
-          <a:xfrm>
-            <a:off x="5989320" y="3986784"/>
-            <a:ext cx="2377440" cy="320040"/>
-          </a:xfrm>
-          <a:prstGeom prst="rect">
-            <a:avLst/>
-          </a:prstGeom>
-          <a:noFill/>
-          <a:ln/>
-        </p:spPr>
-        <p:txBody>
-          <a:bodyPr wrap="square" lIns="0" tIns="0" rIns="0" bIns="0" rtlCol="0" anchor="ctr"/>
-          <a:lstStyle/>
-          <a:p>
-            <a:pPr indent="0" marL="0">
-              <a:buNone/>
-            </a:pPr>
-            <a:r>
-              <a:rPr lang="en-US" sz="1400" b="1" dirty="0">
-                <a:solidFill>
-                  <a:srgbClr val="0F172A"/>
-                </a:solidFill>
-                <a:latin typeface="Arial" pitchFamily="34" charset="0"/>
-                <a:ea typeface="Arial" pitchFamily="34" charset="-122"/>
-                <a:cs typeface="Arial" pitchFamily="34" charset="-120"/>
-              </a:rPr>
-              <a:t>Celery + Redis</a:t>
-            </a:r>
-            <a:endParaRPr lang="en-US" sz="1400" dirty="0"/>
-          </a:p>
-        </p:txBody>
-      </p:sp>
-      <p:sp>
-        <p:nvSpPr>
-          <p:cNvPr id="40" name="Text 38"/>
-          <p:cNvSpPr/>
-          <p:nvPr/>
-        </p:nvSpPr>
-        <p:spPr>
-          <a:xfrm>
-            <a:off x="4892040" y="4407408"/>
-            <a:ext cx="3429000" cy="502920"/>
-          </a:xfrm>
-          <a:prstGeom prst="rect">
-            <a:avLst/>
-          </a:prstGeom>
-          <a:noFill/>
-          <a:ln/>
-        </p:spPr>
-        <p:txBody>
-          <a:bodyPr wrap="square" lIns="0" tIns="0" rIns="0" bIns="0" rtlCol="0" anchor="t"/>
-          <a:lstStyle/>
-          <a:p>
-            <a:pPr indent="0" marL="0">
-              <a:buNone/>
-            </a:pPr>
-            <a:r>
-              <a:rPr lang="en-US" sz="1050" dirty="0">
-                <a:solidFill>
-                  <a:srgbClr val="64748B"/>
-                </a:solidFill>
-                <a:latin typeface="Arial" pitchFamily="34" charset="0"/>
-                <a:ea typeface="Arial" pitchFamily="34" charset="-122"/>
-                <a:cs typeface="Arial" pitchFamily="34" charset="-120"/>
-              </a:rPr>
-              <a:t>大文档异步 AI 处理，chord/group 并发编排，实时进度反馈</a:t>
-            </a:r>
-            <a:endParaRPr lang="en-US" sz="1050" dirty="0"/>
           </a:p>
         </p:txBody>
       </p:sp>
@@ -7655,7 +7852,7 @@
               <a:buNone/>
             </a:pPr>
             <a:r>
-              <a:rPr lang="en-US" sz="4800" b="1" dirty="0">
+              <a:rPr lang="en-US" sz="4400" b="1" dirty="0">
                 <a:solidFill>
                   <a:srgbClr val="028090"/>
                 </a:solidFill>
@@ -7665,7 +7862,7 @@
               </a:rPr>
               <a:t>16</a:t>
             </a:r>
-            <a:endParaRPr lang="en-US" sz="4800" dirty="0"/>
+            <a:endParaRPr lang="en-US" sz="4400" dirty="0"/>
           </a:p>
         </p:txBody>
       </p:sp>
@@ -7733,7 +7930,7 @@
               <a:buNone/>
             </a:pPr>
             <a:r>
-              <a:rPr lang="en-US" sz="4800" b="1" dirty="0">
+              <a:rPr lang="en-US" sz="4400" b="1" dirty="0">
                 <a:solidFill>
                   <a:srgbClr val="028090"/>
                 </a:solidFill>
@@ -7741,9 +7938,9 @@
                 <a:ea typeface="Arial Black" pitchFamily="34" charset="-122"/>
                 <a:cs typeface="Arial Black" pitchFamily="34" charset="-120"/>
               </a:rPr>
-              <a:t>10</a:t>
-            </a:r>
-            <a:endParaRPr lang="en-US" sz="4800" dirty="0"/>
+              <a:t>18/18</a:t>
+            </a:r>
+            <a:endParaRPr lang="en-US" sz="4400" dirty="0"/>
           </a:p>
         </p:txBody>
       </p:sp>
@@ -7780,7 +7977,7 @@
                 <a:ea typeface="Arial" pitchFamily="34" charset="-122"/>
                 <a:cs typeface="Arial" pitchFamily="34" charset="-120"/>
               </a:rPr>
-              <a:t>API 路由模块</a:t>
+              <a:t>测试通过</a:t>
             </a:r>
             <a:endParaRPr lang="en-US" sz="1300" dirty="0"/>
           </a:p>
@@ -7811,7 +8008,7 @@
               <a:buNone/>
             </a:pPr>
             <a:r>
-              <a:rPr lang="en-US" sz="4800" b="1" dirty="0">
+              <a:rPr lang="en-US" sz="4400" b="1" dirty="0">
                 <a:solidFill>
                   <a:srgbClr val="028090"/>
                 </a:solidFill>
@@ -7819,9 +8016,9 @@
                 <a:ea typeface="Arial Black" pitchFamily="34" charset="-122"/>
                 <a:cs typeface="Arial Black" pitchFamily="34" charset="-120"/>
               </a:rPr>
-              <a:t>11</a:t>
-            </a:r>
-            <a:endParaRPr lang="en-US" sz="4800" dirty="0"/>
+              <a:t>9</a:t>
+            </a:r>
+            <a:endParaRPr lang="en-US" sz="4400" dirty="0"/>
           </a:p>
         </p:txBody>
       </p:sp>
@@ -7858,7 +8055,7 @@
                 <a:ea typeface="Arial" pitchFamily="34" charset="-122"/>
                 <a:cs typeface="Arial" pitchFamily="34" charset="-120"/>
               </a:rPr>
-              <a:t>前端页面</a:t>
+              <a:t>AI 测试</a:t>
             </a:r>
             <a:endParaRPr lang="en-US" sz="1300" dirty="0"/>
           </a:p>
@@ -7889,7 +8086,7 @@
               <a:buNone/>
             </a:pPr>
             <a:r>
-              <a:rPr lang="en-US" sz="4800" b="1" dirty="0">
+              <a:rPr lang="en-US" sz="4400" b="1" dirty="0">
                 <a:solidFill>
                   <a:srgbClr val="028090"/>
                 </a:solidFill>
@@ -7897,9 +8094,9 @@
                 <a:ea typeface="Arial Black" pitchFamily="34" charset="-122"/>
                 <a:cs typeface="Arial Black" pitchFamily="34" charset="-120"/>
               </a:rPr>
-              <a:t>4</a:t>
-            </a:r>
-            <a:endParaRPr lang="en-US" sz="4800" dirty="0"/>
+              <a:t>3</a:t>
+            </a:r>
+            <a:endParaRPr lang="en-US" sz="4400" dirty="0"/>
           </a:p>
         </p:txBody>
       </p:sp>
@@ -7936,7 +8133,7 @@
                 <a:ea typeface="Arial" pitchFamily="34" charset="-122"/>
                 <a:cs typeface="Arial" pitchFamily="34" charset="-120"/>
               </a:rPr>
-              <a:t>文档查看器</a:t>
+              <a:t>文档格式</a:t>
             </a:r>
             <a:endParaRPr lang="en-US" sz="1300" dirty="0"/>
           </a:p>
@@ -7984,45 +8181,6 @@
       <p:sp>
         <p:nvSpPr>
           <p:cNvPr id="14" name="Text 12"/>
-          <p:cNvSpPr/>
-          <p:nvPr/>
-        </p:nvSpPr>
-        <p:spPr>
-          <a:xfrm>
-            <a:off x="640080" y="3520440"/>
-            <a:ext cx="7863840" cy="365760"/>
-          </a:xfrm>
-          <a:prstGeom prst="rect">
-            <a:avLst/>
-          </a:prstGeom>
-          <a:noFill/>
-          <a:ln/>
-        </p:spPr>
-        <p:txBody>
-          <a:bodyPr wrap="square" lIns="0" tIns="0" rIns="0" bIns="0" rtlCol="0" anchor="ctr"/>
-          <a:lstStyle/>
-          <a:p>
-            <a:pPr indent="0" marL="0">
-              <a:buNone/>
-            </a:pPr>
-            <a:r>
-              <a:rPr lang="en-US" sz="1400" dirty="0">
-                <a:solidFill>
-                  <a:srgbClr val="94A3B8"/>
-                </a:solidFill>
-                <a:latin typeface="Arial" pitchFamily="34" charset="0"/>
-                <a:ea typeface="Arial" pitchFamily="34" charset="-122"/>
-                <a:cs typeface="Arial" pitchFamily="34" charset="-120"/>
-              </a:rPr>
-              <a:t>AI 驱动的文档管理 · 实时協作 · 版本控制 · GitHub 集成 · 多格式支持</a:t>
-            </a:r>
-            <a:endParaRPr lang="en-US" sz="1400" dirty="0"/>
-          </a:p>
-        </p:txBody>
-      </p:sp>
-      <p:sp>
-        <p:nvSpPr>
-          <p:cNvPr id="15" name="Text 13"/>
           <p:cNvSpPr/>
           <p:nvPr/>
         </p:nvSpPr>
@@ -8061,7 +8219,7 @@
       </p:sp>
       <p:sp>
         <p:nvSpPr>
-          <p:cNvPr id="16" name="Shape 14"/>
+          <p:cNvPr id="15" name="Shape 13"/>
           <p:cNvSpPr/>
           <p:nvPr/>
         </p:nvSpPr>
